--- a/media/module7/slides.pptx
+++ b/media/module7/slides.pptx
@@ -27,6 +27,25 @@
     <p:sldId id="275" r:id="rId27"/>
     <p:sldId id="276" r:id="rId28"/>
     <p:sldId id="277" r:id="rId29"/>
+    <p:sldId id="278" r:id="rId30"/>
+    <p:sldId id="279" r:id="rId31"/>
+    <p:sldId id="280" r:id="rId32"/>
+    <p:sldId id="281" r:id="rId33"/>
+    <p:sldId id="282" r:id="rId34"/>
+    <p:sldId id="283" r:id="rId35"/>
+    <p:sldId id="284" r:id="rId36"/>
+    <p:sldId id="285" r:id="rId37"/>
+    <p:sldId id="286" r:id="rId38"/>
+    <p:sldId id="287" r:id="rId39"/>
+    <p:sldId id="288" r:id="rId40"/>
+    <p:sldId id="289" r:id="rId41"/>
+    <p:sldId id="290" r:id="rId42"/>
+    <p:sldId id="291" r:id="rId43"/>
+    <p:sldId id="292" r:id="rId44"/>
+    <p:sldId id="293" r:id="rId45"/>
+    <p:sldId id="294" r:id="rId46"/>
+    <p:sldId id="295" r:id="rId47"/>
+    <p:sldId id="296" r:id="rId48"/>
   </p:sldIdLst>
   <p:sldSz cx="12191695" cy="6858000" type="screen4x3"/>
   <p:notesSz cx="6858000" cy="9144000"/>
@@ -523,7 +542,7 @@
           <a:lstStyle/>
           <a:p>
             <a:r>
-              <a:t>From MODULE7 Topics Covered.</a:t>
+              <a:t>From docs/MODULE7.md — read guides before running demos.</a:t>
             </a:r>
           </a:p>
         </p:txBody>
@@ -593,7 +612,7 @@
           <a:lstStyle/>
           <a:p>
             <a:r>
-              <a:t>Hands-on: module7/examples/port_style_compare/</a:t>
+              <a:t>Hands-on: module7/examples/case_versions/</a:t>
             </a:r>
           </a:p>
         </p:txBody>
@@ -663,7 +682,567 @@
           <a:lstStyle/>
           <a:p>
             <a:r>
-              <a:t>Hands-on: module7/examples/no_defparam/</a:t>
+              <a:t>module7/examples/version_table/README.md</a:t>
+            </a:r>
+          </a:p>
+        </p:txBody>
+      </p:sp>
+      <p:sp>
+        <p:nvSpPr>
+          <p:cNvPr id="4" name="Slide Number Placeholder 3"/>
+          <p:cNvSpPr>
+            <a:spLocks noGrp="1"/>
+          </p:cNvSpPr>
+          <p:nvPr>
+            <p:ph type="sldNum" idx="5" sz="quarter"/>
+          </p:nvPr>
+        </p:nvSpPr>
+        <p:spPr/>
+      </p:sp>
+    </p:spTree>
+  </p:cSld>
+  <p:clrMapOvr>
+    <a:masterClrMapping/>
+  </p:clrMapOvr>
+</p:notes>
+</file>
+
+<file path=ppt/notesSlides/notesSlide12.xml><?xml version="1.0" encoding="utf-8"?>
+<p:notes xmlns:a="http://schemas.openxmlformats.org/drawingml/2006/main" xmlns:p="http://schemas.openxmlformats.org/presentationml/2006/main" xmlns:r="http://schemas.openxmlformats.org/officeDocument/2006/relationships">
+  <p:cSld>
+    <p:spTree>
+      <p:nvGrpSpPr>
+        <p:cNvPr id="1" name=""/>
+        <p:cNvGrpSpPr/>
+        <p:nvPr/>
+      </p:nvGrpSpPr>
+      <p:grpSpPr>
+        <a:xfrm>
+          <a:off x="0" y="0"/>
+          <a:ext cx="0" cy="0"/>
+          <a:chOff x="0" y="0"/>
+          <a:chExt cx="0" cy="0"/>
+        </a:xfrm>
+      </p:grpSpPr>
+      <p:sp>
+        <p:nvSpPr>
+          <p:cNvPr id="2" name="Slide Image Placeholder 1"/>
+          <p:cNvSpPr>
+            <a:spLocks noGrp="1"/>
+          </p:cNvSpPr>
+          <p:nvPr>
+            <p:ph type="sldImg" idx="2"/>
+          </p:nvPr>
+        </p:nvSpPr>
+        <p:spPr/>
+      </p:sp>
+      <p:sp>
+        <p:nvSpPr>
+          <p:cNvPr id="3" name="Notes Placeholder 2"/>
+          <p:cNvSpPr>
+            <a:spLocks noGrp="1"/>
+          </p:cNvSpPr>
+          <p:nvPr>
+            <p:ph type="body" idx="3" sz="quarter"/>
+          </p:nvPr>
+        </p:nvSpPr>
+        <p:spPr/>
+        <p:txBody>
+          <a:bodyPr/>
+          <a:lstStyle/>
+          <a:p>
+            <a:r>
+              <a:t>Hands-on: module7/examples/version_table/</a:t>
+            </a:r>
+          </a:p>
+        </p:txBody>
+      </p:sp>
+      <p:sp>
+        <p:nvSpPr>
+          <p:cNvPr id="4" name="Slide Number Placeholder 3"/>
+          <p:cNvSpPr>
+            <a:spLocks noGrp="1"/>
+          </p:cNvSpPr>
+          <p:nvPr>
+            <p:ph type="sldNum" idx="5" sz="quarter"/>
+          </p:nvPr>
+        </p:nvSpPr>
+        <p:spPr/>
+      </p:sp>
+    </p:spTree>
+  </p:cSld>
+  <p:clrMapOvr>
+    <a:masterClrMapping/>
+  </p:clrMapOvr>
+</p:notes>
+</file>
+
+<file path=ppt/notesSlides/notesSlide13.xml><?xml version="1.0" encoding="utf-8"?>
+<p:notes xmlns:a="http://schemas.openxmlformats.org/drawingml/2006/main" xmlns:p="http://schemas.openxmlformats.org/presentationml/2006/main" xmlns:r="http://schemas.openxmlformats.org/officeDocument/2006/relationships">
+  <p:cSld>
+    <p:spTree>
+      <p:nvGrpSpPr>
+        <p:cNvPr id="1" name=""/>
+        <p:cNvGrpSpPr/>
+        <p:nvPr/>
+      </p:nvGrpSpPr>
+      <p:grpSpPr>
+        <a:xfrm>
+          <a:off x="0" y="0"/>
+          <a:ext cx="0" cy="0"/>
+          <a:chOff x="0" y="0"/>
+          <a:chExt cx="0" cy="0"/>
+        </a:xfrm>
+      </p:grpSpPr>
+      <p:sp>
+        <p:nvSpPr>
+          <p:cNvPr id="2" name="Slide Image Placeholder 1"/>
+          <p:cNvSpPr>
+            <a:spLocks noGrp="1"/>
+          </p:cNvSpPr>
+          <p:nvPr>
+            <p:ph type="sldImg" idx="2"/>
+          </p:nvPr>
+        </p:nvSpPr>
+        <p:spPr/>
+      </p:sp>
+      <p:sp>
+        <p:nvSpPr>
+          <p:cNvPr id="3" name="Notes Placeholder 2"/>
+          <p:cNvSpPr>
+            <a:spLocks noGrp="1"/>
+          </p:cNvSpPr>
+          <p:nvPr>
+            <p:ph type="body" idx="3" sz="quarter"/>
+          </p:nvPr>
+        </p:nvSpPr>
+        <p:spPr/>
+        <p:txBody>
+          <a:bodyPr/>
+          <a:lstStyle/>
+          <a:p>
+            <a:r>
+              <a:t>module7/examples/version_selection/README.md</a:t>
+            </a:r>
+          </a:p>
+        </p:txBody>
+      </p:sp>
+      <p:sp>
+        <p:nvSpPr>
+          <p:cNvPr id="4" name="Slide Number Placeholder 3"/>
+          <p:cNvSpPr>
+            <a:spLocks noGrp="1"/>
+          </p:cNvSpPr>
+          <p:nvPr>
+            <p:ph type="sldNum" idx="5" sz="quarter"/>
+          </p:nvPr>
+        </p:nvSpPr>
+        <p:spPr/>
+      </p:sp>
+    </p:spTree>
+  </p:cSld>
+  <p:clrMapOvr>
+    <a:masterClrMapping/>
+  </p:clrMapOvr>
+</p:notes>
+</file>
+
+<file path=ppt/notesSlides/notesSlide14.xml><?xml version="1.0" encoding="utf-8"?>
+<p:notes xmlns:a="http://schemas.openxmlformats.org/drawingml/2006/main" xmlns:p="http://schemas.openxmlformats.org/presentationml/2006/main" xmlns:r="http://schemas.openxmlformats.org/officeDocument/2006/relationships">
+  <p:cSld>
+    <p:spTree>
+      <p:nvGrpSpPr>
+        <p:cNvPr id="1" name=""/>
+        <p:cNvGrpSpPr/>
+        <p:nvPr/>
+      </p:nvGrpSpPr>
+      <p:grpSpPr>
+        <a:xfrm>
+          <a:off x="0" y="0"/>
+          <a:ext cx="0" cy="0"/>
+          <a:chOff x="0" y="0"/>
+          <a:chExt cx="0" cy="0"/>
+        </a:xfrm>
+      </p:grpSpPr>
+      <p:sp>
+        <p:nvSpPr>
+          <p:cNvPr id="2" name="Slide Image Placeholder 1"/>
+          <p:cNvSpPr>
+            <a:spLocks noGrp="1"/>
+          </p:cNvSpPr>
+          <p:nvPr>
+            <p:ph type="sldImg" idx="2"/>
+          </p:nvPr>
+        </p:nvSpPr>
+        <p:spPr/>
+      </p:sp>
+      <p:sp>
+        <p:nvSpPr>
+          <p:cNvPr id="3" name="Notes Placeholder 2"/>
+          <p:cNvSpPr>
+            <a:spLocks noGrp="1"/>
+          </p:cNvSpPr>
+          <p:nvPr>
+            <p:ph type="body" idx="3" sz="quarter"/>
+          </p:nvPr>
+        </p:nvSpPr>
+        <p:spPr/>
+        <p:txBody>
+          <a:bodyPr/>
+          <a:lstStyle/>
+          <a:p>
+            <a:r>
+              <a:t>Hands-on: module7/examples/version_selection/</a:t>
+            </a:r>
+          </a:p>
+        </p:txBody>
+      </p:sp>
+      <p:sp>
+        <p:nvSpPr>
+          <p:cNvPr id="4" name="Slide Number Placeholder 3"/>
+          <p:cNvSpPr>
+            <a:spLocks noGrp="1"/>
+          </p:cNvSpPr>
+          <p:nvPr>
+            <p:ph type="sldNum" idx="5" sz="quarter"/>
+          </p:nvPr>
+        </p:nvSpPr>
+        <p:spPr/>
+      </p:sp>
+    </p:spTree>
+  </p:cSld>
+  <p:clrMapOvr>
+    <a:masterClrMapping/>
+  </p:clrMapOvr>
+</p:notes>
+</file>
+
+<file path=ppt/notesSlides/notesSlide15.xml><?xml version="1.0" encoding="utf-8"?>
+<p:notes xmlns:a="http://schemas.openxmlformats.org/drawingml/2006/main" xmlns:p="http://schemas.openxmlformats.org/presentationml/2006/main" xmlns:r="http://schemas.openxmlformats.org/officeDocument/2006/relationships">
+  <p:cSld>
+    <p:spTree>
+      <p:nvGrpSpPr>
+        <p:cNvPr id="1" name=""/>
+        <p:cNvGrpSpPr/>
+        <p:nvPr/>
+      </p:nvGrpSpPr>
+      <p:grpSpPr>
+        <a:xfrm>
+          <a:off x="0" y="0"/>
+          <a:ext cx="0" cy="0"/>
+          <a:chOff x="0" y="0"/>
+          <a:chExt cx="0" cy="0"/>
+        </a:xfrm>
+      </p:grpSpPr>
+      <p:sp>
+        <p:nvSpPr>
+          <p:cNvPr id="2" name="Slide Image Placeholder 1"/>
+          <p:cNvSpPr>
+            <a:spLocks noGrp="1"/>
+          </p:cNvSpPr>
+          <p:nvPr>
+            <p:ph type="sldImg" idx="2"/>
+          </p:nvPr>
+        </p:nvSpPr>
+        <p:spPr/>
+      </p:sp>
+      <p:sp>
+        <p:nvSpPr>
+          <p:cNvPr id="3" name="Notes Placeholder 2"/>
+          <p:cNvSpPr>
+            <a:spLocks noGrp="1"/>
+          </p:cNvSpPr>
+          <p:nvPr>
+            <p:ph type="body" idx="3" sz="quarter"/>
+          </p:nvPr>
+        </p:nvSpPr>
+        <p:spPr/>
+        <p:txBody>
+          <a:bodyPr/>
+          <a:lstStyle/>
+          <a:p>
+            <a:r>
+              <a:t>module7/examples/migration_checklist/README.md</a:t>
+            </a:r>
+          </a:p>
+        </p:txBody>
+      </p:sp>
+      <p:sp>
+        <p:nvSpPr>
+          <p:cNvPr id="4" name="Slide Number Placeholder 3"/>
+          <p:cNvSpPr>
+            <a:spLocks noGrp="1"/>
+          </p:cNvSpPr>
+          <p:nvPr>
+            <p:ph type="sldNum" idx="5" sz="quarter"/>
+          </p:nvPr>
+        </p:nvSpPr>
+        <p:spPr/>
+      </p:sp>
+    </p:spTree>
+  </p:cSld>
+  <p:clrMapOvr>
+    <a:masterClrMapping/>
+  </p:clrMapOvr>
+</p:notes>
+</file>
+
+<file path=ppt/notesSlides/notesSlide16.xml><?xml version="1.0" encoding="utf-8"?>
+<p:notes xmlns:a="http://schemas.openxmlformats.org/drawingml/2006/main" xmlns:p="http://schemas.openxmlformats.org/presentationml/2006/main" xmlns:r="http://schemas.openxmlformats.org/officeDocument/2006/relationships">
+  <p:cSld>
+    <p:spTree>
+      <p:nvGrpSpPr>
+        <p:cNvPr id="1" name=""/>
+        <p:cNvGrpSpPr/>
+        <p:nvPr/>
+      </p:nvGrpSpPr>
+      <p:grpSpPr>
+        <a:xfrm>
+          <a:off x="0" y="0"/>
+          <a:ext cx="0" cy="0"/>
+          <a:chOff x="0" y="0"/>
+          <a:chExt cx="0" cy="0"/>
+        </a:xfrm>
+      </p:grpSpPr>
+      <p:sp>
+        <p:nvSpPr>
+          <p:cNvPr id="2" name="Slide Image Placeholder 1"/>
+          <p:cNvSpPr>
+            <a:spLocks noGrp="1"/>
+          </p:cNvSpPr>
+          <p:nvPr>
+            <p:ph type="sldImg" idx="2"/>
+          </p:nvPr>
+        </p:nvSpPr>
+        <p:spPr/>
+      </p:sp>
+      <p:sp>
+        <p:nvSpPr>
+          <p:cNvPr id="3" name="Notes Placeholder 2"/>
+          <p:cNvSpPr>
+            <a:spLocks noGrp="1"/>
+          </p:cNvSpPr>
+          <p:nvPr>
+            <p:ph type="body" idx="3" sz="quarter"/>
+          </p:nvPr>
+        </p:nvSpPr>
+        <p:spPr/>
+        <p:txBody>
+          <a:bodyPr/>
+          <a:lstStyle/>
+          <a:p>
+            <a:r>
+              <a:t>Hands-on: module7/examples/migration_checklist/</a:t>
+            </a:r>
+          </a:p>
+        </p:txBody>
+      </p:sp>
+      <p:sp>
+        <p:nvSpPr>
+          <p:cNvPr id="4" name="Slide Number Placeholder 3"/>
+          <p:cNvSpPr>
+            <a:spLocks noGrp="1"/>
+          </p:cNvSpPr>
+          <p:nvPr>
+            <p:ph type="sldNum" idx="5" sz="quarter"/>
+          </p:nvPr>
+        </p:nvSpPr>
+        <p:spPr/>
+      </p:sp>
+    </p:spTree>
+  </p:cSld>
+  <p:clrMapOvr>
+    <a:masterClrMapping/>
+  </p:clrMapOvr>
+</p:notes>
+</file>
+
+<file path=ppt/notesSlides/notesSlide17.xml><?xml version="1.0" encoding="utf-8"?>
+<p:notes xmlns:a="http://schemas.openxmlformats.org/drawingml/2006/main" xmlns:p="http://schemas.openxmlformats.org/presentationml/2006/main" xmlns:r="http://schemas.openxmlformats.org/officeDocument/2006/relationships">
+  <p:cSld>
+    <p:spTree>
+      <p:nvGrpSpPr>
+        <p:cNvPr id="1" name=""/>
+        <p:cNvGrpSpPr/>
+        <p:nvPr/>
+      </p:nvGrpSpPr>
+      <p:grpSpPr>
+        <a:xfrm>
+          <a:off x="0" y="0"/>
+          <a:ext cx="0" cy="0"/>
+          <a:chOff x="0" y="0"/>
+          <a:chExt cx="0" cy="0"/>
+        </a:xfrm>
+      </p:grpSpPr>
+      <p:sp>
+        <p:nvSpPr>
+          <p:cNvPr id="2" name="Slide Image Placeholder 1"/>
+          <p:cNvSpPr>
+            <a:spLocks noGrp="1"/>
+          </p:cNvSpPr>
+          <p:nvPr>
+            <p:ph type="sldImg" idx="2"/>
+          </p:nvPr>
+        </p:nvSpPr>
+        <p:spPr/>
+      </p:sp>
+      <p:sp>
+        <p:nvSpPr>
+          <p:cNvPr id="3" name="Notes Placeholder 2"/>
+          <p:cNvSpPr>
+            <a:spLocks noGrp="1"/>
+          </p:cNvSpPr>
+          <p:nvPr>
+            <p:ph type="body" idx="3" sz="quarter"/>
+          </p:nvPr>
+        </p:nvSpPr>
+        <p:spPr/>
+        <p:txBody>
+          <a:bodyPr/>
+          <a:lstStyle/>
+          <a:p>
+            <a:r>
+              <a:t>module7/examples/incremental_migration/README.md</a:t>
+            </a:r>
+          </a:p>
+        </p:txBody>
+      </p:sp>
+      <p:sp>
+        <p:nvSpPr>
+          <p:cNvPr id="4" name="Slide Number Placeholder 3"/>
+          <p:cNvSpPr>
+            <a:spLocks noGrp="1"/>
+          </p:cNvSpPr>
+          <p:nvPr>
+            <p:ph type="sldNum" idx="5" sz="quarter"/>
+          </p:nvPr>
+        </p:nvSpPr>
+        <p:spPr/>
+      </p:sp>
+    </p:spTree>
+  </p:cSld>
+  <p:clrMapOvr>
+    <a:masterClrMapping/>
+  </p:clrMapOvr>
+</p:notes>
+</file>
+
+<file path=ppt/notesSlides/notesSlide18.xml><?xml version="1.0" encoding="utf-8"?>
+<p:notes xmlns:a="http://schemas.openxmlformats.org/drawingml/2006/main" xmlns:p="http://schemas.openxmlformats.org/presentationml/2006/main" xmlns:r="http://schemas.openxmlformats.org/officeDocument/2006/relationships">
+  <p:cSld>
+    <p:spTree>
+      <p:nvGrpSpPr>
+        <p:cNvPr id="1" name=""/>
+        <p:cNvGrpSpPr/>
+        <p:nvPr/>
+      </p:nvGrpSpPr>
+      <p:grpSpPr>
+        <a:xfrm>
+          <a:off x="0" y="0"/>
+          <a:ext cx="0" cy="0"/>
+          <a:chOff x="0" y="0"/>
+          <a:chExt cx="0" cy="0"/>
+        </a:xfrm>
+      </p:grpSpPr>
+      <p:sp>
+        <p:nvSpPr>
+          <p:cNvPr id="2" name="Slide Image Placeholder 1"/>
+          <p:cNvSpPr>
+            <a:spLocks noGrp="1"/>
+          </p:cNvSpPr>
+          <p:nvPr>
+            <p:ph type="sldImg" idx="2"/>
+          </p:nvPr>
+        </p:nvSpPr>
+        <p:spPr/>
+      </p:sp>
+      <p:sp>
+        <p:nvSpPr>
+          <p:cNvPr id="3" name="Notes Placeholder 2"/>
+          <p:cNvSpPr>
+            <a:spLocks noGrp="1"/>
+          </p:cNvSpPr>
+          <p:nvPr>
+            <p:ph type="body" idx="3" sz="quarter"/>
+          </p:nvPr>
+        </p:nvSpPr>
+        <p:spPr/>
+        <p:txBody>
+          <a:bodyPr/>
+          <a:lstStyle/>
+          <a:p>
+            <a:r>
+              <a:t>Hands-on: module7/examples/incremental_migration/</a:t>
+            </a:r>
+          </a:p>
+        </p:txBody>
+      </p:sp>
+      <p:sp>
+        <p:nvSpPr>
+          <p:cNvPr id="4" name="Slide Number Placeholder 3"/>
+          <p:cNvSpPr>
+            <a:spLocks noGrp="1"/>
+          </p:cNvSpPr>
+          <p:nvPr>
+            <p:ph type="sldNum" idx="5" sz="quarter"/>
+          </p:nvPr>
+        </p:nvSpPr>
+        <p:spPr/>
+      </p:sp>
+    </p:spTree>
+  </p:cSld>
+  <p:clrMapOvr>
+    <a:masterClrMapping/>
+  </p:clrMapOvr>
+</p:notes>
+</file>
+
+<file path=ppt/notesSlides/notesSlide19.xml><?xml version="1.0" encoding="utf-8"?>
+<p:notes xmlns:a="http://schemas.openxmlformats.org/drawingml/2006/main" xmlns:p="http://schemas.openxmlformats.org/presentationml/2006/main" xmlns:r="http://schemas.openxmlformats.org/officeDocument/2006/relationships">
+  <p:cSld>
+    <p:spTree>
+      <p:nvGrpSpPr>
+        <p:cNvPr id="1" name=""/>
+        <p:cNvGrpSpPr/>
+        <p:nvPr/>
+      </p:nvGrpSpPr>
+      <p:grpSpPr>
+        <a:xfrm>
+          <a:off x="0" y="0"/>
+          <a:ext cx="0" cy="0"/>
+          <a:chOff x="0" y="0"/>
+          <a:chExt cx="0" cy="0"/>
+        </a:xfrm>
+      </p:grpSpPr>
+      <p:sp>
+        <p:nvSpPr>
+          <p:cNvPr id="2" name="Slide Image Placeholder 1"/>
+          <p:cNvSpPr>
+            <a:spLocks noGrp="1"/>
+          </p:cNvSpPr>
+          <p:nvPr>
+            <p:ph type="sldImg" idx="2"/>
+          </p:nvPr>
+        </p:nvSpPr>
+        <p:spPr/>
+      </p:sp>
+      <p:sp>
+        <p:nvSpPr>
+          <p:cNvPr id="3" name="Notes Placeholder 2"/>
+          <p:cNvSpPr>
+            <a:spLocks noGrp="1"/>
+          </p:cNvSpPr>
+          <p:nvPr>
+            <p:ph type="body" idx="3" sz="quarter"/>
+          </p:nvPr>
+        </p:nvSpPr>
+        <p:spPr/>
+        <p:txBody>
+          <a:bodyPr/>
+          <a:lstStyle/>
+          <a:p>
+            <a:r>
+              <a:t>module7/examples/port_style_compare/README.md</a:t>
             </a:r>
           </a:p>
         </p:txBody>
@@ -733,7 +1312,637 @@
           <a:lstStyle/>
           <a:p>
             <a:r>
-              <a:t>Requires iverilog on PATH (apt install iverilog).</a:t>
+              <a:t>From docs/MODULE7.md — read guides before running demos.</a:t>
+            </a:r>
+          </a:p>
+        </p:txBody>
+      </p:sp>
+      <p:sp>
+        <p:nvSpPr>
+          <p:cNvPr id="4" name="Slide Number Placeholder 3"/>
+          <p:cNvSpPr>
+            <a:spLocks noGrp="1"/>
+          </p:cNvSpPr>
+          <p:nvPr>
+            <p:ph type="sldNum" idx="5" sz="quarter"/>
+          </p:nvPr>
+        </p:nvSpPr>
+        <p:spPr/>
+      </p:sp>
+    </p:spTree>
+  </p:cSld>
+  <p:clrMapOvr>
+    <a:masterClrMapping/>
+  </p:clrMapOvr>
+</p:notes>
+</file>
+
+<file path=ppt/notesSlides/notesSlide20.xml><?xml version="1.0" encoding="utf-8"?>
+<p:notes xmlns:a="http://schemas.openxmlformats.org/drawingml/2006/main" xmlns:p="http://schemas.openxmlformats.org/presentationml/2006/main" xmlns:r="http://schemas.openxmlformats.org/officeDocument/2006/relationships">
+  <p:cSld>
+    <p:spTree>
+      <p:nvGrpSpPr>
+        <p:cNvPr id="1" name=""/>
+        <p:cNvGrpSpPr/>
+        <p:nvPr/>
+      </p:nvGrpSpPr>
+      <p:grpSpPr>
+        <a:xfrm>
+          <a:off x="0" y="0"/>
+          <a:ext cx="0" cy="0"/>
+          <a:chOff x="0" y="0"/>
+          <a:chExt cx="0" cy="0"/>
+        </a:xfrm>
+      </p:grpSpPr>
+      <p:sp>
+        <p:nvSpPr>
+          <p:cNvPr id="2" name="Slide Image Placeholder 1"/>
+          <p:cNvSpPr>
+            <a:spLocks noGrp="1"/>
+          </p:cNvSpPr>
+          <p:nvPr>
+            <p:ph type="sldImg" idx="2"/>
+          </p:nvPr>
+        </p:nvSpPr>
+        <p:spPr/>
+      </p:sp>
+      <p:sp>
+        <p:nvSpPr>
+          <p:cNvPr id="3" name="Notes Placeholder 2"/>
+          <p:cNvSpPr>
+            <a:spLocks noGrp="1"/>
+          </p:cNvSpPr>
+          <p:nvPr>
+            <p:ph type="body" idx="3" sz="quarter"/>
+          </p:nvPr>
+        </p:nvSpPr>
+        <p:spPr/>
+        <p:txBody>
+          <a:bodyPr/>
+          <a:lstStyle/>
+          <a:p>
+            <a:r>
+              <a:t>Hands-on: module7/examples/port_style_compare/</a:t>
+            </a:r>
+          </a:p>
+        </p:txBody>
+      </p:sp>
+      <p:sp>
+        <p:nvSpPr>
+          <p:cNvPr id="4" name="Slide Number Placeholder 3"/>
+          <p:cNvSpPr>
+            <a:spLocks noGrp="1"/>
+          </p:cNvSpPr>
+          <p:nvPr>
+            <p:ph type="sldNum" idx="5" sz="quarter"/>
+          </p:nvPr>
+        </p:nvSpPr>
+        <p:spPr/>
+      </p:sp>
+    </p:spTree>
+  </p:cSld>
+  <p:clrMapOvr>
+    <a:masterClrMapping/>
+  </p:clrMapOvr>
+</p:notes>
+</file>
+
+<file path=ppt/notesSlides/notesSlide21.xml><?xml version="1.0" encoding="utf-8"?>
+<p:notes xmlns:a="http://schemas.openxmlformats.org/drawingml/2006/main" xmlns:p="http://schemas.openxmlformats.org/presentationml/2006/main" xmlns:r="http://schemas.openxmlformats.org/officeDocument/2006/relationships">
+  <p:cSld>
+    <p:spTree>
+      <p:nvGrpSpPr>
+        <p:cNvPr id="1" name=""/>
+        <p:cNvGrpSpPr/>
+        <p:nvPr/>
+      </p:nvGrpSpPr>
+      <p:grpSpPr>
+        <a:xfrm>
+          <a:off x="0" y="0"/>
+          <a:ext cx="0" cy="0"/>
+          <a:chOff x="0" y="0"/>
+          <a:chExt cx="0" cy="0"/>
+        </a:xfrm>
+      </p:grpSpPr>
+      <p:sp>
+        <p:nvSpPr>
+          <p:cNvPr id="2" name="Slide Image Placeholder 1"/>
+          <p:cNvSpPr>
+            <a:spLocks noGrp="1"/>
+          </p:cNvSpPr>
+          <p:nvPr>
+            <p:ph type="sldImg" idx="2"/>
+          </p:nvPr>
+        </p:nvSpPr>
+        <p:spPr/>
+      </p:sp>
+      <p:sp>
+        <p:nvSpPr>
+          <p:cNvPr id="3" name="Notes Placeholder 2"/>
+          <p:cNvSpPr>
+            <a:spLocks noGrp="1"/>
+          </p:cNvSpPr>
+          <p:nvPr>
+            <p:ph type="body" idx="3" sz="quarter"/>
+          </p:nvPr>
+        </p:nvSpPr>
+        <p:spPr/>
+        <p:txBody>
+          <a:bodyPr/>
+          <a:lstStyle/>
+          <a:p>
+            <a:r>
+              <a:t>module7/examples/no_defparam/README.md</a:t>
+            </a:r>
+          </a:p>
+        </p:txBody>
+      </p:sp>
+      <p:sp>
+        <p:nvSpPr>
+          <p:cNvPr id="4" name="Slide Number Placeholder 3"/>
+          <p:cNvSpPr>
+            <a:spLocks noGrp="1"/>
+          </p:cNvSpPr>
+          <p:nvPr>
+            <p:ph type="sldNum" idx="5" sz="quarter"/>
+          </p:nvPr>
+        </p:nvSpPr>
+        <p:spPr/>
+      </p:sp>
+    </p:spTree>
+  </p:cSld>
+  <p:clrMapOvr>
+    <a:masterClrMapping/>
+  </p:clrMapOvr>
+</p:notes>
+</file>
+
+<file path=ppt/notesSlides/notesSlide22.xml><?xml version="1.0" encoding="utf-8"?>
+<p:notes xmlns:a="http://schemas.openxmlformats.org/drawingml/2006/main" xmlns:p="http://schemas.openxmlformats.org/presentationml/2006/main" xmlns:r="http://schemas.openxmlformats.org/officeDocument/2006/relationships">
+  <p:cSld>
+    <p:spTree>
+      <p:nvGrpSpPr>
+        <p:cNvPr id="1" name=""/>
+        <p:cNvGrpSpPr/>
+        <p:nvPr/>
+      </p:nvGrpSpPr>
+      <p:grpSpPr>
+        <a:xfrm>
+          <a:off x="0" y="0"/>
+          <a:ext cx="0" cy="0"/>
+          <a:chOff x="0" y="0"/>
+          <a:chExt cx="0" cy="0"/>
+        </a:xfrm>
+      </p:grpSpPr>
+      <p:sp>
+        <p:nvSpPr>
+          <p:cNvPr id="2" name="Slide Image Placeholder 1"/>
+          <p:cNvSpPr>
+            <a:spLocks noGrp="1"/>
+          </p:cNvSpPr>
+          <p:nvPr>
+            <p:ph type="sldImg" idx="2"/>
+          </p:nvPr>
+        </p:nvSpPr>
+        <p:spPr/>
+      </p:sp>
+      <p:sp>
+        <p:nvSpPr>
+          <p:cNvPr id="3" name="Notes Placeholder 2"/>
+          <p:cNvSpPr>
+            <a:spLocks noGrp="1"/>
+          </p:cNvSpPr>
+          <p:nvPr>
+            <p:ph type="body" idx="3" sz="quarter"/>
+          </p:nvPr>
+        </p:nvSpPr>
+        <p:spPr/>
+        <p:txBody>
+          <a:bodyPr/>
+          <a:lstStyle/>
+          <a:p>
+            <a:r>
+              <a:t>Hands-on: module7/examples/no_defparam/</a:t>
+            </a:r>
+          </a:p>
+        </p:txBody>
+      </p:sp>
+      <p:sp>
+        <p:nvSpPr>
+          <p:cNvPr id="4" name="Slide Number Placeholder 3"/>
+          <p:cNvSpPr>
+            <a:spLocks noGrp="1"/>
+          </p:cNvSpPr>
+          <p:nvPr>
+            <p:ph type="sldNum" idx="5" sz="quarter"/>
+          </p:nvPr>
+        </p:nvSpPr>
+        <p:spPr/>
+      </p:sp>
+    </p:spTree>
+  </p:cSld>
+  <p:clrMapOvr>
+    <a:masterClrMapping/>
+  </p:clrMapOvr>
+</p:notes>
+</file>
+
+<file path=ppt/notesSlides/notesSlide23.xml><?xml version="1.0" encoding="utf-8"?>
+<p:notes xmlns:a="http://schemas.openxmlformats.org/drawingml/2006/main" xmlns:p="http://schemas.openxmlformats.org/presentationml/2006/main" xmlns:r="http://schemas.openxmlformats.org/officeDocument/2006/relationships">
+  <p:cSld>
+    <p:spTree>
+      <p:nvGrpSpPr>
+        <p:cNvPr id="1" name=""/>
+        <p:cNvGrpSpPr/>
+        <p:nvPr/>
+      </p:nvGrpSpPr>
+      <p:grpSpPr>
+        <a:xfrm>
+          <a:off x="0" y="0"/>
+          <a:ext cx="0" cy="0"/>
+          <a:chOff x="0" y="0"/>
+          <a:chExt cx="0" cy="0"/>
+        </a:xfrm>
+      </p:grpSpPr>
+      <p:sp>
+        <p:nvSpPr>
+          <p:cNvPr id="2" name="Slide Image Placeholder 1"/>
+          <p:cNvSpPr>
+            <a:spLocks noGrp="1"/>
+          </p:cNvSpPr>
+          <p:nvPr>
+            <p:ph type="sldImg" idx="2"/>
+          </p:nvPr>
+        </p:nvSpPr>
+        <p:spPr/>
+      </p:sp>
+      <p:sp>
+        <p:nvSpPr>
+          <p:cNvPr id="3" name="Notes Placeholder 2"/>
+          <p:cNvSpPr>
+            <a:spLocks noGrp="1"/>
+          </p:cNvSpPr>
+          <p:nvPr>
+            <p:ph type="body" idx="3" sz="quarter"/>
+          </p:nvPr>
+        </p:nvSpPr>
+        <p:spPr/>
+        <p:txBody>
+          <a:bodyPr/>
+          <a:lstStyle/>
+          <a:p>
+            <a:r>
+              <a:t>From MODULE7 Common Pitfalls.</a:t>
+            </a:r>
+          </a:p>
+        </p:txBody>
+      </p:sp>
+      <p:sp>
+        <p:nvSpPr>
+          <p:cNvPr id="4" name="Slide Number Placeholder 3"/>
+          <p:cNvSpPr>
+            <a:spLocks noGrp="1"/>
+          </p:cNvSpPr>
+          <p:nvPr>
+            <p:ph type="sldNum" idx="5" sz="quarter"/>
+          </p:nvPr>
+        </p:nvSpPr>
+        <p:spPr/>
+      </p:sp>
+    </p:spTree>
+  </p:cSld>
+  <p:clrMapOvr>
+    <a:masterClrMapping/>
+  </p:clrMapOvr>
+</p:notes>
+</file>
+
+<file path=ppt/notesSlides/notesSlide24.xml><?xml version="1.0" encoding="utf-8"?>
+<p:notes xmlns:a="http://schemas.openxmlformats.org/drawingml/2006/main" xmlns:p="http://schemas.openxmlformats.org/presentationml/2006/main" xmlns:r="http://schemas.openxmlformats.org/officeDocument/2006/relationships">
+  <p:cSld>
+    <p:spTree>
+      <p:nvGrpSpPr>
+        <p:cNvPr id="1" name=""/>
+        <p:cNvGrpSpPr/>
+        <p:nvPr/>
+      </p:nvGrpSpPr>
+      <p:grpSpPr>
+        <a:xfrm>
+          <a:off x="0" y="0"/>
+          <a:ext cx="0" cy="0"/>
+          <a:chOff x="0" y="0"/>
+          <a:chExt cx="0" cy="0"/>
+        </a:xfrm>
+      </p:grpSpPr>
+      <p:sp>
+        <p:nvSpPr>
+          <p:cNvPr id="2" name="Slide Image Placeholder 1"/>
+          <p:cNvSpPr>
+            <a:spLocks noGrp="1"/>
+          </p:cNvSpPr>
+          <p:nvPr>
+            <p:ph type="sldImg" idx="2"/>
+          </p:nvPr>
+        </p:nvSpPr>
+        <p:spPr/>
+      </p:sp>
+      <p:sp>
+        <p:nvSpPr>
+          <p:cNvPr id="3" name="Notes Placeholder 2"/>
+          <p:cNvSpPr>
+            <a:spLocks noGrp="1"/>
+          </p:cNvSpPr>
+          <p:nvPr>
+            <p:ph type="body" idx="3" sz="quarter"/>
+          </p:nvPr>
+        </p:nvSpPr>
+        <p:spPr/>
+        <p:txBody>
+          <a:bodyPr/>
+          <a:lstStyle/>
+          <a:p>
+            <a:r>
+              <a:t>From MODULE7 Common Pitfalls.</a:t>
+            </a:r>
+          </a:p>
+        </p:txBody>
+      </p:sp>
+      <p:sp>
+        <p:nvSpPr>
+          <p:cNvPr id="4" name="Slide Number Placeholder 3"/>
+          <p:cNvSpPr>
+            <a:spLocks noGrp="1"/>
+          </p:cNvSpPr>
+          <p:nvPr>
+            <p:ph type="sldNum" idx="5" sz="quarter"/>
+          </p:nvPr>
+        </p:nvSpPr>
+        <p:spPr/>
+      </p:sp>
+    </p:spTree>
+  </p:cSld>
+  <p:clrMapOvr>
+    <a:masterClrMapping/>
+  </p:clrMapOvr>
+</p:notes>
+</file>
+
+<file path=ppt/notesSlides/notesSlide25.xml><?xml version="1.0" encoding="utf-8"?>
+<p:notes xmlns:a="http://schemas.openxmlformats.org/drawingml/2006/main" xmlns:p="http://schemas.openxmlformats.org/presentationml/2006/main" xmlns:r="http://schemas.openxmlformats.org/officeDocument/2006/relationships">
+  <p:cSld>
+    <p:spTree>
+      <p:nvGrpSpPr>
+        <p:cNvPr id="1" name=""/>
+        <p:cNvGrpSpPr/>
+        <p:nvPr/>
+      </p:nvGrpSpPr>
+      <p:grpSpPr>
+        <a:xfrm>
+          <a:off x="0" y="0"/>
+          <a:ext cx="0" cy="0"/>
+          <a:chOff x="0" y="0"/>
+          <a:chExt cx="0" cy="0"/>
+        </a:xfrm>
+      </p:grpSpPr>
+      <p:sp>
+        <p:nvSpPr>
+          <p:cNvPr id="2" name="Slide Image Placeholder 1"/>
+          <p:cNvSpPr>
+            <a:spLocks noGrp="1"/>
+          </p:cNvSpPr>
+          <p:nvPr>
+            <p:ph type="sldImg" idx="2"/>
+          </p:nvPr>
+        </p:nvSpPr>
+        <p:spPr/>
+      </p:sp>
+      <p:sp>
+        <p:nvSpPr>
+          <p:cNvPr id="3" name="Notes Placeholder 2"/>
+          <p:cNvSpPr>
+            <a:spLocks noGrp="1"/>
+          </p:cNvSpPr>
+          <p:nvPr>
+            <p:ph type="body" idx="3" sz="quarter"/>
+          </p:nvPr>
+        </p:nvSpPr>
+        <p:spPr/>
+        <p:txBody>
+          <a:bodyPr/>
+          <a:lstStyle/>
+          <a:p>
+            <a:r>
+              <a:t>From MODULE7 Common Pitfalls.</a:t>
+            </a:r>
+          </a:p>
+        </p:txBody>
+      </p:sp>
+      <p:sp>
+        <p:nvSpPr>
+          <p:cNvPr id="4" name="Slide Number Placeholder 3"/>
+          <p:cNvSpPr>
+            <a:spLocks noGrp="1"/>
+          </p:cNvSpPr>
+          <p:nvPr>
+            <p:ph type="sldNum" idx="5" sz="quarter"/>
+          </p:nvPr>
+        </p:nvSpPr>
+        <p:spPr/>
+      </p:sp>
+    </p:spTree>
+  </p:cSld>
+  <p:clrMapOvr>
+    <a:masterClrMapping/>
+  </p:clrMapOvr>
+</p:notes>
+</file>
+
+<file path=ppt/notesSlides/notesSlide26.xml><?xml version="1.0" encoding="utf-8"?>
+<p:notes xmlns:a="http://schemas.openxmlformats.org/drawingml/2006/main" xmlns:p="http://schemas.openxmlformats.org/presentationml/2006/main" xmlns:r="http://schemas.openxmlformats.org/officeDocument/2006/relationships">
+  <p:cSld>
+    <p:spTree>
+      <p:nvGrpSpPr>
+        <p:cNvPr id="1" name=""/>
+        <p:cNvGrpSpPr/>
+        <p:nvPr/>
+      </p:nvGrpSpPr>
+      <p:grpSpPr>
+        <a:xfrm>
+          <a:off x="0" y="0"/>
+          <a:ext cx="0" cy="0"/>
+          <a:chOff x="0" y="0"/>
+          <a:chExt cx="0" cy="0"/>
+        </a:xfrm>
+      </p:grpSpPr>
+      <p:sp>
+        <p:nvSpPr>
+          <p:cNvPr id="2" name="Slide Image Placeholder 1"/>
+          <p:cNvSpPr>
+            <a:spLocks noGrp="1"/>
+          </p:cNvSpPr>
+          <p:nvPr>
+            <p:ph type="sldImg" idx="2"/>
+          </p:nvPr>
+        </p:nvSpPr>
+        <p:spPr/>
+      </p:sp>
+      <p:sp>
+        <p:nvSpPr>
+          <p:cNvPr id="3" name="Notes Placeholder 2"/>
+          <p:cNvSpPr>
+            <a:spLocks noGrp="1"/>
+          </p:cNvSpPr>
+          <p:nvPr>
+            <p:ph type="body" idx="3" sz="quarter"/>
+          </p:nvPr>
+        </p:nvSpPr>
+        <p:spPr/>
+        <p:txBody>
+          <a:bodyPr/>
+          <a:lstStyle/>
+          <a:p>
+            <a:r>
+              <a:t>From MODULE7 Common Pitfalls.</a:t>
+            </a:r>
+          </a:p>
+        </p:txBody>
+      </p:sp>
+      <p:sp>
+        <p:nvSpPr>
+          <p:cNvPr id="4" name="Slide Number Placeholder 3"/>
+          <p:cNvSpPr>
+            <a:spLocks noGrp="1"/>
+          </p:cNvSpPr>
+          <p:nvPr>
+            <p:ph type="sldNum" idx="5" sz="quarter"/>
+          </p:nvPr>
+        </p:nvSpPr>
+        <p:spPr/>
+      </p:sp>
+    </p:spTree>
+  </p:cSld>
+  <p:clrMapOvr>
+    <a:masterClrMapping/>
+  </p:clrMapOvr>
+</p:notes>
+</file>
+
+<file path=ppt/notesSlides/notesSlide27.xml><?xml version="1.0" encoding="utf-8"?>
+<p:notes xmlns:a="http://schemas.openxmlformats.org/drawingml/2006/main" xmlns:p="http://schemas.openxmlformats.org/presentationml/2006/main" xmlns:r="http://schemas.openxmlformats.org/officeDocument/2006/relationships">
+  <p:cSld>
+    <p:spTree>
+      <p:nvGrpSpPr>
+        <p:cNvPr id="1" name=""/>
+        <p:cNvGrpSpPr/>
+        <p:nvPr/>
+      </p:nvGrpSpPr>
+      <p:grpSpPr>
+        <a:xfrm>
+          <a:off x="0" y="0"/>
+          <a:ext cx="0" cy="0"/>
+          <a:chOff x="0" y="0"/>
+          <a:chExt cx="0" cy="0"/>
+        </a:xfrm>
+      </p:grpSpPr>
+      <p:sp>
+        <p:nvSpPr>
+          <p:cNvPr id="2" name="Slide Image Placeholder 1"/>
+          <p:cNvSpPr>
+            <a:spLocks noGrp="1"/>
+          </p:cNvSpPr>
+          <p:nvPr>
+            <p:ph type="sldImg" idx="2"/>
+          </p:nvPr>
+        </p:nvSpPr>
+        <p:spPr/>
+      </p:sp>
+      <p:sp>
+        <p:nvSpPr>
+          <p:cNvPr id="3" name="Notes Placeholder 2"/>
+          <p:cNvSpPr>
+            <a:spLocks noGrp="1"/>
+          </p:cNvSpPr>
+          <p:nvPr>
+            <p:ph type="body" idx="3" sz="quarter"/>
+          </p:nvPr>
+        </p:nvSpPr>
+        <p:spPr/>
+        <p:txBody>
+          <a:bodyPr/>
+          <a:lstStyle/>
+          <a:p>
+            <a:r>
+              <a:t>From MODULE7 Common Pitfalls.</a:t>
+            </a:r>
+          </a:p>
+        </p:txBody>
+      </p:sp>
+      <p:sp>
+        <p:nvSpPr>
+          <p:cNvPr id="4" name="Slide Number Placeholder 3"/>
+          <p:cNvSpPr>
+            <a:spLocks noGrp="1"/>
+          </p:cNvSpPr>
+          <p:nvPr>
+            <p:ph type="sldNum" idx="5" sz="quarter"/>
+          </p:nvPr>
+        </p:nvSpPr>
+        <p:spPr/>
+      </p:sp>
+    </p:spTree>
+  </p:cSld>
+  <p:clrMapOvr>
+    <a:masterClrMapping/>
+  </p:clrMapOvr>
+</p:notes>
+</file>
+
+<file path=ppt/notesSlides/notesSlide28.xml><?xml version="1.0" encoding="utf-8"?>
+<p:notes xmlns:a="http://schemas.openxmlformats.org/drawingml/2006/main" xmlns:p="http://schemas.openxmlformats.org/presentationml/2006/main" xmlns:r="http://schemas.openxmlformats.org/officeDocument/2006/relationships">
+  <p:cSld>
+    <p:spTree>
+      <p:nvGrpSpPr>
+        <p:cNvPr id="1" name=""/>
+        <p:cNvGrpSpPr/>
+        <p:nvPr/>
+      </p:nvGrpSpPr>
+      <p:grpSpPr>
+        <a:xfrm>
+          <a:off x="0" y="0"/>
+          <a:ext cx="0" cy="0"/>
+          <a:chOff x="0" y="0"/>
+          <a:chExt cx="0" cy="0"/>
+        </a:xfrm>
+      </p:grpSpPr>
+      <p:sp>
+        <p:nvSpPr>
+          <p:cNvPr id="2" name="Slide Image Placeholder 1"/>
+          <p:cNvSpPr>
+            <a:spLocks noGrp="1"/>
+          </p:cNvSpPr>
+          <p:nvPr>
+            <p:ph type="sldImg" idx="2"/>
+          </p:nvPr>
+        </p:nvSpPr>
+        <p:spPr/>
+      </p:sp>
+      <p:sp>
+        <p:nvSpPr>
+          <p:cNvPr id="3" name="Notes Placeholder 2"/>
+          <p:cNvSpPr>
+            <a:spLocks noGrp="1"/>
+          </p:cNvSpPr>
+          <p:nvPr>
+            <p:ph type="body" idx="3" sz="quarter"/>
+          </p:nvPr>
+        </p:nvSpPr>
+        <p:spPr/>
+        <p:txBody>
+          <a:bodyPr/>
+          <a:lstStyle/>
+          <a:p>
+            <a:r>
+              <a:t>From MODULE7 Learning Outcomes.</a:t>
             </a:r>
           </a:p>
         </p:txBody>
@@ -803,7 +2012,7 @@
           <a:lstStyle/>
           <a:p>
             <a:r>
-              <a:t>Hands-on: module7/examples/migration/</a:t>
+              <a:t>From MODULE7 Topics Covered.</a:t>
             </a:r>
           </a:p>
         </p:txBody>
@@ -873,7 +2082,7 @@
           <a:lstStyle/>
           <a:p>
             <a:r>
-              <a:t>Hands-on: module7/examples/migration_1995_to_2001/</a:t>
+              <a:t>Requires iverilog on PATH (apt install iverilog).</a:t>
             </a:r>
           </a:p>
         </p:txBody>
@@ -943,7 +2152,7 @@
           <a:lstStyle/>
           <a:p>
             <a:r>
-              <a:t>Hands-on: module7/examples/case_versions/</a:t>
+              <a:t>module7/examples/migration/README.md</a:t>
             </a:r>
           </a:p>
         </p:txBody>
@@ -1013,7 +2222,7 @@
           <a:lstStyle/>
           <a:p>
             <a:r>
-              <a:t>Hands-on: module7/examples/version_table/</a:t>
+              <a:t>Hands-on: module7/examples/migration/</a:t>
             </a:r>
           </a:p>
         </p:txBody>
@@ -1083,7 +2292,7 @@
           <a:lstStyle/>
           <a:p>
             <a:r>
-              <a:t>Hands-on: module7/examples/version_selection/</a:t>
+              <a:t>module7/examples/migration_1995_to_2001/README.md</a:t>
             </a:r>
           </a:p>
         </p:txBody>
@@ -1153,7 +2362,7 @@
           <a:lstStyle/>
           <a:p>
             <a:r>
-              <a:t>Hands-on: module7/examples/migration_checklist/</a:t>
+              <a:t>Hands-on: module7/examples/migration_1995_to_2001/</a:t>
             </a:r>
           </a:p>
         </p:txBody>
@@ -1223,7 +2432,7 @@
           <a:lstStyle/>
           <a:p>
             <a:r>
-              <a:t>Hands-on: module7/examples/incremental_migration/</a:t>
+              <a:t>module7/examples/case_versions/README.md</a:t>
             </a:r>
           </a:p>
         </p:txBody>
@@ -4381,7 +5590,7 @@
               </a:defRPr>
             </a:pPr>
             <a:r>
-              <a:t>Demo: Migration 1364→1800</a:t>
+              <a:t>1. Side-by-Side Comparison: Same Design Across Versions</a:t>
             </a:r>
           </a:p>
         </p:txBody>
@@ -4394,15 +5603,13 @@
         </p:nvSpPr>
         <p:spPr>
           <a:xfrm>
-            <a:off x="548640" y="1051560"/>
-            <a:ext cx="11064240" cy="914400"/>
-          </a:xfrm>
-          <a:prstGeom prst="rect">
-            <a:avLst/>
-          </a:prstGeom>
-          <a:solidFill>
-            <a:srgbClr val="F4F4F4"/>
-          </a:solidFill>
+            <a:off x="548640" y="1234440"/>
+            <a:ext cx="11064240" cy="4937760"/>
+          </a:xfrm>
+          <a:prstGeom prst="rect">
+            <a:avLst/>
+          </a:prstGeom>
+          <a:noFill/>
         </p:spPr>
         <p:txBody>
           <a:bodyPr wrap="square">
@@ -4415,48 +5622,24 @@
                 <a:spcPts val="2200"/>
               </a:lnSpc>
               <a:spcAft>
-                <a:spcPts val="200"/>
+                <a:spcPts val="1000"/>
               </a:spcAft>
               <a:defRPr sz="2000" b="0">
                 <a:solidFill>
                   <a:srgbClr val="333333"/>
                 </a:solidFill>
-                <a:latin typeface="Consolas"/>
-              </a:defRPr>
-            </a:pPr>
-            <a:r>
-              <a:t>$ cd module7/examples/migration &amp;&amp; make clean &amp;&amp; make run</a:t>
-            </a:r>
-          </a:p>
-        </p:txBody>
-      </p:sp>
-      <p:pic>
-        <p:nvPicPr>
-          <p:cNvPr id="4" name="Picture 3" descr="ex07_migration.png"/>
-          <p:cNvPicPr>
-            <a:picLocks noChangeAspect="1"/>
-          </p:cNvPicPr>
-          <p:nvPr/>
-        </p:nvPicPr>
-        <p:blipFill>
-          <a:blip r:embed="rId2"/>
-          <a:stretch>
-            <a:fillRect/>
-          </a:stretch>
-        </p:blipFill>
-        <p:spPr>
-          <a:xfrm>
-            <a:off x="548640" y="1965960"/>
-            <a:ext cx="7071358" cy="3977639"/>
-          </a:xfrm>
-          <a:prstGeom prst="rect">
-            <a:avLst/>
-          </a:prstGeom>
-        </p:spPr>
-      </p:pic>
-      <p:sp>
-        <p:nvSpPr>
-          <p:cNvPr id="5" name="TextBox 4"/>
+                <a:latin typeface="Calibri"/>
+              </a:defRPr>
+            </a:pPr>
+            <a:r>
+              <a:t>• See docs/MODULE7.md</a:t>
+            </a:r>
+          </a:p>
+        </p:txBody>
+      </p:sp>
+      <p:sp>
+        <p:nvSpPr>
+          <p:cNvPr id="4" name="TextBox 3"/>
           <p:cNvSpPr txBox="1"/>
           <p:nvPr/>
         </p:nvSpPr>
@@ -4519,8 +5702,8 @@
         </p:nvSpPr>
         <p:spPr>
           <a:xfrm>
-            <a:off x="548640" y="411480"/>
-            <a:ext cx="11064240" cy="777240"/>
+            <a:off x="548640" y="2743200"/>
+            <a:ext cx="11064240" cy="1371600"/>
           </a:xfrm>
           <a:prstGeom prst="rect">
             <a:avLst/>
@@ -4533,11 +5716,11 @@
           </a:bodyPr>
           <a:lstStyle/>
           <a:p>
-            <a:pPr>
-              <a:lnSpc>
-                <a:spcPts val="2200"/>
-              </a:lnSpc>
-              <a:defRPr sz="2800" b="1">
+            <a:pPr algn="ctr">
+              <a:lnSpc>
+                <a:spcPts val="2200"/>
+              </a:lnSpc>
+              <a:defRPr sz="3600" b="1">
                 <a:solidFill>
                   <a:srgbClr val="1A1A2E"/>
                 </a:solidFill>
@@ -4545,7 +5728,7 @@
               </a:defRPr>
             </a:pPr>
             <a:r>
-              <a:t>Demo: Migration 1995→2001</a:t>
+              <a:t>Hands-on examples</a:t>
             </a:r>
           </a:p>
         </p:txBody>
@@ -4553,74 +5736,6 @@
       <p:sp>
         <p:nvSpPr>
           <p:cNvPr id="3" name="TextBox 2"/>
-          <p:cNvSpPr txBox="1"/>
-          <p:nvPr/>
-        </p:nvSpPr>
-        <p:spPr>
-          <a:xfrm>
-            <a:off x="548640" y="1051560"/>
-            <a:ext cx="11064240" cy="914400"/>
-          </a:xfrm>
-          <a:prstGeom prst="rect">
-            <a:avLst/>
-          </a:prstGeom>
-          <a:solidFill>
-            <a:srgbClr val="F4F4F4"/>
-          </a:solidFill>
-        </p:spPr>
-        <p:txBody>
-          <a:bodyPr wrap="square">
-            <a:noAutofit/>
-          </a:bodyPr>
-          <a:lstStyle/>
-          <a:p>
-            <a:pPr>
-              <a:lnSpc>
-                <a:spcPts val="2200"/>
-              </a:lnSpc>
-              <a:spcAft>
-                <a:spcPts val="200"/>
-              </a:spcAft>
-              <a:defRPr sz="2000" b="0">
-                <a:solidFill>
-                  <a:srgbClr val="333333"/>
-                </a:solidFill>
-                <a:latin typeface="Consolas"/>
-              </a:defRPr>
-            </a:pPr>
-            <a:r>
-              <a:t>$ cd module7/examples/migration_1995_to_2001 &amp;&amp; make clean &amp;&amp; make run</a:t>
-            </a:r>
-          </a:p>
-        </p:txBody>
-      </p:sp>
-      <p:pic>
-        <p:nvPicPr>
-          <p:cNvPr id="4" name="Picture 3" descr="ex08_migration_1995_to_2001.png"/>
-          <p:cNvPicPr>
-            <a:picLocks noChangeAspect="1"/>
-          </p:cNvPicPr>
-          <p:nvPr/>
-        </p:nvPicPr>
-        <p:blipFill>
-          <a:blip r:embed="rId2"/>
-          <a:stretch>
-            <a:fillRect/>
-          </a:stretch>
-        </p:blipFill>
-        <p:spPr>
-          <a:xfrm>
-            <a:off x="548640" y="1965960"/>
-            <a:ext cx="7071358" cy="3977639"/>
-          </a:xfrm>
-          <a:prstGeom prst="rect">
-            <a:avLst/>
-          </a:prstGeom>
-        </p:spPr>
-      </p:pic>
-      <p:sp>
-        <p:nvSpPr>
-          <p:cNvPr id="5" name="TextBox 4"/>
           <p:cNvSpPr txBox="1"/>
           <p:nvPr/>
         </p:nvSpPr>
@@ -4709,7 +5824,7 @@
               </a:defRPr>
             </a:pPr>
             <a:r>
-              <a:t>Demo: Case Versions</a:t>
+              <a:t>Module 7 toolchain check</a:t>
             </a:r>
           </a:p>
         </p:txBody>
@@ -4753,14 +5868,33 @@
               </a:defRPr>
             </a:pPr>
             <a:r>
-              <a:t>$ cd module7/examples/case_versions &amp;&amp; make clean &amp;&amp; make run</a:t>
+              <a:t>$ command -v iverilog &gt;/dev/null &amp;&amp; echo "Toolchain ready: $(iverilog</a:t>
+            </a:r>
+          </a:p>
+          <a:p>
+            <a:pPr>
+              <a:lnSpc>
+                <a:spcPts val="2200"/>
+              </a:lnSpc>
+              <a:spcAft>
+                <a:spcPts val="200"/>
+              </a:spcAft>
+              <a:defRPr sz="2000" b="0">
+                <a:solidFill>
+                  <a:srgbClr val="333333"/>
+                </a:solidFill>
+                <a:latin typeface="Consolas"/>
+              </a:defRPr>
+            </a:pPr>
+            <a:r>
+              <a:t>      -V 2&gt;&amp;1 | head -1)"</a:t>
             </a:r>
           </a:p>
         </p:txBody>
       </p:sp>
       <p:pic>
         <p:nvPicPr>
-          <p:cNvPr id="4" name="Picture 3" descr="ex09_case_versions.png"/>
+          <p:cNvPr id="4" name="Picture 3" descr="module7_check.png"/>
           <p:cNvPicPr>
             <a:picLocks noChangeAspect="1"/>
           </p:cNvPicPr>
@@ -4873,7 +6007,7 @@
               </a:defRPr>
             </a:pPr>
             <a:r>
-              <a:t>Demo: Version Table</a:t>
+              <a:t>Example 7: Migration 1364→1800</a:t>
             </a:r>
           </a:p>
         </p:txBody>
@@ -4886,15 +6020,13 @@
         </p:nvSpPr>
         <p:spPr>
           <a:xfrm>
-            <a:off x="548640" y="1051560"/>
-            <a:ext cx="11064240" cy="914400"/>
-          </a:xfrm>
-          <a:prstGeom prst="rect">
-            <a:avLst/>
-          </a:prstGeom>
-          <a:solidFill>
-            <a:srgbClr val="F4F4F4"/>
-          </a:solidFill>
+            <a:off x="548640" y="1234440"/>
+            <a:ext cx="11064240" cy="4937760"/>
+          </a:xfrm>
+          <a:prstGeom prst="rect">
+            <a:avLst/>
+          </a:prstGeom>
+          <a:noFill/>
         </p:spPr>
         <p:txBody>
           <a:bodyPr wrap="square">
@@ -4907,48 +6039,62 @@
                 <a:spcPts val="2200"/>
               </a:lnSpc>
               <a:spcAft>
-                <a:spcPts val="200"/>
+                <a:spcPts val="1000"/>
               </a:spcAft>
               <a:defRPr sz="2000" b="0">
                 <a:solidFill>
                   <a:srgbClr val="333333"/>
                 </a:solidFill>
-                <a:latin typeface="Consolas"/>
-              </a:defRPr>
-            </a:pPr>
-            <a:r>
-              <a:t>$ cd module7/examples/version_table &amp;&amp; make clean &amp;&amp; make run</a:t>
-            </a:r>
-          </a:p>
-        </p:txBody>
-      </p:sp>
-      <p:pic>
-        <p:nvPicPr>
-          <p:cNvPr id="4" name="Picture 3" descr="ex10_version_table.png"/>
-          <p:cNvPicPr>
-            <a:picLocks noChangeAspect="1"/>
-          </p:cNvPicPr>
-          <p:nvPr/>
-        </p:nvPicPr>
-        <p:blipFill>
-          <a:blip r:embed="rId2"/>
-          <a:stretch>
-            <a:fillRect/>
-          </a:stretch>
-        </p:blipFill>
-        <p:spPr>
-          <a:xfrm>
-            <a:off x="548640" y="1965960"/>
-            <a:ext cx="7071358" cy="3977639"/>
-          </a:xfrm>
-          <a:prstGeom prst="rect">
-            <a:avLst/>
-          </a:prstGeom>
-        </p:spPr>
-      </p:pic>
-      <p:sp>
-        <p:nvSpPr>
-          <p:cNvPr id="5" name="TextBox 4"/>
+                <a:latin typeface="Calibri"/>
+              </a:defRPr>
+            </a:pPr>
+            <a:r>
+              <a:t>• Before/after: wire/reg, always @* vs logic,</a:t>
+            </a:r>
+          </a:p>
+          <a:p>
+            <a:pPr>
+              <a:lnSpc>
+                <a:spcPts val="2200"/>
+              </a:lnSpc>
+              <a:spcAft>
+                <a:spcPts val="1000"/>
+              </a:spcAft>
+              <a:defRPr sz="2000" b="0">
+                <a:solidFill>
+                  <a:srgbClr val="333333"/>
+                </a:solidFill>
+                <a:latin typeface="Calibri"/>
+              </a:defRPr>
+            </a:pPr>
+            <a:r>
+              <a:t>      always_comb, unique case</a:t>
+            </a:r>
+          </a:p>
+          <a:p>
+            <a:pPr>
+              <a:lnSpc>
+                <a:spcPts val="2200"/>
+              </a:lnSpc>
+              <a:spcAft>
+                <a:spcPts val="1000"/>
+              </a:spcAft>
+              <a:defRPr sz="2000" b="0">
+                <a:solidFill>
+                  <a:srgbClr val="333333"/>
+                </a:solidFill>
+                <a:latin typeface="Calibri"/>
+              </a:defRPr>
+            </a:pPr>
+            <a:r>
+              <a:t>• Order of steps, testing, regression</a:t>
+            </a:r>
+          </a:p>
+        </p:txBody>
+      </p:sp>
+      <p:sp>
+        <p:nvSpPr>
+          <p:cNvPr id="4" name="TextBox 3"/>
           <p:cNvSpPr txBox="1"/>
           <p:nvPr/>
         </p:nvSpPr>
@@ -5037,7 +6183,7 @@
               </a:defRPr>
             </a:pPr>
             <a:r>
-              <a:t>Demo: Version Selection</a:t>
+              <a:t>Demo: Migration 1364→1800</a:t>
             </a:r>
           </a:p>
         </p:txBody>
@@ -5081,14 +6227,14 @@
               </a:defRPr>
             </a:pPr>
             <a:r>
-              <a:t>$ cd module7/examples/version_selection &amp;&amp; make clean &amp;&amp; make run</a:t>
+              <a:t>$ cd module7/examples/migration &amp;&amp; make clean &amp;&amp; make run</a:t>
             </a:r>
           </a:p>
         </p:txBody>
       </p:sp>
       <p:pic>
         <p:nvPicPr>
-          <p:cNvPr id="4" name="Picture 3" descr="ex11_version_selection.png"/>
+          <p:cNvPr id="4" name="Picture 3" descr="ex07_migration.png"/>
           <p:cNvPicPr>
             <a:picLocks noChangeAspect="1"/>
           </p:cNvPicPr>
@@ -5201,7 +6347,7 @@
               </a:defRPr>
             </a:pPr>
             <a:r>
-              <a:t>Demo: Migration Checklist</a:t>
+              <a:t>Example 8: Migration 1995→2001</a:t>
             </a:r>
           </a:p>
         </p:txBody>
@@ -5214,15 +6360,13 @@
         </p:nvSpPr>
         <p:spPr>
           <a:xfrm>
-            <a:off x="548640" y="1051560"/>
-            <a:ext cx="11064240" cy="914400"/>
-          </a:xfrm>
-          <a:prstGeom prst="rect">
-            <a:avLst/>
-          </a:prstGeom>
-          <a:solidFill>
-            <a:srgbClr val="F4F4F4"/>
-          </a:solidFill>
+            <a:off x="548640" y="1234440"/>
+            <a:ext cx="11064240" cy="4937760"/>
+          </a:xfrm>
+          <a:prstGeom prst="rect">
+            <a:avLst/>
+          </a:prstGeom>
+          <a:noFill/>
         </p:spPr>
         <p:txBody>
           <a:bodyPr wrap="square">
@@ -5235,48 +6379,62 @@
                 <a:spcPts val="2200"/>
               </a:lnSpc>
               <a:spcAft>
-                <a:spcPts val="200"/>
+                <a:spcPts val="1000"/>
               </a:spcAft>
               <a:defRPr sz="2000" b="0">
                 <a:solidFill>
                   <a:srgbClr val="333333"/>
                 </a:solidFill>
-                <a:latin typeface="Consolas"/>
-              </a:defRPr>
-            </a:pPr>
-            <a:r>
-              <a:t>$ cd module7/examples/migration_checklist &amp;&amp; make clean &amp;&amp; make run</a:t>
-            </a:r>
-          </a:p>
-        </p:txBody>
-      </p:sp>
-      <p:pic>
-        <p:nvPicPr>
-          <p:cNvPr id="4" name="Picture 3" descr="ex14_migration_checklist.png"/>
-          <p:cNvPicPr>
-            <a:picLocks noChangeAspect="1"/>
-          </p:cNvPicPr>
-          <p:nvPr/>
-        </p:nvPicPr>
-        <p:blipFill>
-          <a:blip r:embed="rId2"/>
-          <a:stretch>
-            <a:fillRect/>
-          </a:stretch>
-        </p:blipFill>
-        <p:spPr>
-          <a:xfrm>
-            <a:off x="548640" y="1965960"/>
-            <a:ext cx="7071358" cy="3977639"/>
-          </a:xfrm>
-          <a:prstGeom prst="rect">
-            <a:avLst/>
-          </a:prstGeom>
-        </p:spPr>
-      </p:pic>
-      <p:sp>
-        <p:nvSpPr>
-          <p:cNvPr id="5" name="TextBox 4"/>
+                <a:latin typeface="Calibri"/>
+              </a:defRPr>
+            </a:pPr>
+            <a:r>
+              <a:t>• Before: non-ANSI, @(a or b or sel). After: ANSI,</a:t>
+            </a:r>
+          </a:p>
+          <a:p>
+            <a:pPr>
+              <a:lnSpc>
+                <a:spcPts val="2200"/>
+              </a:lnSpc>
+              <a:spcAft>
+                <a:spcPts val="1000"/>
+              </a:spcAft>
+              <a:defRPr sz="2000" b="0">
+                <a:solidFill>
+                  <a:srgbClr val="333333"/>
+                </a:solidFill>
+                <a:latin typeface="Calibri"/>
+              </a:defRPr>
+            </a:pPr>
+            <a:r>
+              <a:t>      always @*</a:t>
+            </a:r>
+          </a:p>
+          <a:p>
+            <a:pPr>
+              <a:lnSpc>
+                <a:spcPts val="2200"/>
+              </a:lnSpc>
+              <a:spcAft>
+                <a:spcPts val="1000"/>
+              </a:spcAft>
+              <a:defRPr sz="2000" b="0">
+                <a:solidFill>
+                  <a:srgbClr val="333333"/>
+                </a:solidFill>
+                <a:latin typeface="Calibri"/>
+              </a:defRPr>
+            </a:pPr>
+            <a:r>
+              <a:t>• ANSI ports, implicit sensitivity</a:t>
+            </a:r>
+          </a:p>
+        </p:txBody>
+      </p:sp>
+      <p:sp>
+        <p:nvSpPr>
+          <p:cNvPr id="4" name="TextBox 3"/>
           <p:cNvSpPr txBox="1"/>
           <p:nvPr/>
         </p:nvSpPr>
@@ -5365,7 +6523,7 @@
               </a:defRPr>
             </a:pPr>
             <a:r>
-              <a:t>Demo: Incremental Migration</a:t>
+              <a:t>Demo: Migration 1995→2001</a:t>
             </a:r>
           </a:p>
         </p:txBody>
@@ -5409,14 +6567,14 @@
               </a:defRPr>
             </a:pPr>
             <a:r>
-              <a:t>$ cd module7/examples/incremental_migration &amp;&amp; make clean &amp;&amp; make run</a:t>
+              <a:t>$ cd module7/examples/migration_1995_to_2001 &amp;&amp; make clean &amp;&amp; make run</a:t>
             </a:r>
           </a:p>
         </p:txBody>
       </p:sp>
       <p:pic>
         <p:nvPicPr>
-          <p:cNvPr id="4" name="Picture 3" descr="ex15_incremental_migration.png"/>
+          <p:cNvPr id="4" name="Picture 3" descr="ex08_migration_1995_to_2001.png"/>
           <p:cNvPicPr>
             <a:picLocks noChangeAspect="1"/>
           </p:cNvPicPr>
@@ -5529,7 +6687,7 @@
               </a:defRPr>
             </a:pPr>
             <a:r>
-              <a:t>Demo: Port Style Compare</a:t>
+              <a:t>Example 9: Case Versions</a:t>
             </a:r>
           </a:p>
         </p:txBody>
@@ -5542,15 +6700,13 @@
         </p:nvSpPr>
         <p:spPr>
           <a:xfrm>
-            <a:off x="548640" y="1051560"/>
-            <a:ext cx="11064240" cy="914400"/>
-          </a:xfrm>
-          <a:prstGeom prst="rect">
-            <a:avLst/>
-          </a:prstGeom>
-          <a:solidFill>
-            <a:srgbClr val="F4F4F4"/>
-          </a:solidFill>
+            <a:off x="548640" y="1234440"/>
+            <a:ext cx="11064240" cy="4937760"/>
+          </a:xfrm>
+          <a:prstGeom prst="rect">
+            <a:avLst/>
+          </a:prstGeom>
+          <a:noFill/>
         </p:spPr>
         <p:txBody>
           <a:bodyPr wrap="square">
@@ -5563,48 +6719,43 @@
                 <a:spcPts val="2200"/>
               </a:lnSpc>
               <a:spcAft>
-                <a:spcPts val="200"/>
+                <a:spcPts val="1000"/>
               </a:spcAft>
               <a:defRPr sz="2000" b="0">
                 <a:solidFill>
                   <a:srgbClr val="333333"/>
                 </a:solidFill>
-                <a:latin typeface="Consolas"/>
-              </a:defRPr>
-            </a:pPr>
-            <a:r>
-              <a:t>$ cd module7/examples/port_style_compare &amp;&amp; make clean &amp;&amp; make run</a:t>
-            </a:r>
-          </a:p>
-        </p:txBody>
-      </p:sp>
-      <p:pic>
-        <p:nvPicPr>
-          <p:cNvPr id="4" name="Picture 3" descr="ex16_port_style_compare.png"/>
-          <p:cNvPicPr>
-            <a:picLocks noChangeAspect="1"/>
-          </p:cNvPicPr>
-          <p:nvPr/>
-        </p:nvPicPr>
-        <p:blipFill>
-          <a:blip r:embed="rId2"/>
-          <a:stretch>
-            <a:fillRect/>
-          </a:stretch>
-        </p:blipFill>
-        <p:spPr>
-          <a:xfrm>
-            <a:off x="548640" y="1965960"/>
-            <a:ext cx="7071358" cy="3977639"/>
-          </a:xfrm>
-          <a:prstGeom prst="rect">
-            <a:avLst/>
-          </a:prstGeom>
-        </p:spPr>
-      </p:pic>
-      <p:sp>
-        <p:nvSpPr>
-          <p:cNvPr id="5" name="TextBox 4"/>
+                <a:latin typeface="Calibri"/>
+              </a:defRPr>
+            </a:pPr>
+            <a:r>
+              <a:t>• Same 4:1 mux: 1364 case+default vs 1800 unique case</a:t>
+            </a:r>
+          </a:p>
+          <a:p>
+            <a:pPr>
+              <a:lnSpc>
+                <a:spcPts val="2200"/>
+              </a:lnSpc>
+              <a:spcAft>
+                <a:spcPts val="1000"/>
+              </a:spcAft>
+              <a:defRPr sz="2000" b="0">
+                <a:solidFill>
+                  <a:srgbClr val="333333"/>
+                </a:solidFill>
+                <a:latin typeface="Calibri"/>
+              </a:defRPr>
+            </a:pPr>
+            <a:r>
+              <a:t>• case semantics; unique case for tool checking</a:t>
+            </a:r>
+          </a:p>
+        </p:txBody>
+      </p:sp>
+      <p:sp>
+        <p:nvSpPr>
+          <p:cNvPr id="4" name="TextBox 3"/>
           <p:cNvSpPr txBox="1"/>
           <p:nvPr/>
         </p:nvSpPr>
@@ -5693,7 +6844,7 @@
               </a:defRPr>
             </a:pPr>
             <a:r>
-              <a:t>Demo: No defparam</a:t>
+              <a:t>Demo: Case Versions</a:t>
             </a:r>
           </a:p>
         </p:txBody>
@@ -5737,14 +6888,14 @@
               </a:defRPr>
             </a:pPr>
             <a:r>
-              <a:t>$ cd module7/examples/no_defparam &amp;&amp; make clean &amp;&amp; make run</a:t>
+              <a:t>$ cd module7/examples/case_versions &amp;&amp; make clean &amp;&amp; make run</a:t>
             </a:r>
           </a:p>
         </p:txBody>
       </p:sp>
       <p:pic>
         <p:nvPicPr>
-          <p:cNvPr id="4" name="Picture 3" descr="ex17_no_defparam.png"/>
+          <p:cNvPr id="4" name="Picture 3" descr="ex09_case_versions.png"/>
           <p:cNvPicPr>
             <a:picLocks noChangeAspect="1"/>
           </p:cNvPicPr>
@@ -5831,8 +6982,8 @@
         </p:nvSpPr>
         <p:spPr>
           <a:xfrm>
-            <a:off x="548640" y="2743200"/>
-            <a:ext cx="11064240" cy="1371600"/>
+            <a:off x="548640" y="411480"/>
+            <a:ext cx="11064240" cy="777240"/>
           </a:xfrm>
           <a:prstGeom prst="rect">
             <a:avLst/>
@@ -5845,11 +6996,11 @@
           </a:bodyPr>
           <a:lstStyle/>
           <a:p>
-            <a:pPr algn="ctr">
-              <a:lnSpc>
-                <a:spcPts val="2200"/>
-              </a:lnSpc>
-              <a:defRPr sz="3600" b="1">
+            <a:pPr>
+              <a:lnSpc>
+                <a:spcPts val="2200"/>
+              </a:lnSpc>
+              <a:defRPr sz="2800" b="1">
                 <a:solidFill>
                   <a:srgbClr val="1A1A2E"/>
                 </a:solidFill>
@@ -5857,7 +7008,7 @@
               </a:defRPr>
             </a:pPr>
             <a:r>
-              <a:t>Practice &amp; assessment</a:t>
+              <a:t>Example 10: Version Table</a:t>
             </a:r>
           </a:p>
         </p:txBody>
@@ -5865,6 +7016,67 @@
       <p:sp>
         <p:nvSpPr>
           <p:cNvPr id="3" name="TextBox 2"/>
+          <p:cNvSpPr txBox="1"/>
+          <p:nvPr/>
+        </p:nvSpPr>
+        <p:spPr>
+          <a:xfrm>
+            <a:off x="548640" y="1234440"/>
+            <a:ext cx="11064240" cy="4937760"/>
+          </a:xfrm>
+          <a:prstGeom prst="rect">
+            <a:avLst/>
+          </a:prstGeom>
+          <a:noFill/>
+        </p:spPr>
+        <p:txBody>
+          <a:bodyPr wrap="square">
+            <a:noAutofit/>
+          </a:bodyPr>
+          <a:lstStyle/>
+          <a:p>
+            <a:pPr>
+              <a:lnSpc>
+                <a:spcPts val="2200"/>
+              </a:lnSpc>
+              <a:spcAft>
+                <a:spcPts val="1000"/>
+              </a:spcAft>
+              <a:defRPr sz="2000" b="0">
+                <a:solidFill>
+                  <a:srgbClr val="333333"/>
+                </a:solidFill>
+                <a:latin typeface="Calibri"/>
+              </a:defRPr>
+            </a:pPr>
+            <a:r>
+              <a:t>• Single reference: construct vs standard (1995–2017)</a:t>
+            </a:r>
+          </a:p>
+          <a:p>
+            <a:pPr>
+              <a:lnSpc>
+                <a:spcPts val="2200"/>
+              </a:lnSpc>
+              <a:spcAft>
+                <a:spcPts val="1000"/>
+              </a:spcAft>
+              <a:defRPr sz="2000" b="0">
+                <a:solidFill>
+                  <a:srgbClr val="333333"/>
+                </a:solidFill>
+                <a:latin typeface="Calibri"/>
+              </a:defRPr>
+            </a:pPr>
+            <a:r>
+              <a:t>• When each feature was introduced; minimum revision</a:t>
+            </a:r>
+          </a:p>
+        </p:txBody>
+      </p:sp>
+      <p:sp>
+        <p:nvSpPr>
+          <p:cNvPr id="4" name="TextBox 3"/>
           <p:cNvSpPr txBox="1"/>
           <p:nvPr/>
         </p:nvSpPr>
@@ -6129,7 +7341,7 @@
               </a:defRPr>
             </a:pPr>
             <a:r>
-              <a:t>Exercises</a:t>
+              <a:t>Demo: Version Table</a:t>
             </a:r>
           </a:p>
         </p:txBody>
@@ -6142,13 +7354,15 @@
         </p:nvSpPr>
         <p:spPr>
           <a:xfrm>
-            <a:off x="548640" y="1234440"/>
-            <a:ext cx="11064240" cy="4937760"/>
-          </a:xfrm>
-          <a:prstGeom prst="rect">
-            <a:avLst/>
-          </a:prstGeom>
-          <a:noFill/>
+            <a:off x="548640" y="1051560"/>
+            <a:ext cx="11064240" cy="914400"/>
+          </a:xfrm>
+          <a:prstGeom prst="rect">
+            <a:avLst/>
+          </a:prstGeom>
+          <a:solidFill>
+            <a:srgbClr val="F4F4F4"/>
+          </a:solidFill>
         </p:spPr>
         <p:txBody>
           <a:bodyPr wrap="square">
@@ -6161,100 +7375,48 @@
                 <a:spcPts val="2200"/>
               </a:lnSpc>
               <a:spcAft>
-                <a:spcPts val="1000"/>
+                <a:spcPts val="200"/>
               </a:spcAft>
               <a:defRPr sz="2000" b="0">
                 <a:solidFill>
                   <a:srgbClr val="333333"/>
                 </a:solidFill>
-                <a:latin typeface="Calibri"/>
-              </a:defRPr>
-            </a:pPr>
-            <a:r>
-              <a:t>• Side-by-Side Mux</a:t>
-            </a:r>
-          </a:p>
-          <a:p>
-            <a:pPr>
-              <a:lnSpc>
-                <a:spcPts val="2200"/>
-              </a:lnSpc>
-              <a:spcAft>
-                <a:spcPts val="1000"/>
-              </a:spcAft>
-              <a:defRPr sz="2000" b="0">
-                <a:solidFill>
-                  <a:srgbClr val="333333"/>
-                </a:solidFill>
-                <a:latin typeface="Calibri"/>
-              </a:defRPr>
-            </a:pPr>
-            <a:r>
-              <a:t>• Side-by-Side Connectivity</a:t>
-            </a:r>
-          </a:p>
-          <a:p>
-            <a:pPr>
-              <a:lnSpc>
-                <a:spcPts val="2200"/>
-              </a:lnSpc>
-              <a:spcAft>
-                <a:spcPts val="1000"/>
-              </a:spcAft>
-              <a:defRPr sz="2000" b="0">
-                <a:solidFill>
-                  <a:srgbClr val="333333"/>
-                </a:solidFill>
-                <a:latin typeface="Calibri"/>
-              </a:defRPr>
-            </a:pPr>
-            <a:r>
-              <a:t>• Migration One Block</a:t>
-            </a:r>
-          </a:p>
-          <a:p>
-            <a:pPr>
-              <a:lnSpc>
-                <a:spcPts val="2200"/>
-              </a:lnSpc>
-              <a:spcAft>
-                <a:spcPts val="1000"/>
-              </a:spcAft>
-              <a:defRPr sz="2000" b="0">
-                <a:solidFill>
-                  <a:srgbClr val="333333"/>
-                </a:solidFill>
-                <a:latin typeface="Calibri"/>
-              </a:defRPr>
-            </a:pPr>
-            <a:r>
-              <a:t>• Version Selection</a:t>
-            </a:r>
-          </a:p>
-          <a:p>
-            <a:pPr>
-              <a:lnSpc>
-                <a:spcPts val="2200"/>
-              </a:lnSpc>
-              <a:spcAft>
-                <a:spcPts val="1000"/>
-              </a:spcAft>
-              <a:defRPr sz="2000" b="0">
-                <a:solidFill>
-                  <a:srgbClr val="333333"/>
-                </a:solidFill>
-                <a:latin typeface="Calibri"/>
-              </a:defRPr>
-            </a:pPr>
-            <a:r>
-              <a:t>• Version Table</a:t>
-            </a:r>
-          </a:p>
-        </p:txBody>
-      </p:sp>
-      <p:sp>
-        <p:nvSpPr>
-          <p:cNvPr id="4" name="TextBox 3"/>
+                <a:latin typeface="Consolas"/>
+              </a:defRPr>
+            </a:pPr>
+            <a:r>
+              <a:t>$ cd module7/examples/version_table &amp;&amp; make clean &amp;&amp; make run</a:t>
+            </a:r>
+          </a:p>
+        </p:txBody>
+      </p:sp>
+      <p:pic>
+        <p:nvPicPr>
+          <p:cNvPr id="4" name="Picture 3" descr="ex10_version_table.png"/>
+          <p:cNvPicPr>
+            <a:picLocks noChangeAspect="1"/>
+          </p:cNvPicPr>
+          <p:nvPr/>
+        </p:nvPicPr>
+        <p:blipFill>
+          <a:blip r:embed="rId2"/>
+          <a:stretch>
+            <a:fillRect/>
+          </a:stretch>
+        </p:blipFill>
+        <p:spPr>
+          <a:xfrm>
+            <a:off x="548640" y="1965960"/>
+            <a:ext cx="7071358" cy="3977639"/>
+          </a:xfrm>
+          <a:prstGeom prst="rect">
+            <a:avLst/>
+          </a:prstGeom>
+        </p:spPr>
+      </p:pic>
+      <p:sp>
+        <p:nvSpPr>
+          <p:cNvPr id="5" name="TextBox 4"/>
           <p:cNvSpPr txBox="1"/>
           <p:nvPr/>
         </p:nvSpPr>
@@ -6343,7 +7505,7 @@
               </a:defRPr>
             </a:pPr>
             <a:r>
-              <a:t>Exercises</a:t>
+              <a:t>Example 11: Version Selection</a:t>
             </a:r>
           </a:p>
         </p:txBody>
@@ -6385,7 +7547,7 @@
               </a:defRPr>
             </a:pPr>
             <a:r>
-              <a:t>• Migrating Everything at Once</a:t>
+              <a:t>• Runnable reminder of version-selection checklist</a:t>
             </a:r>
           </a:p>
           <a:p>
@@ -6404,7 +7566,7 @@
               </a:defRPr>
             </a:pPr>
             <a:r>
-              <a:t>• Ignoring Tool Support</a:t>
+              <a:t>      (constraints, decision, document)</a:t>
             </a:r>
           </a:p>
           <a:p>
@@ -6423,7 +7585,7 @@
               </a:defRPr>
             </a:pPr>
             <a:r>
-              <a:t>• Breaking Interfaces During Migration</a:t>
+              <a:t>• See MODULE7.md for full checklist</a:t>
             </a:r>
           </a:p>
           <a:p>
@@ -6442,7 +7604,7 @@
               </a:defRPr>
             </a:pPr>
             <a:r>
-              <a:t>• Mixing Revisions in One File</a:t>
+              <a:t>• Same D flip-flop in 1995, 2001, 2005, 1800</a:t>
             </a:r>
           </a:p>
           <a:p>
@@ -6461,7 +7623,102 @@
               </a:defRPr>
             </a:pPr>
             <a:r>
-              <a:t>• Forgetting to Test After Migration</a:t>
+              <a:t>      (sequential block style)</a:t>
+            </a:r>
+          </a:p>
+          <a:p>
+            <a:pPr>
+              <a:lnSpc>
+                <a:spcPts val="2200"/>
+              </a:lnSpc>
+              <a:spcAft>
+                <a:spcPts val="1000"/>
+              </a:spcAft>
+              <a:defRPr sz="2000" b="0">
+                <a:solidFill>
+                  <a:srgbClr val="333333"/>
+                </a:solidFill>
+                <a:latin typeface="Calibri"/>
+              </a:defRPr>
+            </a:pPr>
+            <a:r>
+              <a:t>• always @(posedge clk) vs always_ff; wire/reg vs</a:t>
+            </a:r>
+          </a:p>
+          <a:p>
+            <a:pPr>
+              <a:lnSpc>
+                <a:spcPts val="2200"/>
+              </a:lnSpc>
+              <a:spcAft>
+                <a:spcPts val="1000"/>
+              </a:spcAft>
+              <a:defRPr sz="2000" b="0">
+                <a:solidFill>
+                  <a:srgbClr val="333333"/>
+                </a:solidFill>
+                <a:latin typeface="Calibri"/>
+              </a:defRPr>
+            </a:pPr>
+            <a:r>
+              <a:t>      logic</a:t>
+            </a:r>
+          </a:p>
+          <a:p>
+            <a:pPr>
+              <a:lnSpc>
+                <a:spcPts val="2200"/>
+              </a:lnSpc>
+              <a:spcAft>
+                <a:spcPts val="1000"/>
+              </a:spcAft>
+              <a:defRPr sz="2000" b="0">
+                <a:solidFill>
+                  <a:srgbClr val="333333"/>
+                </a:solidFill>
+                <a:latin typeface="Calibri"/>
+              </a:defRPr>
+            </a:pPr>
+            <a:r>
+              <a:t>• Same tiny FSM in 1364 vs 1800 (case vs unique case,</a:t>
+            </a:r>
+          </a:p>
+          <a:p>
+            <a:pPr>
+              <a:lnSpc>
+                <a:spcPts val="2200"/>
+              </a:lnSpc>
+              <a:spcAft>
+                <a:spcPts val="1000"/>
+              </a:spcAft>
+              <a:defRPr sz="2000" b="0">
+                <a:solidFill>
+                  <a:srgbClr val="333333"/>
+                </a:solidFill>
+                <a:latin typeface="Calibri"/>
+              </a:defRPr>
+            </a:pPr>
+            <a:r>
+              <a:t>      always_ff)</a:t>
+            </a:r>
+          </a:p>
+          <a:p>
+            <a:pPr>
+              <a:lnSpc>
+                <a:spcPts val="2200"/>
+              </a:lnSpc>
+              <a:spcAft>
+                <a:spcPts val="1000"/>
+              </a:spcAft>
+              <a:defRPr sz="2000" b="0">
+                <a:solidFill>
+                  <a:srgbClr val="333333"/>
+                </a:solidFill>
+                <a:latin typeface="Calibri"/>
+              </a:defRPr>
+            </a:pPr>
+            <a:r>
+              <a:t>• Sequential FSM; 1800 always_ff and unique case</a:t>
             </a:r>
           </a:p>
         </p:txBody>
@@ -6557,7 +7814,171 @@
               </a:defRPr>
             </a:pPr>
             <a:r>
-              <a:t>Summary &amp; next steps</a:t>
+              <a:t>Demo: Version Selection</a:t>
+            </a:r>
+          </a:p>
+        </p:txBody>
+      </p:sp>
+      <p:sp>
+        <p:nvSpPr>
+          <p:cNvPr id="3" name="TextBox 2"/>
+          <p:cNvSpPr txBox="1"/>
+          <p:nvPr/>
+        </p:nvSpPr>
+        <p:spPr>
+          <a:xfrm>
+            <a:off x="548640" y="1051560"/>
+            <a:ext cx="11064240" cy="914400"/>
+          </a:xfrm>
+          <a:prstGeom prst="rect">
+            <a:avLst/>
+          </a:prstGeom>
+          <a:solidFill>
+            <a:srgbClr val="F4F4F4"/>
+          </a:solidFill>
+        </p:spPr>
+        <p:txBody>
+          <a:bodyPr wrap="square">
+            <a:noAutofit/>
+          </a:bodyPr>
+          <a:lstStyle/>
+          <a:p>
+            <a:pPr>
+              <a:lnSpc>
+                <a:spcPts val="2200"/>
+              </a:lnSpc>
+              <a:spcAft>
+                <a:spcPts val="200"/>
+              </a:spcAft>
+              <a:defRPr sz="2000" b="0">
+                <a:solidFill>
+                  <a:srgbClr val="333333"/>
+                </a:solidFill>
+                <a:latin typeface="Consolas"/>
+              </a:defRPr>
+            </a:pPr>
+            <a:r>
+              <a:t>$ cd module7/examples/version_selection &amp;&amp; make clean &amp;&amp; make run</a:t>
+            </a:r>
+          </a:p>
+        </p:txBody>
+      </p:sp>
+      <p:pic>
+        <p:nvPicPr>
+          <p:cNvPr id="4" name="Picture 3" descr="ex11_version_selection.png"/>
+          <p:cNvPicPr>
+            <a:picLocks noChangeAspect="1"/>
+          </p:cNvPicPr>
+          <p:nvPr/>
+        </p:nvPicPr>
+        <p:blipFill>
+          <a:blip r:embed="rId2"/>
+          <a:stretch>
+            <a:fillRect/>
+          </a:stretch>
+        </p:blipFill>
+        <p:spPr>
+          <a:xfrm>
+            <a:off x="548640" y="1965960"/>
+            <a:ext cx="7071358" cy="3977639"/>
+          </a:xfrm>
+          <a:prstGeom prst="rect">
+            <a:avLst/>
+          </a:prstGeom>
+        </p:spPr>
+      </p:pic>
+      <p:sp>
+        <p:nvSpPr>
+          <p:cNvPr id="5" name="TextBox 4"/>
+          <p:cNvSpPr txBox="1"/>
+          <p:nvPr/>
+        </p:nvSpPr>
+        <p:spPr>
+          <a:xfrm>
+            <a:off x="548640" y="6355080"/>
+            <a:ext cx="11064240" cy="320040"/>
+          </a:xfrm>
+          <a:prstGeom prst="rect">
+            <a:avLst/>
+          </a:prstGeom>
+          <a:noFill/>
+        </p:spPr>
+        <p:txBody>
+          <a:bodyPr wrap="square">
+            <a:noAutofit/>
+          </a:bodyPr>
+          <a:lstStyle/>
+          <a:p>
+            <a:pPr algn="r">
+              <a:lnSpc>
+                <a:spcPts val="2200"/>
+              </a:lnSpc>
+              <a:defRPr sz="1000" b="0">
+                <a:solidFill>
+                  <a:srgbClr val="666666"/>
+                </a:solidFill>
+                <a:latin typeface="Calibri"/>
+              </a:defRPr>
+            </a:pPr>
+            <a:r>
+              <a:t>learn_verilog_systemverilog / Module 7</a:t>
+            </a:r>
+          </a:p>
+        </p:txBody>
+      </p:sp>
+    </p:spTree>
+  </p:cSld>
+  <p:clrMapOvr>
+    <a:masterClrMapping/>
+  </p:clrMapOvr>
+</p:sld>
+</file>
+
+<file path=ppt/slides/slide23.xml><?xml version="1.0" encoding="utf-8"?>
+<p:sld xmlns:a="http://schemas.openxmlformats.org/drawingml/2006/main" xmlns:p="http://schemas.openxmlformats.org/presentationml/2006/main" xmlns:r="http://schemas.openxmlformats.org/officeDocument/2006/relationships">
+  <p:cSld>
+    <p:spTree>
+      <p:nvGrpSpPr>
+        <p:cNvPr id="1" name=""/>
+        <p:cNvGrpSpPr/>
+        <p:nvPr/>
+      </p:nvGrpSpPr>
+      <p:grpSpPr/>
+      <p:sp>
+        <p:nvSpPr>
+          <p:cNvPr id="2" name="TextBox 1"/>
+          <p:cNvSpPr txBox="1"/>
+          <p:nvPr/>
+        </p:nvSpPr>
+        <p:spPr>
+          <a:xfrm>
+            <a:off x="548640" y="411480"/>
+            <a:ext cx="11064240" cy="777240"/>
+          </a:xfrm>
+          <a:prstGeom prst="rect">
+            <a:avLst/>
+          </a:prstGeom>
+          <a:noFill/>
+        </p:spPr>
+        <p:txBody>
+          <a:bodyPr wrap="square">
+            <a:noAutofit/>
+          </a:bodyPr>
+          <a:lstStyle/>
+          <a:p>
+            <a:pPr>
+              <a:lnSpc>
+                <a:spcPts val="2200"/>
+              </a:lnSpc>
+              <a:defRPr sz="2800" b="1">
+                <a:solidFill>
+                  <a:srgbClr val="1A1A2E"/>
+                </a:solidFill>
+                <a:latin typeface="Calibri"/>
+              </a:defRPr>
+            </a:pPr>
+            <a:r>
+              <a:t>Example 14: Migration Checklist</a:t>
             </a:r>
           </a:p>
         </p:txBody>
@@ -6599,7 +8020,7 @@
               </a:defRPr>
             </a:pPr>
             <a:r>
-              <a:t>• Compare Verilog and SystemVerilog across IEEE</a:t>
+              <a:t>• Runnable reminder of 1364→1800 migration steps (pre,</a:t>
             </a:r>
           </a:p>
           <a:p>
@@ -6618,7 +8039,7 @@
               </a:defRPr>
             </a:pPr>
             <a:r>
-              <a:t>      versions side-by-side, plan migration between</a:t>
+              <a:t>      per-module, post)</a:t>
             </a:r>
           </a:p>
           <a:p>
@@ -6637,9 +8058,292 @@
               </a:defRPr>
             </a:pPr>
             <a:r>
-              <a:t>      standar…</a:t>
-            </a:r>
-          </a:p>
+              <a:t>• See MODULE7.md for full migration checklist</a:t>
+            </a:r>
+          </a:p>
+        </p:txBody>
+      </p:sp>
+      <p:sp>
+        <p:nvSpPr>
+          <p:cNvPr id="4" name="TextBox 3"/>
+          <p:cNvSpPr txBox="1"/>
+          <p:nvPr/>
+        </p:nvSpPr>
+        <p:spPr>
+          <a:xfrm>
+            <a:off x="548640" y="6355080"/>
+            <a:ext cx="11064240" cy="320040"/>
+          </a:xfrm>
+          <a:prstGeom prst="rect">
+            <a:avLst/>
+          </a:prstGeom>
+          <a:noFill/>
+        </p:spPr>
+        <p:txBody>
+          <a:bodyPr wrap="square">
+            <a:noAutofit/>
+          </a:bodyPr>
+          <a:lstStyle/>
+          <a:p>
+            <a:pPr algn="r">
+              <a:lnSpc>
+                <a:spcPts val="2200"/>
+              </a:lnSpc>
+              <a:defRPr sz="1000" b="0">
+                <a:solidFill>
+                  <a:srgbClr val="666666"/>
+                </a:solidFill>
+                <a:latin typeface="Calibri"/>
+              </a:defRPr>
+            </a:pPr>
+            <a:r>
+              <a:t>learn_verilog_systemverilog / Module 7</a:t>
+            </a:r>
+          </a:p>
+        </p:txBody>
+      </p:sp>
+    </p:spTree>
+  </p:cSld>
+  <p:clrMapOvr>
+    <a:masterClrMapping/>
+  </p:clrMapOvr>
+</p:sld>
+</file>
+
+<file path=ppt/slides/slide24.xml><?xml version="1.0" encoding="utf-8"?>
+<p:sld xmlns:a="http://schemas.openxmlformats.org/drawingml/2006/main" xmlns:p="http://schemas.openxmlformats.org/presentationml/2006/main" xmlns:r="http://schemas.openxmlformats.org/officeDocument/2006/relationships">
+  <p:cSld>
+    <p:spTree>
+      <p:nvGrpSpPr>
+        <p:cNvPr id="1" name=""/>
+        <p:cNvGrpSpPr/>
+        <p:nvPr/>
+      </p:nvGrpSpPr>
+      <p:grpSpPr/>
+      <p:sp>
+        <p:nvSpPr>
+          <p:cNvPr id="2" name="TextBox 1"/>
+          <p:cNvSpPr txBox="1"/>
+          <p:nvPr/>
+        </p:nvSpPr>
+        <p:spPr>
+          <a:xfrm>
+            <a:off x="548640" y="411480"/>
+            <a:ext cx="11064240" cy="777240"/>
+          </a:xfrm>
+          <a:prstGeom prst="rect">
+            <a:avLst/>
+          </a:prstGeom>
+          <a:noFill/>
+        </p:spPr>
+        <p:txBody>
+          <a:bodyPr wrap="square">
+            <a:noAutofit/>
+          </a:bodyPr>
+          <a:lstStyle/>
+          <a:p>
+            <a:pPr>
+              <a:lnSpc>
+                <a:spcPts val="2200"/>
+              </a:lnSpc>
+              <a:defRPr sz="2800" b="1">
+                <a:solidFill>
+                  <a:srgbClr val="1A1A2E"/>
+                </a:solidFill>
+                <a:latin typeface="Calibri"/>
+              </a:defRPr>
+            </a:pPr>
+            <a:r>
+              <a:t>Demo: Migration Checklist</a:t>
+            </a:r>
+          </a:p>
+        </p:txBody>
+      </p:sp>
+      <p:sp>
+        <p:nvSpPr>
+          <p:cNvPr id="3" name="TextBox 2"/>
+          <p:cNvSpPr txBox="1"/>
+          <p:nvPr/>
+        </p:nvSpPr>
+        <p:spPr>
+          <a:xfrm>
+            <a:off x="548640" y="1051560"/>
+            <a:ext cx="11064240" cy="914400"/>
+          </a:xfrm>
+          <a:prstGeom prst="rect">
+            <a:avLst/>
+          </a:prstGeom>
+          <a:solidFill>
+            <a:srgbClr val="F4F4F4"/>
+          </a:solidFill>
+        </p:spPr>
+        <p:txBody>
+          <a:bodyPr wrap="square">
+            <a:noAutofit/>
+          </a:bodyPr>
+          <a:lstStyle/>
+          <a:p>
+            <a:pPr>
+              <a:lnSpc>
+                <a:spcPts val="2200"/>
+              </a:lnSpc>
+              <a:spcAft>
+                <a:spcPts val="200"/>
+              </a:spcAft>
+              <a:defRPr sz="2000" b="0">
+                <a:solidFill>
+                  <a:srgbClr val="333333"/>
+                </a:solidFill>
+                <a:latin typeface="Consolas"/>
+              </a:defRPr>
+            </a:pPr>
+            <a:r>
+              <a:t>$ cd module7/examples/migration_checklist &amp;&amp; make clean &amp;&amp; make run</a:t>
+            </a:r>
+          </a:p>
+        </p:txBody>
+      </p:sp>
+      <p:pic>
+        <p:nvPicPr>
+          <p:cNvPr id="4" name="Picture 3" descr="ex14_migration_checklist.png"/>
+          <p:cNvPicPr>
+            <a:picLocks noChangeAspect="1"/>
+          </p:cNvPicPr>
+          <p:nvPr/>
+        </p:nvPicPr>
+        <p:blipFill>
+          <a:blip r:embed="rId2"/>
+          <a:stretch>
+            <a:fillRect/>
+          </a:stretch>
+        </p:blipFill>
+        <p:spPr>
+          <a:xfrm>
+            <a:off x="548640" y="1965960"/>
+            <a:ext cx="7071358" cy="3977639"/>
+          </a:xfrm>
+          <a:prstGeom prst="rect">
+            <a:avLst/>
+          </a:prstGeom>
+        </p:spPr>
+      </p:pic>
+      <p:sp>
+        <p:nvSpPr>
+          <p:cNvPr id="5" name="TextBox 4"/>
+          <p:cNvSpPr txBox="1"/>
+          <p:nvPr/>
+        </p:nvSpPr>
+        <p:spPr>
+          <a:xfrm>
+            <a:off x="548640" y="6355080"/>
+            <a:ext cx="11064240" cy="320040"/>
+          </a:xfrm>
+          <a:prstGeom prst="rect">
+            <a:avLst/>
+          </a:prstGeom>
+          <a:noFill/>
+        </p:spPr>
+        <p:txBody>
+          <a:bodyPr wrap="square">
+            <a:noAutofit/>
+          </a:bodyPr>
+          <a:lstStyle/>
+          <a:p>
+            <a:pPr algn="r">
+              <a:lnSpc>
+                <a:spcPts val="2200"/>
+              </a:lnSpc>
+              <a:defRPr sz="1000" b="0">
+                <a:solidFill>
+                  <a:srgbClr val="666666"/>
+                </a:solidFill>
+                <a:latin typeface="Calibri"/>
+              </a:defRPr>
+            </a:pPr>
+            <a:r>
+              <a:t>learn_verilog_systemverilog / Module 7</a:t>
+            </a:r>
+          </a:p>
+        </p:txBody>
+      </p:sp>
+    </p:spTree>
+  </p:cSld>
+  <p:clrMapOvr>
+    <a:masterClrMapping/>
+  </p:clrMapOvr>
+</p:sld>
+</file>
+
+<file path=ppt/slides/slide25.xml><?xml version="1.0" encoding="utf-8"?>
+<p:sld xmlns:a="http://schemas.openxmlformats.org/drawingml/2006/main" xmlns:p="http://schemas.openxmlformats.org/presentationml/2006/main" xmlns:r="http://schemas.openxmlformats.org/officeDocument/2006/relationships">
+  <p:cSld>
+    <p:spTree>
+      <p:nvGrpSpPr>
+        <p:cNvPr id="1" name=""/>
+        <p:cNvGrpSpPr/>
+        <p:nvPr/>
+      </p:nvGrpSpPr>
+      <p:grpSpPr/>
+      <p:sp>
+        <p:nvSpPr>
+          <p:cNvPr id="2" name="TextBox 1"/>
+          <p:cNvSpPr txBox="1"/>
+          <p:nvPr/>
+        </p:nvSpPr>
+        <p:spPr>
+          <a:xfrm>
+            <a:off x="548640" y="411480"/>
+            <a:ext cx="11064240" cy="777240"/>
+          </a:xfrm>
+          <a:prstGeom prst="rect">
+            <a:avLst/>
+          </a:prstGeom>
+          <a:noFill/>
+        </p:spPr>
+        <p:txBody>
+          <a:bodyPr wrap="square">
+            <a:noAutofit/>
+          </a:bodyPr>
+          <a:lstStyle/>
+          <a:p>
+            <a:pPr>
+              <a:lnSpc>
+                <a:spcPts val="2200"/>
+              </a:lnSpc>
+              <a:defRPr sz="2800" b="1">
+                <a:solidFill>
+                  <a:srgbClr val="1A1A2E"/>
+                </a:solidFill>
+                <a:latin typeface="Calibri"/>
+              </a:defRPr>
+            </a:pPr>
+            <a:r>
+              <a:t>Example 15: Incremental Migration</a:t>
+            </a:r>
+          </a:p>
+        </p:txBody>
+      </p:sp>
+      <p:sp>
+        <p:nvSpPr>
+          <p:cNvPr id="3" name="TextBox 2"/>
+          <p:cNvSpPr txBox="1"/>
+          <p:nvPr/>
+        </p:nvSpPr>
+        <p:spPr>
+          <a:xfrm>
+            <a:off x="548640" y="1234440"/>
+            <a:ext cx="11064240" cy="4937760"/>
+          </a:xfrm>
+          <a:prstGeom prst="rect">
+            <a:avLst/>
+          </a:prstGeom>
+          <a:noFill/>
+        </p:spPr>
+        <p:txBody>
+          <a:bodyPr wrap="square">
+            <a:noAutofit/>
+          </a:bodyPr>
+          <a:lstStyle/>
           <a:p>
             <a:pPr>
               <a:lnSpc>
@@ -6656,7 +8360,7 @@
               </a:defRPr>
             </a:pPr>
             <a:r>
-              <a:t>• Complete module7/CHECKLIST.md</a:t>
+              <a:t>• Two steps: step1 1364 style, step2 1800 style; same</a:t>
             </a:r>
           </a:p>
           <a:p>
@@ -6675,7 +8379,7 @@
               </a:defRPr>
             </a:pPr>
             <a:r>
-              <a:t>• Run ./scripts/module7.sh --check</a:t>
+              <a:t>      mux, compare outputs</a:t>
             </a:r>
           </a:p>
           <a:p>
@@ -6694,7 +8398,706 @@
               </a:defRPr>
             </a:pPr>
             <a:r>
-              <a:t>• Next: Next module in course</a:t>
+              <a:t>• Migrate one construct at a time; test after each</a:t>
+            </a:r>
+          </a:p>
+          <a:p>
+            <a:pPr>
+              <a:lnSpc>
+                <a:spcPts val="2200"/>
+              </a:lnSpc>
+              <a:spcAft>
+                <a:spcPts val="1000"/>
+              </a:spcAft>
+              <a:defRPr sz="2000" b="0">
+                <a:solidFill>
+                  <a:srgbClr val="333333"/>
+                </a:solidFill>
+                <a:latin typeface="Calibri"/>
+              </a:defRPr>
+            </a:pPr>
+            <a:r>
+              <a:t>      step</a:t>
+            </a:r>
+          </a:p>
+        </p:txBody>
+      </p:sp>
+      <p:sp>
+        <p:nvSpPr>
+          <p:cNvPr id="4" name="TextBox 3"/>
+          <p:cNvSpPr txBox="1"/>
+          <p:nvPr/>
+        </p:nvSpPr>
+        <p:spPr>
+          <a:xfrm>
+            <a:off x="548640" y="6355080"/>
+            <a:ext cx="11064240" cy="320040"/>
+          </a:xfrm>
+          <a:prstGeom prst="rect">
+            <a:avLst/>
+          </a:prstGeom>
+          <a:noFill/>
+        </p:spPr>
+        <p:txBody>
+          <a:bodyPr wrap="square">
+            <a:noAutofit/>
+          </a:bodyPr>
+          <a:lstStyle/>
+          <a:p>
+            <a:pPr algn="r">
+              <a:lnSpc>
+                <a:spcPts val="2200"/>
+              </a:lnSpc>
+              <a:defRPr sz="1000" b="0">
+                <a:solidFill>
+                  <a:srgbClr val="666666"/>
+                </a:solidFill>
+                <a:latin typeface="Calibri"/>
+              </a:defRPr>
+            </a:pPr>
+            <a:r>
+              <a:t>learn_verilog_systemverilog / Module 7</a:t>
+            </a:r>
+          </a:p>
+        </p:txBody>
+      </p:sp>
+    </p:spTree>
+  </p:cSld>
+  <p:clrMapOvr>
+    <a:masterClrMapping/>
+  </p:clrMapOvr>
+</p:sld>
+</file>
+
+<file path=ppt/slides/slide26.xml><?xml version="1.0" encoding="utf-8"?>
+<p:sld xmlns:a="http://schemas.openxmlformats.org/drawingml/2006/main" xmlns:p="http://schemas.openxmlformats.org/presentationml/2006/main" xmlns:r="http://schemas.openxmlformats.org/officeDocument/2006/relationships">
+  <p:cSld>
+    <p:spTree>
+      <p:nvGrpSpPr>
+        <p:cNvPr id="1" name=""/>
+        <p:cNvGrpSpPr/>
+        <p:nvPr/>
+      </p:nvGrpSpPr>
+      <p:grpSpPr/>
+      <p:sp>
+        <p:nvSpPr>
+          <p:cNvPr id="2" name="TextBox 1"/>
+          <p:cNvSpPr txBox="1"/>
+          <p:nvPr/>
+        </p:nvSpPr>
+        <p:spPr>
+          <a:xfrm>
+            <a:off x="548640" y="411480"/>
+            <a:ext cx="11064240" cy="777240"/>
+          </a:xfrm>
+          <a:prstGeom prst="rect">
+            <a:avLst/>
+          </a:prstGeom>
+          <a:noFill/>
+        </p:spPr>
+        <p:txBody>
+          <a:bodyPr wrap="square">
+            <a:noAutofit/>
+          </a:bodyPr>
+          <a:lstStyle/>
+          <a:p>
+            <a:pPr>
+              <a:lnSpc>
+                <a:spcPts val="2200"/>
+              </a:lnSpc>
+              <a:defRPr sz="2800" b="1">
+                <a:solidFill>
+                  <a:srgbClr val="1A1A2E"/>
+                </a:solidFill>
+                <a:latin typeface="Calibri"/>
+              </a:defRPr>
+            </a:pPr>
+            <a:r>
+              <a:t>Demo: Incremental Migration</a:t>
+            </a:r>
+          </a:p>
+        </p:txBody>
+      </p:sp>
+      <p:sp>
+        <p:nvSpPr>
+          <p:cNvPr id="3" name="TextBox 2"/>
+          <p:cNvSpPr txBox="1"/>
+          <p:nvPr/>
+        </p:nvSpPr>
+        <p:spPr>
+          <a:xfrm>
+            <a:off x="548640" y="1051560"/>
+            <a:ext cx="11064240" cy="914400"/>
+          </a:xfrm>
+          <a:prstGeom prst="rect">
+            <a:avLst/>
+          </a:prstGeom>
+          <a:solidFill>
+            <a:srgbClr val="F4F4F4"/>
+          </a:solidFill>
+        </p:spPr>
+        <p:txBody>
+          <a:bodyPr wrap="square">
+            <a:noAutofit/>
+          </a:bodyPr>
+          <a:lstStyle/>
+          <a:p>
+            <a:pPr>
+              <a:lnSpc>
+                <a:spcPts val="2200"/>
+              </a:lnSpc>
+              <a:spcAft>
+                <a:spcPts val="200"/>
+              </a:spcAft>
+              <a:defRPr sz="2000" b="0">
+                <a:solidFill>
+                  <a:srgbClr val="333333"/>
+                </a:solidFill>
+                <a:latin typeface="Consolas"/>
+              </a:defRPr>
+            </a:pPr>
+            <a:r>
+              <a:t>$ cd module7/examples/incremental_migration &amp;&amp; make clean &amp;&amp; make run</a:t>
+            </a:r>
+          </a:p>
+        </p:txBody>
+      </p:sp>
+      <p:pic>
+        <p:nvPicPr>
+          <p:cNvPr id="4" name="Picture 3" descr="ex15_incremental_migration.png"/>
+          <p:cNvPicPr>
+            <a:picLocks noChangeAspect="1"/>
+          </p:cNvPicPr>
+          <p:nvPr/>
+        </p:nvPicPr>
+        <p:blipFill>
+          <a:blip r:embed="rId2"/>
+          <a:stretch>
+            <a:fillRect/>
+          </a:stretch>
+        </p:blipFill>
+        <p:spPr>
+          <a:xfrm>
+            <a:off x="548640" y="1965960"/>
+            <a:ext cx="7071358" cy="3977639"/>
+          </a:xfrm>
+          <a:prstGeom prst="rect">
+            <a:avLst/>
+          </a:prstGeom>
+        </p:spPr>
+      </p:pic>
+      <p:sp>
+        <p:nvSpPr>
+          <p:cNvPr id="5" name="TextBox 4"/>
+          <p:cNvSpPr txBox="1"/>
+          <p:nvPr/>
+        </p:nvSpPr>
+        <p:spPr>
+          <a:xfrm>
+            <a:off x="548640" y="6355080"/>
+            <a:ext cx="11064240" cy="320040"/>
+          </a:xfrm>
+          <a:prstGeom prst="rect">
+            <a:avLst/>
+          </a:prstGeom>
+          <a:noFill/>
+        </p:spPr>
+        <p:txBody>
+          <a:bodyPr wrap="square">
+            <a:noAutofit/>
+          </a:bodyPr>
+          <a:lstStyle/>
+          <a:p>
+            <a:pPr algn="r">
+              <a:lnSpc>
+                <a:spcPts val="2200"/>
+              </a:lnSpc>
+              <a:defRPr sz="1000" b="0">
+                <a:solidFill>
+                  <a:srgbClr val="666666"/>
+                </a:solidFill>
+                <a:latin typeface="Calibri"/>
+              </a:defRPr>
+            </a:pPr>
+            <a:r>
+              <a:t>learn_verilog_systemverilog / Module 7</a:t>
+            </a:r>
+          </a:p>
+        </p:txBody>
+      </p:sp>
+    </p:spTree>
+  </p:cSld>
+  <p:clrMapOvr>
+    <a:masterClrMapping/>
+  </p:clrMapOvr>
+</p:sld>
+</file>
+
+<file path=ppt/slides/slide27.xml><?xml version="1.0" encoding="utf-8"?>
+<p:sld xmlns:a="http://schemas.openxmlformats.org/drawingml/2006/main" xmlns:p="http://schemas.openxmlformats.org/presentationml/2006/main" xmlns:r="http://schemas.openxmlformats.org/officeDocument/2006/relationships">
+  <p:cSld>
+    <p:spTree>
+      <p:nvGrpSpPr>
+        <p:cNvPr id="1" name=""/>
+        <p:cNvGrpSpPr/>
+        <p:nvPr/>
+      </p:nvGrpSpPr>
+      <p:grpSpPr/>
+      <p:sp>
+        <p:nvSpPr>
+          <p:cNvPr id="2" name="TextBox 1"/>
+          <p:cNvSpPr txBox="1"/>
+          <p:nvPr/>
+        </p:nvSpPr>
+        <p:spPr>
+          <a:xfrm>
+            <a:off x="548640" y="411480"/>
+            <a:ext cx="11064240" cy="777240"/>
+          </a:xfrm>
+          <a:prstGeom prst="rect">
+            <a:avLst/>
+          </a:prstGeom>
+          <a:noFill/>
+        </p:spPr>
+        <p:txBody>
+          <a:bodyPr wrap="square">
+            <a:noAutofit/>
+          </a:bodyPr>
+          <a:lstStyle/>
+          <a:p>
+            <a:pPr>
+              <a:lnSpc>
+                <a:spcPts val="2200"/>
+              </a:lnSpc>
+              <a:defRPr sz="2800" b="1">
+                <a:solidFill>
+                  <a:srgbClr val="1A1A2E"/>
+                </a:solidFill>
+                <a:latin typeface="Calibri"/>
+              </a:defRPr>
+            </a:pPr>
+            <a:r>
+              <a:t>Example 16: Port Style Compare</a:t>
+            </a:r>
+          </a:p>
+        </p:txBody>
+      </p:sp>
+      <p:sp>
+        <p:nvSpPr>
+          <p:cNvPr id="3" name="TextBox 2"/>
+          <p:cNvSpPr txBox="1"/>
+          <p:nvPr/>
+        </p:nvSpPr>
+        <p:spPr>
+          <a:xfrm>
+            <a:off x="548640" y="1234440"/>
+            <a:ext cx="11064240" cy="4937760"/>
+          </a:xfrm>
+          <a:prstGeom prst="rect">
+            <a:avLst/>
+          </a:prstGeom>
+          <a:noFill/>
+        </p:spPr>
+        <p:txBody>
+          <a:bodyPr wrap="square">
+            <a:noAutofit/>
+          </a:bodyPr>
+          <a:lstStyle/>
+          <a:p>
+            <a:pPr>
+              <a:lnSpc>
+                <a:spcPts val="2200"/>
+              </a:lnSpc>
+              <a:spcAft>
+                <a:spcPts val="1000"/>
+              </a:spcAft>
+              <a:defRPr sz="2000" b="0">
+                <a:solidFill>
+                  <a:srgbClr val="333333"/>
+                </a:solidFill>
+                <a:latin typeface="Calibri"/>
+              </a:defRPr>
+            </a:pPr>
+            <a:r>
+              <a:t>• Same 2:1 mux: non-ANSI (1995) vs ANSI (2001) ports</a:t>
+            </a:r>
+          </a:p>
+          <a:p>
+            <a:pPr>
+              <a:lnSpc>
+                <a:spcPts val="2200"/>
+              </a:lnSpc>
+              <a:spcAft>
+                <a:spcPts val="1000"/>
+              </a:spcAft>
+              <a:defRPr sz="2000" b="0">
+                <a:solidFill>
+                  <a:srgbClr val="333333"/>
+                </a:solidFill>
+                <a:latin typeface="Calibri"/>
+              </a:defRPr>
+            </a:pPr>
+            <a:r>
+              <a:t>      only</a:t>
+            </a:r>
+          </a:p>
+          <a:p>
+            <a:pPr>
+              <a:lnSpc>
+                <a:spcPts val="2200"/>
+              </a:lnSpc>
+              <a:spcAft>
+                <a:spcPts val="1000"/>
+              </a:spcAft>
+              <a:defRPr sz="2000" b="0">
+                <a:solidFill>
+                  <a:srgbClr val="333333"/>
+                </a:solidFill>
+                <a:latin typeface="Calibri"/>
+              </a:defRPr>
+            </a:pPr>
+            <a:r>
+              <a:t>• Port declaration style; no other change</a:t>
+            </a:r>
+          </a:p>
+        </p:txBody>
+      </p:sp>
+      <p:sp>
+        <p:nvSpPr>
+          <p:cNvPr id="4" name="TextBox 3"/>
+          <p:cNvSpPr txBox="1"/>
+          <p:nvPr/>
+        </p:nvSpPr>
+        <p:spPr>
+          <a:xfrm>
+            <a:off x="548640" y="6355080"/>
+            <a:ext cx="11064240" cy="320040"/>
+          </a:xfrm>
+          <a:prstGeom prst="rect">
+            <a:avLst/>
+          </a:prstGeom>
+          <a:noFill/>
+        </p:spPr>
+        <p:txBody>
+          <a:bodyPr wrap="square">
+            <a:noAutofit/>
+          </a:bodyPr>
+          <a:lstStyle/>
+          <a:p>
+            <a:pPr algn="r">
+              <a:lnSpc>
+                <a:spcPts val="2200"/>
+              </a:lnSpc>
+              <a:defRPr sz="1000" b="0">
+                <a:solidFill>
+                  <a:srgbClr val="666666"/>
+                </a:solidFill>
+                <a:latin typeface="Calibri"/>
+              </a:defRPr>
+            </a:pPr>
+            <a:r>
+              <a:t>learn_verilog_systemverilog / Module 7</a:t>
+            </a:r>
+          </a:p>
+        </p:txBody>
+      </p:sp>
+    </p:spTree>
+  </p:cSld>
+  <p:clrMapOvr>
+    <a:masterClrMapping/>
+  </p:clrMapOvr>
+</p:sld>
+</file>
+
+<file path=ppt/slides/slide28.xml><?xml version="1.0" encoding="utf-8"?>
+<p:sld xmlns:a="http://schemas.openxmlformats.org/drawingml/2006/main" xmlns:p="http://schemas.openxmlformats.org/presentationml/2006/main" xmlns:r="http://schemas.openxmlformats.org/officeDocument/2006/relationships">
+  <p:cSld>
+    <p:spTree>
+      <p:nvGrpSpPr>
+        <p:cNvPr id="1" name=""/>
+        <p:cNvGrpSpPr/>
+        <p:nvPr/>
+      </p:nvGrpSpPr>
+      <p:grpSpPr/>
+      <p:sp>
+        <p:nvSpPr>
+          <p:cNvPr id="2" name="TextBox 1"/>
+          <p:cNvSpPr txBox="1"/>
+          <p:nvPr/>
+        </p:nvSpPr>
+        <p:spPr>
+          <a:xfrm>
+            <a:off x="548640" y="411480"/>
+            <a:ext cx="11064240" cy="777240"/>
+          </a:xfrm>
+          <a:prstGeom prst="rect">
+            <a:avLst/>
+          </a:prstGeom>
+          <a:noFill/>
+        </p:spPr>
+        <p:txBody>
+          <a:bodyPr wrap="square">
+            <a:noAutofit/>
+          </a:bodyPr>
+          <a:lstStyle/>
+          <a:p>
+            <a:pPr>
+              <a:lnSpc>
+                <a:spcPts val="2200"/>
+              </a:lnSpc>
+              <a:defRPr sz="2800" b="1">
+                <a:solidFill>
+                  <a:srgbClr val="1A1A2E"/>
+                </a:solidFill>
+                <a:latin typeface="Calibri"/>
+              </a:defRPr>
+            </a:pPr>
+            <a:r>
+              <a:t>Demo: Port Style Compare</a:t>
+            </a:r>
+          </a:p>
+        </p:txBody>
+      </p:sp>
+      <p:sp>
+        <p:nvSpPr>
+          <p:cNvPr id="3" name="TextBox 2"/>
+          <p:cNvSpPr txBox="1"/>
+          <p:nvPr/>
+        </p:nvSpPr>
+        <p:spPr>
+          <a:xfrm>
+            <a:off x="548640" y="1051560"/>
+            <a:ext cx="11064240" cy="914400"/>
+          </a:xfrm>
+          <a:prstGeom prst="rect">
+            <a:avLst/>
+          </a:prstGeom>
+          <a:solidFill>
+            <a:srgbClr val="F4F4F4"/>
+          </a:solidFill>
+        </p:spPr>
+        <p:txBody>
+          <a:bodyPr wrap="square">
+            <a:noAutofit/>
+          </a:bodyPr>
+          <a:lstStyle/>
+          <a:p>
+            <a:pPr>
+              <a:lnSpc>
+                <a:spcPts val="2200"/>
+              </a:lnSpc>
+              <a:spcAft>
+                <a:spcPts val="200"/>
+              </a:spcAft>
+              <a:defRPr sz="2000" b="0">
+                <a:solidFill>
+                  <a:srgbClr val="333333"/>
+                </a:solidFill>
+                <a:latin typeface="Consolas"/>
+              </a:defRPr>
+            </a:pPr>
+            <a:r>
+              <a:t>$ cd module7/examples/port_style_compare &amp;&amp; make clean &amp;&amp; make run</a:t>
+            </a:r>
+          </a:p>
+        </p:txBody>
+      </p:sp>
+      <p:pic>
+        <p:nvPicPr>
+          <p:cNvPr id="4" name="Picture 3" descr="ex16_port_style_compare.png"/>
+          <p:cNvPicPr>
+            <a:picLocks noChangeAspect="1"/>
+          </p:cNvPicPr>
+          <p:nvPr/>
+        </p:nvPicPr>
+        <p:blipFill>
+          <a:blip r:embed="rId2"/>
+          <a:stretch>
+            <a:fillRect/>
+          </a:stretch>
+        </p:blipFill>
+        <p:spPr>
+          <a:xfrm>
+            <a:off x="548640" y="1965960"/>
+            <a:ext cx="7071358" cy="3977639"/>
+          </a:xfrm>
+          <a:prstGeom prst="rect">
+            <a:avLst/>
+          </a:prstGeom>
+        </p:spPr>
+      </p:pic>
+      <p:sp>
+        <p:nvSpPr>
+          <p:cNvPr id="5" name="TextBox 4"/>
+          <p:cNvSpPr txBox="1"/>
+          <p:nvPr/>
+        </p:nvSpPr>
+        <p:spPr>
+          <a:xfrm>
+            <a:off x="548640" y="6355080"/>
+            <a:ext cx="11064240" cy="320040"/>
+          </a:xfrm>
+          <a:prstGeom prst="rect">
+            <a:avLst/>
+          </a:prstGeom>
+          <a:noFill/>
+        </p:spPr>
+        <p:txBody>
+          <a:bodyPr wrap="square">
+            <a:noAutofit/>
+          </a:bodyPr>
+          <a:lstStyle/>
+          <a:p>
+            <a:pPr algn="r">
+              <a:lnSpc>
+                <a:spcPts val="2200"/>
+              </a:lnSpc>
+              <a:defRPr sz="1000" b="0">
+                <a:solidFill>
+                  <a:srgbClr val="666666"/>
+                </a:solidFill>
+                <a:latin typeface="Calibri"/>
+              </a:defRPr>
+            </a:pPr>
+            <a:r>
+              <a:t>learn_verilog_systemverilog / Module 7</a:t>
+            </a:r>
+          </a:p>
+        </p:txBody>
+      </p:sp>
+    </p:spTree>
+  </p:cSld>
+  <p:clrMapOvr>
+    <a:masterClrMapping/>
+  </p:clrMapOvr>
+</p:sld>
+</file>
+
+<file path=ppt/slides/slide29.xml><?xml version="1.0" encoding="utf-8"?>
+<p:sld xmlns:a="http://schemas.openxmlformats.org/drawingml/2006/main" xmlns:p="http://schemas.openxmlformats.org/presentationml/2006/main" xmlns:r="http://schemas.openxmlformats.org/officeDocument/2006/relationships">
+  <p:cSld>
+    <p:spTree>
+      <p:nvGrpSpPr>
+        <p:cNvPr id="1" name=""/>
+        <p:cNvGrpSpPr/>
+        <p:nvPr/>
+      </p:nvGrpSpPr>
+      <p:grpSpPr/>
+      <p:sp>
+        <p:nvSpPr>
+          <p:cNvPr id="2" name="TextBox 1"/>
+          <p:cNvSpPr txBox="1"/>
+          <p:nvPr/>
+        </p:nvSpPr>
+        <p:spPr>
+          <a:xfrm>
+            <a:off x="548640" y="411480"/>
+            <a:ext cx="11064240" cy="777240"/>
+          </a:xfrm>
+          <a:prstGeom prst="rect">
+            <a:avLst/>
+          </a:prstGeom>
+          <a:noFill/>
+        </p:spPr>
+        <p:txBody>
+          <a:bodyPr wrap="square">
+            <a:noAutofit/>
+          </a:bodyPr>
+          <a:lstStyle/>
+          <a:p>
+            <a:pPr>
+              <a:lnSpc>
+                <a:spcPts val="2200"/>
+              </a:lnSpc>
+              <a:defRPr sz="2800" b="1">
+                <a:solidFill>
+                  <a:srgbClr val="1A1A2E"/>
+                </a:solidFill>
+                <a:latin typeface="Calibri"/>
+              </a:defRPr>
+            </a:pPr>
+            <a:r>
+              <a:t>Example 17: No defparam</a:t>
+            </a:r>
+          </a:p>
+        </p:txBody>
+      </p:sp>
+      <p:sp>
+        <p:nvSpPr>
+          <p:cNvPr id="3" name="TextBox 2"/>
+          <p:cNvSpPr txBox="1"/>
+          <p:nvPr/>
+        </p:nvSpPr>
+        <p:spPr>
+          <a:xfrm>
+            <a:off x="548640" y="1234440"/>
+            <a:ext cx="11064240" cy="4937760"/>
+          </a:xfrm>
+          <a:prstGeom prst="rect">
+            <a:avLst/>
+          </a:prstGeom>
+          <a:noFill/>
+        </p:spPr>
+        <p:txBody>
+          <a:bodyPr wrap="square">
+            <a:noAutofit/>
+          </a:bodyPr>
+          <a:lstStyle/>
+          <a:p>
+            <a:pPr>
+              <a:lnSpc>
+                <a:spcPts val="2200"/>
+              </a:lnSpc>
+              <a:spcAft>
+                <a:spcPts val="1000"/>
+              </a:spcAft>
+              <a:defRPr sz="2000" b="0">
+                <a:solidFill>
+                  <a:srgbClr val="333333"/>
+                </a:solidFill>
+                <a:latin typeface="Calibri"/>
+              </a:defRPr>
+            </a:pPr>
+            <a:r>
+              <a:t>• 1364-2005: parameter override at instantiation</a:t>
+            </a:r>
+          </a:p>
+          <a:p>
+            <a:pPr>
+              <a:lnSpc>
+                <a:spcPts val="2200"/>
+              </a:lnSpc>
+              <a:spcAft>
+                <a:spcPts val="1000"/>
+              </a:spcAft>
+              <a:defRPr sz="2000" b="0">
+                <a:solidFill>
+                  <a:srgbClr val="333333"/>
+                </a:solidFill>
+                <a:latin typeface="Calibri"/>
+              </a:defRPr>
+            </a:pPr>
+            <a:r>
+              <a:t>      #(.WIDTH(n)); avoid defparam</a:t>
+            </a:r>
+          </a:p>
+          <a:p>
+            <a:pPr>
+              <a:lnSpc>
+                <a:spcPts val="2200"/>
+              </a:lnSpc>
+              <a:spcAft>
+                <a:spcPts val="1000"/>
+              </a:spcAft>
+              <a:defRPr sz="2000" b="0">
+                <a:solidFill>
+                  <a:srgbClr val="333333"/>
+                </a:solidFill>
+                <a:latin typeface="Calibri"/>
+              </a:defRPr>
+            </a:pPr>
+            <a:r>
+              <a:t>• defparam deprecated; use instantiation override</a:t>
             </a:r>
           </a:p>
         </p:txBody>
@@ -6884,6 +9287,2278 @@
 </p:sld>
 </file>
 
+<file path=ppt/slides/slide30.xml><?xml version="1.0" encoding="utf-8"?>
+<p:sld xmlns:a="http://schemas.openxmlformats.org/drawingml/2006/main" xmlns:p="http://schemas.openxmlformats.org/presentationml/2006/main" xmlns:r="http://schemas.openxmlformats.org/officeDocument/2006/relationships">
+  <p:cSld>
+    <p:spTree>
+      <p:nvGrpSpPr>
+        <p:cNvPr id="1" name=""/>
+        <p:cNvGrpSpPr/>
+        <p:nvPr/>
+      </p:nvGrpSpPr>
+      <p:grpSpPr/>
+      <p:sp>
+        <p:nvSpPr>
+          <p:cNvPr id="2" name="TextBox 1"/>
+          <p:cNvSpPr txBox="1"/>
+          <p:nvPr/>
+        </p:nvSpPr>
+        <p:spPr>
+          <a:xfrm>
+            <a:off x="548640" y="411480"/>
+            <a:ext cx="11064240" cy="777240"/>
+          </a:xfrm>
+          <a:prstGeom prst="rect">
+            <a:avLst/>
+          </a:prstGeom>
+          <a:noFill/>
+        </p:spPr>
+        <p:txBody>
+          <a:bodyPr wrap="square">
+            <a:noAutofit/>
+          </a:bodyPr>
+          <a:lstStyle/>
+          <a:p>
+            <a:pPr>
+              <a:lnSpc>
+                <a:spcPts val="2200"/>
+              </a:lnSpc>
+              <a:defRPr sz="2800" b="1">
+                <a:solidFill>
+                  <a:srgbClr val="1A1A2E"/>
+                </a:solidFill>
+                <a:latin typeface="Calibri"/>
+              </a:defRPr>
+            </a:pPr>
+            <a:r>
+              <a:t>Demo: No defparam</a:t>
+            </a:r>
+          </a:p>
+        </p:txBody>
+      </p:sp>
+      <p:sp>
+        <p:nvSpPr>
+          <p:cNvPr id="3" name="TextBox 2"/>
+          <p:cNvSpPr txBox="1"/>
+          <p:nvPr/>
+        </p:nvSpPr>
+        <p:spPr>
+          <a:xfrm>
+            <a:off x="548640" y="1051560"/>
+            <a:ext cx="11064240" cy="914400"/>
+          </a:xfrm>
+          <a:prstGeom prst="rect">
+            <a:avLst/>
+          </a:prstGeom>
+          <a:solidFill>
+            <a:srgbClr val="F4F4F4"/>
+          </a:solidFill>
+        </p:spPr>
+        <p:txBody>
+          <a:bodyPr wrap="square">
+            <a:noAutofit/>
+          </a:bodyPr>
+          <a:lstStyle/>
+          <a:p>
+            <a:pPr>
+              <a:lnSpc>
+                <a:spcPts val="2200"/>
+              </a:lnSpc>
+              <a:spcAft>
+                <a:spcPts val="200"/>
+              </a:spcAft>
+              <a:defRPr sz="2000" b="0">
+                <a:solidFill>
+                  <a:srgbClr val="333333"/>
+                </a:solidFill>
+                <a:latin typeface="Consolas"/>
+              </a:defRPr>
+            </a:pPr>
+            <a:r>
+              <a:t>$ cd module7/examples/no_defparam &amp;&amp; make clean &amp;&amp; make run</a:t>
+            </a:r>
+          </a:p>
+        </p:txBody>
+      </p:sp>
+      <p:pic>
+        <p:nvPicPr>
+          <p:cNvPr id="4" name="Picture 3" descr="ex17_no_defparam.png"/>
+          <p:cNvPicPr>
+            <a:picLocks noChangeAspect="1"/>
+          </p:cNvPicPr>
+          <p:nvPr/>
+        </p:nvPicPr>
+        <p:blipFill>
+          <a:blip r:embed="rId2"/>
+          <a:stretch>
+            <a:fillRect/>
+          </a:stretch>
+        </p:blipFill>
+        <p:spPr>
+          <a:xfrm>
+            <a:off x="548640" y="1965960"/>
+            <a:ext cx="7071358" cy="3977639"/>
+          </a:xfrm>
+          <a:prstGeom prst="rect">
+            <a:avLst/>
+          </a:prstGeom>
+        </p:spPr>
+      </p:pic>
+      <p:sp>
+        <p:nvSpPr>
+          <p:cNvPr id="5" name="TextBox 4"/>
+          <p:cNvSpPr txBox="1"/>
+          <p:nvPr/>
+        </p:nvSpPr>
+        <p:spPr>
+          <a:xfrm>
+            <a:off x="548640" y="6355080"/>
+            <a:ext cx="11064240" cy="320040"/>
+          </a:xfrm>
+          <a:prstGeom prst="rect">
+            <a:avLst/>
+          </a:prstGeom>
+          <a:noFill/>
+        </p:spPr>
+        <p:txBody>
+          <a:bodyPr wrap="square">
+            <a:noAutofit/>
+          </a:bodyPr>
+          <a:lstStyle/>
+          <a:p>
+            <a:pPr algn="r">
+              <a:lnSpc>
+                <a:spcPts val="2200"/>
+              </a:lnSpc>
+              <a:defRPr sz="1000" b="0">
+                <a:solidFill>
+                  <a:srgbClr val="666666"/>
+                </a:solidFill>
+                <a:latin typeface="Calibri"/>
+              </a:defRPr>
+            </a:pPr>
+            <a:r>
+              <a:t>learn_verilog_systemverilog / Module 7</a:t>
+            </a:r>
+          </a:p>
+        </p:txBody>
+      </p:sp>
+    </p:spTree>
+  </p:cSld>
+  <p:clrMapOvr>
+    <a:masterClrMapping/>
+  </p:clrMapOvr>
+</p:sld>
+</file>
+
+<file path=ppt/slides/slide31.xml><?xml version="1.0" encoding="utf-8"?>
+<p:sld xmlns:a="http://schemas.openxmlformats.org/drawingml/2006/main" xmlns:p="http://schemas.openxmlformats.org/presentationml/2006/main" xmlns:r="http://schemas.openxmlformats.org/officeDocument/2006/relationships">
+  <p:cSld>
+    <p:spTree>
+      <p:nvGrpSpPr>
+        <p:cNvPr id="1" name=""/>
+        <p:cNvGrpSpPr/>
+        <p:nvPr/>
+      </p:nvGrpSpPr>
+      <p:grpSpPr/>
+      <p:sp>
+        <p:nvSpPr>
+          <p:cNvPr id="2" name="TextBox 1"/>
+          <p:cNvSpPr txBox="1"/>
+          <p:nvPr/>
+        </p:nvSpPr>
+        <p:spPr>
+          <a:xfrm>
+            <a:off x="548640" y="2743200"/>
+            <a:ext cx="11064240" cy="1371600"/>
+          </a:xfrm>
+          <a:prstGeom prst="rect">
+            <a:avLst/>
+          </a:prstGeom>
+          <a:noFill/>
+        </p:spPr>
+        <p:txBody>
+          <a:bodyPr wrap="square">
+            <a:noAutofit/>
+          </a:bodyPr>
+          <a:lstStyle/>
+          <a:p>
+            <a:pPr algn="ctr">
+              <a:lnSpc>
+                <a:spcPts val="2200"/>
+              </a:lnSpc>
+              <a:defRPr sz="3600" b="1">
+                <a:solidFill>
+                  <a:srgbClr val="1A1A2E"/>
+                </a:solidFill>
+                <a:latin typeface="Calibri"/>
+              </a:defRPr>
+            </a:pPr>
+            <a:r>
+              <a:t>Common pitfalls</a:t>
+            </a:r>
+          </a:p>
+        </p:txBody>
+      </p:sp>
+      <p:sp>
+        <p:nvSpPr>
+          <p:cNvPr id="3" name="TextBox 2"/>
+          <p:cNvSpPr txBox="1"/>
+          <p:nvPr/>
+        </p:nvSpPr>
+        <p:spPr>
+          <a:xfrm>
+            <a:off x="548640" y="6355080"/>
+            <a:ext cx="11064240" cy="320040"/>
+          </a:xfrm>
+          <a:prstGeom prst="rect">
+            <a:avLst/>
+          </a:prstGeom>
+          <a:noFill/>
+        </p:spPr>
+        <p:txBody>
+          <a:bodyPr wrap="square">
+            <a:noAutofit/>
+          </a:bodyPr>
+          <a:lstStyle/>
+          <a:p>
+            <a:pPr algn="r">
+              <a:lnSpc>
+                <a:spcPts val="2200"/>
+              </a:lnSpc>
+              <a:defRPr sz="1000" b="0">
+                <a:solidFill>
+                  <a:srgbClr val="666666"/>
+                </a:solidFill>
+                <a:latin typeface="Calibri"/>
+              </a:defRPr>
+            </a:pPr>
+            <a:r>
+              <a:t>learn_verilog_systemverilog / Module 7</a:t>
+            </a:r>
+          </a:p>
+        </p:txBody>
+      </p:sp>
+    </p:spTree>
+  </p:cSld>
+  <p:clrMapOvr>
+    <a:masterClrMapping/>
+  </p:clrMapOvr>
+</p:sld>
+</file>
+
+<file path=ppt/slides/slide32.xml><?xml version="1.0" encoding="utf-8"?>
+<p:sld xmlns:a="http://schemas.openxmlformats.org/drawingml/2006/main" xmlns:p="http://schemas.openxmlformats.org/presentationml/2006/main" xmlns:r="http://schemas.openxmlformats.org/officeDocument/2006/relationships">
+  <p:cSld>
+    <p:spTree>
+      <p:nvGrpSpPr>
+        <p:cNvPr id="1" name=""/>
+        <p:cNvGrpSpPr/>
+        <p:nvPr/>
+      </p:nvGrpSpPr>
+      <p:grpSpPr/>
+      <p:sp>
+        <p:nvSpPr>
+          <p:cNvPr id="2" name="TextBox 1"/>
+          <p:cNvSpPr txBox="1"/>
+          <p:nvPr/>
+        </p:nvSpPr>
+        <p:spPr>
+          <a:xfrm>
+            <a:off x="548640" y="411480"/>
+            <a:ext cx="11064240" cy="777240"/>
+          </a:xfrm>
+          <a:prstGeom prst="rect">
+            <a:avLst/>
+          </a:prstGeom>
+          <a:noFill/>
+        </p:spPr>
+        <p:txBody>
+          <a:bodyPr wrap="square">
+            <a:noAutofit/>
+          </a:bodyPr>
+          <a:lstStyle/>
+          <a:p>
+            <a:pPr>
+              <a:lnSpc>
+                <a:spcPts val="2200"/>
+              </a:lnSpc>
+              <a:defRPr sz="2800" b="1">
+                <a:solidFill>
+                  <a:srgbClr val="1A1A2E"/>
+                </a:solidFill>
+                <a:latin typeface="Calibri"/>
+              </a:defRPr>
+            </a:pPr>
+            <a:r>
+              <a:t>Migrating Everything at Once</a:t>
+            </a:r>
+          </a:p>
+        </p:txBody>
+      </p:sp>
+      <p:sp>
+        <p:nvSpPr>
+          <p:cNvPr id="3" name="TextBox 2"/>
+          <p:cNvSpPr txBox="1"/>
+          <p:nvPr/>
+        </p:nvSpPr>
+        <p:spPr>
+          <a:xfrm>
+            <a:off x="548640" y="1234440"/>
+            <a:ext cx="11064240" cy="4937760"/>
+          </a:xfrm>
+          <a:prstGeom prst="rect">
+            <a:avLst/>
+          </a:prstGeom>
+          <a:noFill/>
+        </p:spPr>
+        <p:txBody>
+          <a:bodyPr wrap="square">
+            <a:noAutofit/>
+          </a:bodyPr>
+          <a:lstStyle/>
+          <a:p>
+            <a:pPr>
+              <a:lnSpc>
+                <a:spcPts val="2200"/>
+              </a:lnSpc>
+              <a:spcAft>
+                <a:spcPts val="1000"/>
+              </a:spcAft>
+              <a:defRPr sz="2000" b="0">
+                <a:solidFill>
+                  <a:srgbClr val="333333"/>
+                </a:solidFill>
+                <a:latin typeface="Calibri"/>
+              </a:defRPr>
+            </a:pPr>
+            <a:r>
+              <a:t>• Mistake: Converting a large codebase from 1364 to</a:t>
+            </a:r>
+          </a:p>
+          <a:p>
+            <a:pPr>
+              <a:lnSpc>
+                <a:spcPts val="2200"/>
+              </a:lnSpc>
+              <a:spcAft>
+                <a:spcPts val="1000"/>
+              </a:spcAft>
+              <a:defRPr sz="2000" b="0">
+                <a:solidFill>
+                  <a:srgbClr val="333333"/>
+                </a:solidFill>
+                <a:latin typeface="Calibri"/>
+              </a:defRPr>
+            </a:pPr>
+            <a:r>
+              <a:t>      1800 in one big change.</a:t>
+            </a:r>
+          </a:p>
+          <a:p>
+            <a:pPr>
+              <a:lnSpc>
+                <a:spcPts val="2200"/>
+              </a:lnSpc>
+              <a:spcAft>
+                <a:spcPts val="1000"/>
+              </a:spcAft>
+              <a:defRPr sz="2000" b="0">
+                <a:solidFill>
+                  <a:srgbClr val="333333"/>
+                </a:solidFill>
+                <a:latin typeface="Calibri"/>
+              </a:defRPr>
+            </a:pPr>
+            <a:r>
+              <a:t>• Reality: Hard to debug; regressions are difficult to</a:t>
+            </a:r>
+          </a:p>
+          <a:p>
+            <a:pPr>
+              <a:lnSpc>
+                <a:spcPts val="2200"/>
+              </a:lnSpc>
+              <a:spcAft>
+                <a:spcPts val="1000"/>
+              </a:spcAft>
+              <a:defRPr sz="2000" b="0">
+                <a:solidFill>
+                  <a:srgbClr val="333333"/>
+                </a:solidFill>
+                <a:latin typeface="Calibri"/>
+              </a:defRPr>
+            </a:pPr>
+            <a:r>
+              <a:t>      isolate.</a:t>
+            </a:r>
+          </a:p>
+          <a:p>
+            <a:pPr>
+              <a:lnSpc>
+                <a:spcPts val="2200"/>
+              </a:lnSpc>
+              <a:spcAft>
+                <a:spcPts val="1000"/>
+              </a:spcAft>
+              <a:defRPr sz="2000" b="0">
+                <a:solidFill>
+                  <a:srgbClr val="333333"/>
+                </a:solidFill>
+                <a:latin typeface="Calibri"/>
+              </a:defRPr>
+            </a:pPr>
+            <a:r>
+              <a:t>• Correct: Migrate incrementally (one module or one</a:t>
+            </a:r>
+          </a:p>
+          <a:p>
+            <a:pPr>
+              <a:lnSpc>
+                <a:spcPts val="2200"/>
+              </a:lnSpc>
+              <a:spcAft>
+                <a:spcPts val="1000"/>
+              </a:spcAft>
+              <a:defRPr sz="2000" b="0">
+                <a:solidFill>
+                  <a:srgbClr val="333333"/>
+                </a:solidFill>
+                <a:latin typeface="Calibri"/>
+              </a:defRPr>
+            </a:pPr>
+            <a:r>
+              <a:t>      feature at a time); run regression after each ste…</a:t>
+            </a:r>
+          </a:p>
+          <a:p>
+            <a:pPr>
+              <a:lnSpc>
+                <a:spcPts val="2200"/>
+              </a:lnSpc>
+              <a:spcAft>
+                <a:spcPts val="1000"/>
+              </a:spcAft>
+              <a:defRPr sz="2000" b="0">
+                <a:solidFill>
+                  <a:srgbClr val="333333"/>
+                </a:solidFill>
+                <a:latin typeface="Calibri"/>
+              </a:defRPr>
+            </a:pPr>
+            <a:r>
+              <a:t>• Why: Reduces risk and keeps a clear baseline.</a:t>
+            </a:r>
+          </a:p>
+        </p:txBody>
+      </p:sp>
+      <p:sp>
+        <p:nvSpPr>
+          <p:cNvPr id="4" name="TextBox 3"/>
+          <p:cNvSpPr txBox="1"/>
+          <p:nvPr/>
+        </p:nvSpPr>
+        <p:spPr>
+          <a:xfrm>
+            <a:off x="548640" y="6355080"/>
+            <a:ext cx="11064240" cy="320040"/>
+          </a:xfrm>
+          <a:prstGeom prst="rect">
+            <a:avLst/>
+          </a:prstGeom>
+          <a:noFill/>
+        </p:spPr>
+        <p:txBody>
+          <a:bodyPr wrap="square">
+            <a:noAutofit/>
+          </a:bodyPr>
+          <a:lstStyle/>
+          <a:p>
+            <a:pPr algn="r">
+              <a:lnSpc>
+                <a:spcPts val="2200"/>
+              </a:lnSpc>
+              <a:defRPr sz="1000" b="0">
+                <a:solidFill>
+                  <a:srgbClr val="666666"/>
+                </a:solidFill>
+                <a:latin typeface="Calibri"/>
+              </a:defRPr>
+            </a:pPr>
+            <a:r>
+              <a:t>learn_verilog_systemverilog / Module 7</a:t>
+            </a:r>
+          </a:p>
+        </p:txBody>
+      </p:sp>
+    </p:spTree>
+  </p:cSld>
+  <p:clrMapOvr>
+    <a:masterClrMapping/>
+  </p:clrMapOvr>
+</p:sld>
+</file>
+
+<file path=ppt/slides/slide33.xml><?xml version="1.0" encoding="utf-8"?>
+<p:sld xmlns:a="http://schemas.openxmlformats.org/drawingml/2006/main" xmlns:p="http://schemas.openxmlformats.org/presentationml/2006/main" xmlns:r="http://schemas.openxmlformats.org/officeDocument/2006/relationships">
+  <p:cSld>
+    <p:spTree>
+      <p:nvGrpSpPr>
+        <p:cNvPr id="1" name=""/>
+        <p:cNvGrpSpPr/>
+        <p:nvPr/>
+      </p:nvGrpSpPr>
+      <p:grpSpPr/>
+      <p:sp>
+        <p:nvSpPr>
+          <p:cNvPr id="2" name="TextBox 1"/>
+          <p:cNvSpPr txBox="1"/>
+          <p:nvPr/>
+        </p:nvSpPr>
+        <p:spPr>
+          <a:xfrm>
+            <a:off x="548640" y="411480"/>
+            <a:ext cx="11064240" cy="777240"/>
+          </a:xfrm>
+          <a:prstGeom prst="rect">
+            <a:avLst/>
+          </a:prstGeom>
+          <a:noFill/>
+        </p:spPr>
+        <p:txBody>
+          <a:bodyPr wrap="square">
+            <a:noAutofit/>
+          </a:bodyPr>
+          <a:lstStyle/>
+          <a:p>
+            <a:pPr>
+              <a:lnSpc>
+                <a:spcPts val="2200"/>
+              </a:lnSpc>
+              <a:defRPr sz="2800" b="1">
+                <a:solidFill>
+                  <a:srgbClr val="1A1A2E"/>
+                </a:solidFill>
+                <a:latin typeface="Calibri"/>
+              </a:defRPr>
+            </a:pPr>
+            <a:r>
+              <a:t>Ignoring Tool Support</a:t>
+            </a:r>
+          </a:p>
+        </p:txBody>
+      </p:sp>
+      <p:sp>
+        <p:nvSpPr>
+          <p:cNvPr id="3" name="TextBox 2"/>
+          <p:cNvSpPr txBox="1"/>
+          <p:nvPr/>
+        </p:nvSpPr>
+        <p:spPr>
+          <a:xfrm>
+            <a:off x="548640" y="1234440"/>
+            <a:ext cx="11064240" cy="4937760"/>
+          </a:xfrm>
+          <a:prstGeom prst="rect">
+            <a:avLst/>
+          </a:prstGeom>
+          <a:noFill/>
+        </p:spPr>
+        <p:txBody>
+          <a:bodyPr wrap="square">
+            <a:noAutofit/>
+          </a:bodyPr>
+          <a:lstStyle/>
+          <a:p>
+            <a:pPr>
+              <a:lnSpc>
+                <a:spcPts val="2200"/>
+              </a:lnSpc>
+              <a:spcAft>
+                <a:spcPts val="1000"/>
+              </a:spcAft>
+              <a:defRPr sz="2000" b="0">
+                <a:solidFill>
+                  <a:srgbClr val="333333"/>
+                </a:solidFill>
+                <a:latin typeface="Calibri"/>
+              </a:defRPr>
+            </a:pPr>
+            <a:r>
+              <a:t>• Mistake: Choosing 1800-2017 and using constructs the</a:t>
+            </a:r>
+          </a:p>
+          <a:p>
+            <a:pPr>
+              <a:lnSpc>
+                <a:spcPts val="2200"/>
+              </a:lnSpc>
+              <a:spcAft>
+                <a:spcPts val="1000"/>
+              </a:spcAft>
+              <a:defRPr sz="2000" b="0">
+                <a:solidFill>
+                  <a:srgbClr val="333333"/>
+                </a:solidFill>
+                <a:latin typeface="Calibri"/>
+              </a:defRPr>
+            </a:pPr>
+            <a:r>
+              <a:t>      synthesis or simulator does not support.</a:t>
+            </a:r>
+          </a:p>
+          <a:p>
+            <a:pPr>
+              <a:lnSpc>
+                <a:spcPts val="2200"/>
+              </a:lnSpc>
+              <a:spcAft>
+                <a:spcPts val="1000"/>
+              </a:spcAft>
+              <a:defRPr sz="2000" b="0">
+                <a:solidFill>
+                  <a:srgbClr val="333333"/>
+                </a:solidFill>
+                <a:latin typeface="Calibri"/>
+              </a:defRPr>
+            </a:pPr>
+            <a:r>
+              <a:t>• Reality: Compile or elaboration errors; or tool-</a:t>
+            </a:r>
+          </a:p>
+          <a:p>
+            <a:pPr>
+              <a:lnSpc>
+                <a:spcPts val="2200"/>
+              </a:lnSpc>
+              <a:spcAft>
+                <a:spcPts val="1000"/>
+              </a:spcAft>
+              <a:defRPr sz="2000" b="0">
+                <a:solidFill>
+                  <a:srgbClr val="333333"/>
+                </a:solidFill>
+                <a:latin typeface="Calibri"/>
+              </a:defRPr>
+            </a:pPr>
+            <a:r>
+              <a:t>      specific behavior.</a:t>
+            </a:r>
+          </a:p>
+          <a:p>
+            <a:pPr>
+              <a:lnSpc>
+                <a:spcPts val="2200"/>
+              </a:lnSpc>
+              <a:spcAft>
+                <a:spcPts val="1000"/>
+              </a:spcAft>
+              <a:defRPr sz="2000" b="0">
+                <a:solidFill>
+                  <a:srgbClr val="333333"/>
+                </a:solidFill>
+                <a:latin typeface="Calibri"/>
+              </a:defRPr>
+            </a:pPr>
+            <a:r>
+              <a:t>• Correct: Check tool manuals for supported revision</a:t>
+            </a:r>
+          </a:p>
+          <a:p>
+            <a:pPr>
+              <a:lnSpc>
+                <a:spcPts val="2200"/>
+              </a:lnSpc>
+              <a:spcAft>
+                <a:spcPts val="1000"/>
+              </a:spcAft>
+              <a:defRPr sz="2000" b="0">
+                <a:solidFill>
+                  <a:srgbClr val="333333"/>
+                </a:solidFill>
+                <a:latin typeface="Calibri"/>
+              </a:defRPr>
+            </a:pPr>
+            <a:r>
+              <a:t>      and synthesizable subset; align RTL with that.</a:t>
+            </a:r>
+          </a:p>
+          <a:p>
+            <a:pPr>
+              <a:lnSpc>
+                <a:spcPts val="2200"/>
+              </a:lnSpc>
+              <a:spcAft>
+                <a:spcPts val="1000"/>
+              </a:spcAft>
+              <a:defRPr sz="2000" b="0">
+                <a:solidFill>
+                  <a:srgbClr val="333333"/>
+                </a:solidFill>
+                <a:latin typeface="Calibri"/>
+              </a:defRPr>
+            </a:pPr>
+            <a:r>
+              <a:t>• Why: Ensures the project builds and matches tool</a:t>
+            </a:r>
+          </a:p>
+          <a:p>
+            <a:pPr>
+              <a:lnSpc>
+                <a:spcPts val="2200"/>
+              </a:lnSpc>
+              <a:spcAft>
+                <a:spcPts val="1000"/>
+              </a:spcAft>
+              <a:defRPr sz="2000" b="0">
+                <a:solidFill>
+                  <a:srgbClr val="333333"/>
+                </a:solidFill>
+                <a:latin typeface="Calibri"/>
+              </a:defRPr>
+            </a:pPr>
+            <a:r>
+              <a:t>      expectations.</a:t>
+            </a:r>
+          </a:p>
+        </p:txBody>
+      </p:sp>
+      <p:sp>
+        <p:nvSpPr>
+          <p:cNvPr id="4" name="TextBox 3"/>
+          <p:cNvSpPr txBox="1"/>
+          <p:nvPr/>
+        </p:nvSpPr>
+        <p:spPr>
+          <a:xfrm>
+            <a:off x="548640" y="6355080"/>
+            <a:ext cx="11064240" cy="320040"/>
+          </a:xfrm>
+          <a:prstGeom prst="rect">
+            <a:avLst/>
+          </a:prstGeom>
+          <a:noFill/>
+        </p:spPr>
+        <p:txBody>
+          <a:bodyPr wrap="square">
+            <a:noAutofit/>
+          </a:bodyPr>
+          <a:lstStyle/>
+          <a:p>
+            <a:pPr algn="r">
+              <a:lnSpc>
+                <a:spcPts val="2200"/>
+              </a:lnSpc>
+              <a:defRPr sz="1000" b="0">
+                <a:solidFill>
+                  <a:srgbClr val="666666"/>
+                </a:solidFill>
+                <a:latin typeface="Calibri"/>
+              </a:defRPr>
+            </a:pPr>
+            <a:r>
+              <a:t>learn_verilog_systemverilog / Module 7</a:t>
+            </a:r>
+          </a:p>
+        </p:txBody>
+      </p:sp>
+    </p:spTree>
+  </p:cSld>
+  <p:clrMapOvr>
+    <a:masterClrMapping/>
+  </p:clrMapOvr>
+</p:sld>
+</file>
+
+<file path=ppt/slides/slide34.xml><?xml version="1.0" encoding="utf-8"?>
+<p:sld xmlns:a="http://schemas.openxmlformats.org/drawingml/2006/main" xmlns:p="http://schemas.openxmlformats.org/presentationml/2006/main" xmlns:r="http://schemas.openxmlformats.org/officeDocument/2006/relationships">
+  <p:cSld>
+    <p:spTree>
+      <p:nvGrpSpPr>
+        <p:cNvPr id="1" name=""/>
+        <p:cNvGrpSpPr/>
+        <p:nvPr/>
+      </p:nvGrpSpPr>
+      <p:grpSpPr/>
+      <p:sp>
+        <p:nvSpPr>
+          <p:cNvPr id="2" name="TextBox 1"/>
+          <p:cNvSpPr txBox="1"/>
+          <p:nvPr/>
+        </p:nvSpPr>
+        <p:spPr>
+          <a:xfrm>
+            <a:off x="548640" y="411480"/>
+            <a:ext cx="11064240" cy="777240"/>
+          </a:xfrm>
+          <a:prstGeom prst="rect">
+            <a:avLst/>
+          </a:prstGeom>
+          <a:noFill/>
+        </p:spPr>
+        <p:txBody>
+          <a:bodyPr wrap="square">
+            <a:noAutofit/>
+          </a:bodyPr>
+          <a:lstStyle/>
+          <a:p>
+            <a:pPr>
+              <a:lnSpc>
+                <a:spcPts val="2200"/>
+              </a:lnSpc>
+              <a:defRPr sz="2800" b="1">
+                <a:solidFill>
+                  <a:srgbClr val="1A1A2E"/>
+                </a:solidFill>
+                <a:latin typeface="Calibri"/>
+              </a:defRPr>
+            </a:pPr>
+            <a:r>
+              <a:t>Breaking Interfaces During Migration</a:t>
+            </a:r>
+          </a:p>
+        </p:txBody>
+      </p:sp>
+      <p:sp>
+        <p:nvSpPr>
+          <p:cNvPr id="3" name="TextBox 2"/>
+          <p:cNvSpPr txBox="1"/>
+          <p:nvPr/>
+        </p:nvSpPr>
+        <p:spPr>
+          <a:xfrm>
+            <a:off x="548640" y="1234440"/>
+            <a:ext cx="11064240" cy="4937760"/>
+          </a:xfrm>
+          <a:prstGeom prst="rect">
+            <a:avLst/>
+          </a:prstGeom>
+          <a:noFill/>
+        </p:spPr>
+        <p:txBody>
+          <a:bodyPr wrap="square">
+            <a:noAutofit/>
+          </a:bodyPr>
+          <a:lstStyle/>
+          <a:p>
+            <a:pPr>
+              <a:lnSpc>
+                <a:spcPts val="2200"/>
+              </a:lnSpc>
+              <a:spcAft>
+                <a:spcPts val="1000"/>
+              </a:spcAft>
+              <a:defRPr sz="2000" b="0">
+                <a:solidFill>
+                  <a:srgbClr val="333333"/>
+                </a:solidFill>
+                <a:latin typeface="Calibri"/>
+              </a:defRPr>
+            </a:pPr>
+            <a:r>
+              <a:t>• Mistake: Changing port list or interface of a block</a:t>
+            </a:r>
+          </a:p>
+          <a:p>
+            <a:pPr>
+              <a:lnSpc>
+                <a:spcPts val="2200"/>
+              </a:lnSpc>
+              <a:spcAft>
+                <a:spcPts val="1000"/>
+              </a:spcAft>
+              <a:defRPr sz="2000" b="0">
+                <a:solidFill>
+                  <a:srgbClr val="333333"/>
+                </a:solidFill>
+                <a:latin typeface="Calibri"/>
+              </a:defRPr>
+            </a:pPr>
+            <a:r>
+              <a:t>      while migrating its internals, so that other mo…</a:t>
+            </a:r>
+          </a:p>
+          <a:p>
+            <a:pPr>
+              <a:lnSpc>
+                <a:spcPts val="2200"/>
+              </a:lnSpc>
+              <a:spcAft>
+                <a:spcPts val="1000"/>
+              </a:spcAft>
+              <a:defRPr sz="2000" b="0">
+                <a:solidFill>
+                  <a:srgbClr val="333333"/>
+                </a:solidFill>
+                <a:latin typeface="Calibri"/>
+              </a:defRPr>
+            </a:pPr>
+            <a:r>
+              <a:t>• Reality: Large ripple of changes; integration</a:t>
+            </a:r>
+          </a:p>
+          <a:p>
+            <a:pPr>
+              <a:lnSpc>
+                <a:spcPts val="2200"/>
+              </a:lnSpc>
+              <a:spcAft>
+                <a:spcPts val="1000"/>
+              </a:spcAft>
+              <a:defRPr sz="2000" b="0">
+                <a:solidFill>
+                  <a:srgbClr val="333333"/>
+                </a:solidFill>
+                <a:latin typeface="Calibri"/>
+              </a:defRPr>
+            </a:pPr>
+            <a:r>
+              <a:t>      failures.</a:t>
+            </a:r>
+          </a:p>
+          <a:p>
+            <a:pPr>
+              <a:lnSpc>
+                <a:spcPts val="2200"/>
+              </a:lnSpc>
+              <a:spcAft>
+                <a:spcPts val="1000"/>
+              </a:spcAft>
+              <a:defRPr sz="2000" b="0">
+                <a:solidFill>
+                  <a:srgbClr val="333333"/>
+                </a:solidFill>
+                <a:latin typeface="Calibri"/>
+              </a:defRPr>
+            </a:pPr>
+            <a:r>
+              <a:t>• Correct: Keep external interface (ports or interface</a:t>
+            </a:r>
+          </a:p>
+          <a:p>
+            <a:pPr>
+              <a:lnSpc>
+                <a:spcPts val="2200"/>
+              </a:lnSpc>
+              <a:spcAft>
+                <a:spcPts val="1000"/>
+              </a:spcAft>
+              <a:defRPr sz="2000" b="0">
+                <a:solidFill>
+                  <a:srgbClr val="333333"/>
+                </a:solidFill>
+                <a:latin typeface="Calibri"/>
+              </a:defRPr>
+            </a:pPr>
+            <a:r>
+              <a:t>      modport) unchanged during internal migration;…</a:t>
+            </a:r>
+          </a:p>
+          <a:p>
+            <a:pPr>
+              <a:lnSpc>
+                <a:spcPts val="2200"/>
+              </a:lnSpc>
+              <a:spcAft>
+                <a:spcPts val="1000"/>
+              </a:spcAft>
+              <a:defRPr sz="2000" b="0">
+                <a:solidFill>
+                  <a:srgbClr val="333333"/>
+                </a:solidFill>
+                <a:latin typeface="Calibri"/>
+              </a:defRPr>
+            </a:pPr>
+            <a:r>
+              <a:t>• Why: Limits scope of change and preserves</a:t>
+            </a:r>
+          </a:p>
+          <a:p>
+            <a:pPr>
+              <a:lnSpc>
+                <a:spcPts val="2200"/>
+              </a:lnSpc>
+              <a:spcAft>
+                <a:spcPts val="1000"/>
+              </a:spcAft>
+              <a:defRPr sz="2000" b="0">
+                <a:solidFill>
+                  <a:srgbClr val="333333"/>
+                </a:solidFill>
+                <a:latin typeface="Calibri"/>
+              </a:defRPr>
+            </a:pPr>
+            <a:r>
+              <a:t>      compatibility with rest of design.</a:t>
+            </a:r>
+          </a:p>
+        </p:txBody>
+      </p:sp>
+      <p:sp>
+        <p:nvSpPr>
+          <p:cNvPr id="4" name="TextBox 3"/>
+          <p:cNvSpPr txBox="1"/>
+          <p:nvPr/>
+        </p:nvSpPr>
+        <p:spPr>
+          <a:xfrm>
+            <a:off x="548640" y="6355080"/>
+            <a:ext cx="11064240" cy="320040"/>
+          </a:xfrm>
+          <a:prstGeom prst="rect">
+            <a:avLst/>
+          </a:prstGeom>
+          <a:noFill/>
+        </p:spPr>
+        <p:txBody>
+          <a:bodyPr wrap="square">
+            <a:noAutofit/>
+          </a:bodyPr>
+          <a:lstStyle/>
+          <a:p>
+            <a:pPr algn="r">
+              <a:lnSpc>
+                <a:spcPts val="2200"/>
+              </a:lnSpc>
+              <a:defRPr sz="1000" b="0">
+                <a:solidFill>
+                  <a:srgbClr val="666666"/>
+                </a:solidFill>
+                <a:latin typeface="Calibri"/>
+              </a:defRPr>
+            </a:pPr>
+            <a:r>
+              <a:t>learn_verilog_systemverilog / Module 7</a:t>
+            </a:r>
+          </a:p>
+        </p:txBody>
+      </p:sp>
+    </p:spTree>
+  </p:cSld>
+  <p:clrMapOvr>
+    <a:masterClrMapping/>
+  </p:clrMapOvr>
+</p:sld>
+</file>
+
+<file path=ppt/slides/slide35.xml><?xml version="1.0" encoding="utf-8"?>
+<p:sld xmlns:a="http://schemas.openxmlformats.org/drawingml/2006/main" xmlns:p="http://schemas.openxmlformats.org/presentationml/2006/main" xmlns:r="http://schemas.openxmlformats.org/officeDocument/2006/relationships">
+  <p:cSld>
+    <p:spTree>
+      <p:nvGrpSpPr>
+        <p:cNvPr id="1" name=""/>
+        <p:cNvGrpSpPr/>
+        <p:nvPr/>
+      </p:nvGrpSpPr>
+      <p:grpSpPr/>
+      <p:sp>
+        <p:nvSpPr>
+          <p:cNvPr id="2" name="TextBox 1"/>
+          <p:cNvSpPr txBox="1"/>
+          <p:nvPr/>
+        </p:nvSpPr>
+        <p:spPr>
+          <a:xfrm>
+            <a:off x="548640" y="411480"/>
+            <a:ext cx="11064240" cy="777240"/>
+          </a:xfrm>
+          <a:prstGeom prst="rect">
+            <a:avLst/>
+          </a:prstGeom>
+          <a:noFill/>
+        </p:spPr>
+        <p:txBody>
+          <a:bodyPr wrap="square">
+            <a:noAutofit/>
+          </a:bodyPr>
+          <a:lstStyle/>
+          <a:p>
+            <a:pPr>
+              <a:lnSpc>
+                <a:spcPts val="2200"/>
+              </a:lnSpc>
+              <a:defRPr sz="2800" b="1">
+                <a:solidFill>
+                  <a:srgbClr val="1A1A2E"/>
+                </a:solidFill>
+                <a:latin typeface="Calibri"/>
+              </a:defRPr>
+            </a:pPr>
+            <a:r>
+              <a:t>Mixing Revisions in One File</a:t>
+            </a:r>
+          </a:p>
+        </p:txBody>
+      </p:sp>
+      <p:sp>
+        <p:nvSpPr>
+          <p:cNvPr id="3" name="TextBox 2"/>
+          <p:cNvSpPr txBox="1"/>
+          <p:nvPr/>
+        </p:nvSpPr>
+        <p:spPr>
+          <a:xfrm>
+            <a:off x="548640" y="1234440"/>
+            <a:ext cx="11064240" cy="4937760"/>
+          </a:xfrm>
+          <a:prstGeom prst="rect">
+            <a:avLst/>
+          </a:prstGeom>
+          <a:noFill/>
+        </p:spPr>
+        <p:txBody>
+          <a:bodyPr wrap="square">
+            <a:noAutofit/>
+          </a:bodyPr>
+          <a:lstStyle/>
+          <a:p>
+            <a:pPr>
+              <a:lnSpc>
+                <a:spcPts val="2200"/>
+              </a:lnSpc>
+              <a:spcAft>
+                <a:spcPts val="1000"/>
+              </a:spcAft>
+              <a:defRPr sz="2000" b="0">
+                <a:solidFill>
+                  <a:srgbClr val="333333"/>
+                </a:solidFill>
+                <a:latin typeface="Calibri"/>
+              </a:defRPr>
+            </a:pPr>
+            <a:r>
+              <a:t>• Mistake: Using 1995 ports in one module and 1800</a:t>
+            </a:r>
+          </a:p>
+          <a:p>
+            <a:pPr>
+              <a:lnSpc>
+                <a:spcPts val="2200"/>
+              </a:lnSpc>
+              <a:spcAft>
+                <a:spcPts val="1000"/>
+              </a:spcAft>
+              <a:defRPr sz="2000" b="0">
+                <a:solidFill>
+                  <a:srgbClr val="333333"/>
+                </a:solidFill>
+                <a:latin typeface="Calibri"/>
+              </a:defRPr>
+            </a:pPr>
+            <a:r>
+              <a:t>      logic in another in the same file without a clear…</a:t>
+            </a:r>
+          </a:p>
+          <a:p>
+            <a:pPr>
+              <a:lnSpc>
+                <a:spcPts val="2200"/>
+              </a:lnSpc>
+              <a:spcAft>
+                <a:spcPts val="1000"/>
+              </a:spcAft>
+              <a:defRPr sz="2000" b="0">
+                <a:solidFill>
+                  <a:srgbClr val="333333"/>
+                </a:solidFill>
+                <a:latin typeface="Calibri"/>
+              </a:defRPr>
+            </a:pPr>
+            <a:r>
+              <a:t>• Reality: Confusing for readers and tools; possible</a:t>
+            </a:r>
+          </a:p>
+          <a:p>
+            <a:pPr>
+              <a:lnSpc>
+                <a:spcPts val="2200"/>
+              </a:lnSpc>
+              <a:spcAft>
+                <a:spcPts val="1000"/>
+              </a:spcAft>
+              <a:defRPr sz="2000" b="0">
+                <a:solidFill>
+                  <a:srgbClr val="333333"/>
+                </a:solidFill>
+                <a:latin typeface="Calibri"/>
+              </a:defRPr>
+            </a:pPr>
+            <a:r>
+              <a:t>      tool-dependent behavior.</a:t>
+            </a:r>
+          </a:p>
+          <a:p>
+            <a:pPr>
+              <a:lnSpc>
+                <a:spcPts val="2200"/>
+              </a:lnSpc>
+              <a:spcAft>
+                <a:spcPts val="1000"/>
+              </a:spcAft>
+              <a:defRPr sz="2000" b="0">
+                <a:solidFill>
+                  <a:srgbClr val="333333"/>
+                </a:solidFill>
+                <a:latin typeface="Calibri"/>
+              </a:defRPr>
+            </a:pPr>
+            <a:r>
+              <a:t>• Correct: Use one project standard per file (or per</a:t>
+            </a:r>
+          </a:p>
+          <a:p>
+            <a:pPr>
+              <a:lnSpc>
+                <a:spcPts val="2200"/>
+              </a:lnSpc>
+              <a:spcAft>
+                <a:spcPts val="1000"/>
+              </a:spcAft>
+              <a:defRPr sz="2000" b="0">
+                <a:solidFill>
+                  <a:srgbClr val="333333"/>
+                </a:solidFill>
+                <a:latin typeface="Calibri"/>
+              </a:defRPr>
+            </a:pPr>
+            <a:r>
+              <a:t>      project); document the standard in the style gui…</a:t>
+            </a:r>
+          </a:p>
+          <a:p>
+            <a:pPr>
+              <a:lnSpc>
+                <a:spcPts val="2200"/>
+              </a:lnSpc>
+              <a:spcAft>
+                <a:spcPts val="1000"/>
+              </a:spcAft>
+              <a:defRPr sz="2000" b="0">
+                <a:solidFill>
+                  <a:srgbClr val="333333"/>
+                </a:solidFill>
+                <a:latin typeface="Calibri"/>
+              </a:defRPr>
+            </a:pPr>
+            <a:r>
+              <a:t>• Why: Consistency and predictable tool behavior.</a:t>
+            </a:r>
+          </a:p>
+        </p:txBody>
+      </p:sp>
+      <p:sp>
+        <p:nvSpPr>
+          <p:cNvPr id="4" name="TextBox 3"/>
+          <p:cNvSpPr txBox="1"/>
+          <p:nvPr/>
+        </p:nvSpPr>
+        <p:spPr>
+          <a:xfrm>
+            <a:off x="548640" y="6355080"/>
+            <a:ext cx="11064240" cy="320040"/>
+          </a:xfrm>
+          <a:prstGeom prst="rect">
+            <a:avLst/>
+          </a:prstGeom>
+          <a:noFill/>
+        </p:spPr>
+        <p:txBody>
+          <a:bodyPr wrap="square">
+            <a:noAutofit/>
+          </a:bodyPr>
+          <a:lstStyle/>
+          <a:p>
+            <a:pPr algn="r">
+              <a:lnSpc>
+                <a:spcPts val="2200"/>
+              </a:lnSpc>
+              <a:defRPr sz="1000" b="0">
+                <a:solidFill>
+                  <a:srgbClr val="666666"/>
+                </a:solidFill>
+                <a:latin typeface="Calibri"/>
+              </a:defRPr>
+            </a:pPr>
+            <a:r>
+              <a:t>learn_verilog_systemverilog / Module 7</a:t>
+            </a:r>
+          </a:p>
+        </p:txBody>
+      </p:sp>
+    </p:spTree>
+  </p:cSld>
+  <p:clrMapOvr>
+    <a:masterClrMapping/>
+  </p:clrMapOvr>
+</p:sld>
+</file>
+
+<file path=ppt/slides/slide36.xml><?xml version="1.0" encoding="utf-8"?>
+<p:sld xmlns:a="http://schemas.openxmlformats.org/drawingml/2006/main" xmlns:p="http://schemas.openxmlformats.org/presentationml/2006/main" xmlns:r="http://schemas.openxmlformats.org/officeDocument/2006/relationships">
+  <p:cSld>
+    <p:spTree>
+      <p:nvGrpSpPr>
+        <p:cNvPr id="1" name=""/>
+        <p:cNvGrpSpPr/>
+        <p:nvPr/>
+      </p:nvGrpSpPr>
+      <p:grpSpPr/>
+      <p:sp>
+        <p:nvSpPr>
+          <p:cNvPr id="2" name="TextBox 1"/>
+          <p:cNvSpPr txBox="1"/>
+          <p:nvPr/>
+        </p:nvSpPr>
+        <p:spPr>
+          <a:xfrm>
+            <a:off x="548640" y="411480"/>
+            <a:ext cx="11064240" cy="777240"/>
+          </a:xfrm>
+          <a:prstGeom prst="rect">
+            <a:avLst/>
+          </a:prstGeom>
+          <a:noFill/>
+        </p:spPr>
+        <p:txBody>
+          <a:bodyPr wrap="square">
+            <a:noAutofit/>
+          </a:bodyPr>
+          <a:lstStyle/>
+          <a:p>
+            <a:pPr>
+              <a:lnSpc>
+                <a:spcPts val="2200"/>
+              </a:lnSpc>
+              <a:defRPr sz="2800" b="1">
+                <a:solidFill>
+                  <a:srgbClr val="1A1A2E"/>
+                </a:solidFill>
+                <a:latin typeface="Calibri"/>
+              </a:defRPr>
+            </a:pPr>
+            <a:r>
+              <a:t>Forgetting to Test After Migration</a:t>
+            </a:r>
+          </a:p>
+        </p:txBody>
+      </p:sp>
+      <p:sp>
+        <p:nvSpPr>
+          <p:cNvPr id="3" name="TextBox 2"/>
+          <p:cNvSpPr txBox="1"/>
+          <p:nvPr/>
+        </p:nvSpPr>
+        <p:spPr>
+          <a:xfrm>
+            <a:off x="548640" y="1234440"/>
+            <a:ext cx="11064240" cy="4937760"/>
+          </a:xfrm>
+          <a:prstGeom prst="rect">
+            <a:avLst/>
+          </a:prstGeom>
+          <a:noFill/>
+        </p:spPr>
+        <p:txBody>
+          <a:bodyPr wrap="square">
+            <a:noAutofit/>
+          </a:bodyPr>
+          <a:lstStyle/>
+          <a:p>
+            <a:pPr>
+              <a:lnSpc>
+                <a:spcPts val="2200"/>
+              </a:lnSpc>
+              <a:spcAft>
+                <a:spcPts val="1000"/>
+              </a:spcAft>
+              <a:defRPr sz="2000" b="0">
+                <a:solidFill>
+                  <a:srgbClr val="333333"/>
+                </a:solidFill>
+                <a:latin typeface="Calibri"/>
+              </a:defRPr>
+            </a:pPr>
+            <a:r>
+              <a:t>• Mistake: Changing syntax (e.g. wire→logic, always</a:t>
+            </a:r>
+          </a:p>
+          <a:p>
+            <a:pPr>
+              <a:lnSpc>
+                <a:spcPts val="2200"/>
+              </a:lnSpc>
+              <a:spcAft>
+                <a:spcPts val="1000"/>
+              </a:spcAft>
+              <a:defRPr sz="2000" b="0">
+                <a:solidFill>
+                  <a:srgbClr val="333333"/>
+                </a:solidFill>
+                <a:latin typeface="Calibri"/>
+              </a:defRPr>
+            </a:pPr>
+            <a:r>
+              <a:t>      @*→always_comb) and not re-running simulation or…</a:t>
+            </a:r>
+          </a:p>
+          <a:p>
+            <a:pPr>
+              <a:lnSpc>
+                <a:spcPts val="2200"/>
+              </a:lnSpc>
+              <a:spcAft>
+                <a:spcPts val="1000"/>
+              </a:spcAft>
+              <a:defRPr sz="2000" b="0">
+                <a:solidFill>
+                  <a:srgbClr val="333333"/>
+                </a:solidFill>
+                <a:latin typeface="Calibri"/>
+              </a:defRPr>
+            </a:pPr>
+            <a:r>
+              <a:t>• Reality: Subtle bugs (e.g. latch, wrong sensitivity)</a:t>
+            </a:r>
+          </a:p>
+          <a:p>
+            <a:pPr>
+              <a:lnSpc>
+                <a:spcPts val="2200"/>
+              </a:lnSpc>
+              <a:spcAft>
+                <a:spcPts val="1000"/>
+              </a:spcAft>
+              <a:defRPr sz="2000" b="0">
+                <a:solidFill>
+                  <a:srgbClr val="333333"/>
+                </a:solidFill>
+                <a:latin typeface="Calibri"/>
+              </a:defRPr>
+            </a:pPr>
+            <a:r>
+              <a:t>      can appear.</a:t>
+            </a:r>
+          </a:p>
+          <a:p>
+            <a:pPr>
+              <a:lnSpc>
+                <a:spcPts val="2200"/>
+              </a:lnSpc>
+              <a:spcAft>
+                <a:spcPts val="1000"/>
+              </a:spcAft>
+              <a:defRPr sz="2000" b="0">
+                <a:solidFill>
+                  <a:srgbClr val="333333"/>
+                </a:solidFill>
+                <a:latin typeface="Calibri"/>
+              </a:defRPr>
+            </a:pPr>
+            <a:r>
+              <a:t>• Correct: Run full regression (simulation and</a:t>
+            </a:r>
+          </a:p>
+          <a:p>
+            <a:pPr>
+              <a:lnSpc>
+                <a:spcPts val="2200"/>
+              </a:lnSpc>
+              <a:spcAft>
+                <a:spcPts val="1000"/>
+              </a:spcAft>
+              <a:defRPr sz="2000" b="0">
+                <a:solidFill>
+                  <a:srgbClr val="333333"/>
+                </a:solidFill>
+                <a:latin typeface="Calibri"/>
+              </a:defRPr>
+            </a:pPr>
+            <a:r>
+              <a:t>      synthesis) after every migration step; compare with</a:t>
+            </a:r>
+          </a:p>
+          <a:p>
+            <a:pPr>
+              <a:lnSpc>
+                <a:spcPts val="2200"/>
+              </a:lnSpc>
+              <a:spcAft>
+                <a:spcPts val="1000"/>
+              </a:spcAft>
+              <a:defRPr sz="2000" b="0">
+                <a:solidFill>
+                  <a:srgbClr val="333333"/>
+                </a:solidFill>
+                <a:latin typeface="Calibri"/>
+              </a:defRPr>
+            </a:pPr>
+            <a:r>
+              <a:t>      ba…</a:t>
+            </a:r>
+          </a:p>
+          <a:p>
+            <a:pPr>
+              <a:lnSpc>
+                <a:spcPts val="2200"/>
+              </a:lnSpc>
+              <a:spcAft>
+                <a:spcPts val="1000"/>
+              </a:spcAft>
+              <a:defRPr sz="2000" b="0">
+                <a:solidFill>
+                  <a:srgbClr val="333333"/>
+                </a:solidFill>
+                <a:latin typeface="Calibri"/>
+              </a:defRPr>
+            </a:pPr>
+            <a:r>
+              <a:t>• Why: Catches functional or synthesis differences</a:t>
+            </a:r>
+          </a:p>
+          <a:p>
+            <a:pPr>
+              <a:lnSpc>
+                <a:spcPts val="2200"/>
+              </a:lnSpc>
+              <a:spcAft>
+                <a:spcPts val="1000"/>
+              </a:spcAft>
+              <a:defRPr sz="2000" b="0">
+                <a:solidFill>
+                  <a:srgbClr val="333333"/>
+                </a:solidFill>
+                <a:latin typeface="Calibri"/>
+              </a:defRPr>
+            </a:pPr>
+            <a:r>
+              <a:t>      early.</a:t>
+            </a:r>
+          </a:p>
+        </p:txBody>
+      </p:sp>
+      <p:sp>
+        <p:nvSpPr>
+          <p:cNvPr id="4" name="TextBox 3"/>
+          <p:cNvSpPr txBox="1"/>
+          <p:nvPr/>
+        </p:nvSpPr>
+        <p:spPr>
+          <a:xfrm>
+            <a:off x="548640" y="6355080"/>
+            <a:ext cx="11064240" cy="320040"/>
+          </a:xfrm>
+          <a:prstGeom prst="rect">
+            <a:avLst/>
+          </a:prstGeom>
+          <a:noFill/>
+        </p:spPr>
+        <p:txBody>
+          <a:bodyPr wrap="square">
+            <a:noAutofit/>
+          </a:bodyPr>
+          <a:lstStyle/>
+          <a:p>
+            <a:pPr algn="r">
+              <a:lnSpc>
+                <a:spcPts val="2200"/>
+              </a:lnSpc>
+              <a:defRPr sz="1000" b="0">
+                <a:solidFill>
+                  <a:srgbClr val="666666"/>
+                </a:solidFill>
+                <a:latin typeface="Calibri"/>
+              </a:defRPr>
+            </a:pPr>
+            <a:r>
+              <a:t>learn_verilog_systemverilog / Module 7</a:t>
+            </a:r>
+          </a:p>
+        </p:txBody>
+      </p:sp>
+    </p:spTree>
+  </p:cSld>
+  <p:clrMapOvr>
+    <a:masterClrMapping/>
+  </p:clrMapOvr>
+</p:sld>
+</file>
+
+<file path=ppt/slides/slide37.xml><?xml version="1.0" encoding="utf-8"?>
+<p:sld xmlns:a="http://schemas.openxmlformats.org/drawingml/2006/main" xmlns:p="http://schemas.openxmlformats.org/presentationml/2006/main" xmlns:r="http://schemas.openxmlformats.org/officeDocument/2006/relationships">
+  <p:cSld>
+    <p:spTree>
+      <p:nvGrpSpPr>
+        <p:cNvPr id="1" name=""/>
+        <p:cNvGrpSpPr/>
+        <p:nvPr/>
+      </p:nvGrpSpPr>
+      <p:grpSpPr/>
+      <p:sp>
+        <p:nvSpPr>
+          <p:cNvPr id="2" name="TextBox 1"/>
+          <p:cNvSpPr txBox="1"/>
+          <p:nvPr/>
+        </p:nvSpPr>
+        <p:spPr>
+          <a:xfrm>
+            <a:off x="548640" y="2743200"/>
+            <a:ext cx="11064240" cy="1371600"/>
+          </a:xfrm>
+          <a:prstGeom prst="rect">
+            <a:avLst/>
+          </a:prstGeom>
+          <a:noFill/>
+        </p:spPr>
+        <p:txBody>
+          <a:bodyPr wrap="square">
+            <a:noAutofit/>
+          </a:bodyPr>
+          <a:lstStyle/>
+          <a:p>
+            <a:pPr algn="ctr">
+              <a:lnSpc>
+                <a:spcPts val="2200"/>
+              </a:lnSpc>
+              <a:defRPr sz="3600" b="1">
+                <a:solidFill>
+                  <a:srgbClr val="1A1A2E"/>
+                </a:solidFill>
+                <a:latin typeface="Calibri"/>
+              </a:defRPr>
+            </a:pPr>
+            <a:r>
+              <a:t>Practice &amp; assessment</a:t>
+            </a:r>
+          </a:p>
+        </p:txBody>
+      </p:sp>
+      <p:sp>
+        <p:nvSpPr>
+          <p:cNvPr id="3" name="TextBox 2"/>
+          <p:cNvSpPr txBox="1"/>
+          <p:nvPr/>
+        </p:nvSpPr>
+        <p:spPr>
+          <a:xfrm>
+            <a:off x="548640" y="6355080"/>
+            <a:ext cx="11064240" cy="320040"/>
+          </a:xfrm>
+          <a:prstGeom prst="rect">
+            <a:avLst/>
+          </a:prstGeom>
+          <a:noFill/>
+        </p:spPr>
+        <p:txBody>
+          <a:bodyPr wrap="square">
+            <a:noAutofit/>
+          </a:bodyPr>
+          <a:lstStyle/>
+          <a:p>
+            <a:pPr algn="r">
+              <a:lnSpc>
+                <a:spcPts val="2200"/>
+              </a:lnSpc>
+              <a:defRPr sz="1000" b="0">
+                <a:solidFill>
+                  <a:srgbClr val="666666"/>
+                </a:solidFill>
+                <a:latin typeface="Calibri"/>
+              </a:defRPr>
+            </a:pPr>
+            <a:r>
+              <a:t>learn_verilog_systemverilog / Module 7</a:t>
+            </a:r>
+          </a:p>
+        </p:txBody>
+      </p:sp>
+    </p:spTree>
+  </p:cSld>
+  <p:clrMapOvr>
+    <a:masterClrMapping/>
+  </p:clrMapOvr>
+</p:sld>
+</file>
+
+<file path=ppt/slides/slide38.xml><?xml version="1.0" encoding="utf-8"?>
+<p:sld xmlns:a="http://schemas.openxmlformats.org/drawingml/2006/main" xmlns:p="http://schemas.openxmlformats.org/presentationml/2006/main" xmlns:r="http://schemas.openxmlformats.org/officeDocument/2006/relationships">
+  <p:cSld>
+    <p:spTree>
+      <p:nvGrpSpPr>
+        <p:cNvPr id="1" name=""/>
+        <p:cNvGrpSpPr/>
+        <p:nvPr/>
+      </p:nvGrpSpPr>
+      <p:grpSpPr/>
+      <p:sp>
+        <p:nvSpPr>
+          <p:cNvPr id="2" name="TextBox 1"/>
+          <p:cNvSpPr txBox="1"/>
+          <p:nvPr/>
+        </p:nvSpPr>
+        <p:spPr>
+          <a:xfrm>
+            <a:off x="548640" y="411480"/>
+            <a:ext cx="11064240" cy="777240"/>
+          </a:xfrm>
+          <a:prstGeom prst="rect">
+            <a:avLst/>
+          </a:prstGeom>
+          <a:noFill/>
+        </p:spPr>
+        <p:txBody>
+          <a:bodyPr wrap="square">
+            <a:noAutofit/>
+          </a:bodyPr>
+          <a:lstStyle/>
+          <a:p>
+            <a:pPr>
+              <a:lnSpc>
+                <a:spcPts val="2200"/>
+              </a:lnSpc>
+              <a:defRPr sz="2800" b="1">
+                <a:solidFill>
+                  <a:srgbClr val="1A1A2E"/>
+                </a:solidFill>
+                <a:latin typeface="Calibri"/>
+              </a:defRPr>
+            </a:pPr>
+            <a:r>
+              <a:t>What you should know</a:t>
+            </a:r>
+          </a:p>
+        </p:txBody>
+      </p:sp>
+      <p:sp>
+        <p:nvSpPr>
+          <p:cNvPr id="3" name="TextBox 2"/>
+          <p:cNvSpPr txBox="1"/>
+          <p:nvPr/>
+        </p:nvSpPr>
+        <p:spPr>
+          <a:xfrm>
+            <a:off x="548640" y="1234440"/>
+            <a:ext cx="11064240" cy="4937760"/>
+          </a:xfrm>
+          <a:prstGeom prst="rect">
+            <a:avLst/>
+          </a:prstGeom>
+          <a:noFill/>
+        </p:spPr>
+        <p:txBody>
+          <a:bodyPr wrap="square">
+            <a:noAutofit/>
+          </a:bodyPr>
+          <a:lstStyle/>
+          <a:p>
+            <a:pPr>
+              <a:lnSpc>
+                <a:spcPts val="2200"/>
+              </a:lnSpc>
+              <a:spcAft>
+                <a:spcPts val="1000"/>
+              </a:spcAft>
+              <a:defRPr sz="2000" b="0">
+                <a:solidFill>
+                  <a:srgbClr val="333333"/>
+                </a:solidFill>
+                <a:latin typeface="Calibri"/>
+              </a:defRPr>
+            </a:pPr>
+            <a:r>
+              <a:t>• ✓ Compare the same design across 1364-1995,</a:t>
+            </a:r>
+          </a:p>
+          <a:p>
+            <a:pPr>
+              <a:lnSpc>
+                <a:spcPts val="2200"/>
+              </a:lnSpc>
+              <a:spcAft>
+                <a:spcPts val="1000"/>
+              </a:spcAft>
+              <a:defRPr sz="2000" b="0">
+                <a:solidFill>
+                  <a:srgbClr val="333333"/>
+                </a:solidFill>
+                <a:latin typeface="Calibri"/>
+              </a:defRPr>
+            </a:pPr>
+            <a:r>
+              <a:t>      1364-2001, 1364-2005, and 1800 (design subset) and</a:t>
+            </a:r>
+          </a:p>
+          <a:p>
+            <a:pPr>
+              <a:lnSpc>
+                <a:spcPts val="2200"/>
+              </a:lnSpc>
+              <a:spcAft>
+                <a:spcPts val="1000"/>
+              </a:spcAft>
+              <a:defRPr sz="2000" b="0">
+                <a:solidFill>
+                  <a:srgbClr val="333333"/>
+                </a:solidFill>
+                <a:latin typeface="Calibri"/>
+              </a:defRPr>
+            </a:pPr>
+            <a:r>
+              <a:t>      list…</a:t>
+            </a:r>
+          </a:p>
+          <a:p>
+            <a:pPr>
+              <a:lnSpc>
+                <a:spcPts val="2200"/>
+              </a:lnSpc>
+              <a:spcAft>
+                <a:spcPts val="1000"/>
+              </a:spcAft>
+              <a:defRPr sz="2000" b="0">
+                <a:solidFill>
+                  <a:srgbClr val="333333"/>
+                </a:solidFill>
+                <a:latin typeface="Calibri"/>
+              </a:defRPr>
+            </a:pPr>
+            <a:r>
+              <a:t>• ✓ Compare connectivity style: many ports (1364) vs</a:t>
+            </a:r>
+          </a:p>
+          <a:p>
+            <a:pPr>
+              <a:lnSpc>
+                <a:spcPts val="2200"/>
+              </a:lnSpc>
+              <a:spcAft>
+                <a:spcPts val="1000"/>
+              </a:spcAft>
+              <a:defRPr sz="2000" b="0">
+                <a:solidFill>
+                  <a:srgbClr val="333333"/>
+                </a:solidFill>
+                <a:latin typeface="Calibri"/>
+              </a:defRPr>
+            </a:pPr>
+            <a:r>
+              <a:t>      interface (1800)</a:t>
+            </a:r>
+          </a:p>
+          <a:p>
+            <a:pPr>
+              <a:lnSpc>
+                <a:spcPts val="2200"/>
+              </a:lnSpc>
+              <a:spcAft>
+                <a:spcPts val="1000"/>
+              </a:spcAft>
+              <a:defRPr sz="2000" b="0">
+                <a:solidFill>
+                  <a:srgbClr val="333333"/>
+                </a:solidFill>
+                <a:latin typeface="Calibri"/>
+              </a:defRPr>
+            </a:pPr>
+            <a:r>
+              <a:t>• ✓ Plan and execute migration from 1364 to 1800</a:t>
+            </a:r>
+          </a:p>
+          <a:p>
+            <a:pPr>
+              <a:lnSpc>
+                <a:spcPts val="2200"/>
+              </a:lnSpc>
+              <a:spcAft>
+                <a:spcPts val="1000"/>
+              </a:spcAft>
+              <a:defRPr sz="2000" b="0">
+                <a:solidFill>
+                  <a:srgbClr val="333333"/>
+                </a:solidFill>
+                <a:latin typeface="Calibri"/>
+              </a:defRPr>
+            </a:pPr>
+            <a:r>
+              <a:t>      design subset (or between 1364 revisions) using the…</a:t>
+            </a:r>
+          </a:p>
+          <a:p>
+            <a:pPr>
+              <a:lnSpc>
+                <a:spcPts val="2200"/>
+              </a:lnSpc>
+              <a:spcAft>
+                <a:spcPts val="1000"/>
+              </a:spcAft>
+              <a:defRPr sz="2000" b="0">
+                <a:solidFill>
+                  <a:srgbClr val="333333"/>
+                </a:solidFill>
+                <a:latin typeface="Calibri"/>
+              </a:defRPr>
+            </a:pPr>
+            <a:r>
+              <a:t>• ✓ Choose a project standard (revision and subset)</a:t>
+            </a:r>
+          </a:p>
+          <a:p>
+            <a:pPr>
+              <a:lnSpc>
+                <a:spcPts val="2200"/>
+              </a:lnSpc>
+              <a:spcAft>
+                <a:spcPts val="1000"/>
+              </a:spcAft>
+              <a:defRPr sz="2000" b="0">
+                <a:solidFill>
+                  <a:srgbClr val="333333"/>
+                </a:solidFill>
+                <a:latin typeface="Calibri"/>
+              </a:defRPr>
+            </a:pPr>
+            <a:r>
+              <a:t>      based on tool support and constraints</a:t>
+            </a:r>
+          </a:p>
+          <a:p>
+            <a:pPr>
+              <a:lnSpc>
+                <a:spcPts val="2200"/>
+              </a:lnSpc>
+              <a:spcAft>
+                <a:spcPts val="1000"/>
+              </a:spcAft>
+              <a:defRPr sz="2000" b="0">
+                <a:solidFill>
+                  <a:srgbClr val="333333"/>
+                </a:solidFill>
+                <a:latin typeface="Calibri"/>
+              </a:defRPr>
+            </a:pPr>
+            <a:r>
+              <a:t>• ✓ Use the version-selection checklist for new or</a:t>
+            </a:r>
+          </a:p>
+          <a:p>
+            <a:pPr>
+              <a:lnSpc>
+                <a:spcPts val="2200"/>
+              </a:lnSpc>
+              <a:spcAft>
+                <a:spcPts val="1000"/>
+              </a:spcAft>
+              <a:defRPr sz="2000" b="0">
+                <a:solidFill>
+                  <a:srgbClr val="333333"/>
+                </a:solidFill>
+                <a:latin typeface="Calibri"/>
+              </a:defRPr>
+            </a:pPr>
+            <a:r>
+              <a:t>      existing projects</a:t>
+            </a:r>
+          </a:p>
+          <a:p>
+            <a:pPr>
+              <a:lnSpc>
+                <a:spcPts val="2200"/>
+              </a:lnSpc>
+              <a:spcAft>
+                <a:spcPts val="1000"/>
+              </a:spcAft>
+              <a:defRPr sz="2000" b="0">
+                <a:solidFill>
+                  <a:srgbClr val="333333"/>
+                </a:solidFill>
+                <a:latin typeface="Calibri"/>
+              </a:defRPr>
+            </a:pPr>
+            <a:r>
+              <a:t>• ✓ Describe how to extend the course when a new IEEE</a:t>
+            </a:r>
+          </a:p>
+          <a:p>
+            <a:pPr>
+              <a:lnSpc>
+                <a:spcPts val="2200"/>
+              </a:lnSpc>
+              <a:spcAft>
+                <a:spcPts val="1000"/>
+              </a:spcAft>
+              <a:defRPr sz="2000" b="0">
+                <a:solidFill>
+                  <a:srgbClr val="333333"/>
+                </a:solidFill>
+                <a:latin typeface="Calibri"/>
+              </a:defRPr>
+            </a:pPr>
+            <a:r>
+              <a:t>      1800 revision is released</a:t>
+            </a:r>
+          </a:p>
+        </p:txBody>
+      </p:sp>
+      <p:sp>
+        <p:nvSpPr>
+          <p:cNvPr id="4" name="TextBox 3"/>
+          <p:cNvSpPr txBox="1"/>
+          <p:nvPr/>
+        </p:nvSpPr>
+        <p:spPr>
+          <a:xfrm>
+            <a:off x="548640" y="6355080"/>
+            <a:ext cx="11064240" cy="320040"/>
+          </a:xfrm>
+          <a:prstGeom prst="rect">
+            <a:avLst/>
+          </a:prstGeom>
+          <a:noFill/>
+        </p:spPr>
+        <p:txBody>
+          <a:bodyPr wrap="square">
+            <a:noAutofit/>
+          </a:bodyPr>
+          <a:lstStyle/>
+          <a:p>
+            <a:pPr algn="r">
+              <a:lnSpc>
+                <a:spcPts val="2200"/>
+              </a:lnSpc>
+              <a:defRPr sz="1000" b="0">
+                <a:solidFill>
+                  <a:srgbClr val="666666"/>
+                </a:solidFill>
+                <a:latin typeface="Calibri"/>
+              </a:defRPr>
+            </a:pPr>
+            <a:r>
+              <a:t>learn_verilog_systemverilog / Module 7</a:t>
+            </a:r>
+          </a:p>
+        </p:txBody>
+      </p:sp>
+    </p:spTree>
+  </p:cSld>
+  <p:clrMapOvr>
+    <a:masterClrMapping/>
+  </p:clrMapOvr>
+</p:sld>
+</file>
+
+<file path=ppt/slides/slide39.xml><?xml version="1.0" encoding="utf-8"?>
+<p:sld xmlns:a="http://schemas.openxmlformats.org/drawingml/2006/main" xmlns:p="http://schemas.openxmlformats.org/presentationml/2006/main" xmlns:r="http://schemas.openxmlformats.org/officeDocument/2006/relationships">
+  <p:cSld>
+    <p:spTree>
+      <p:nvGrpSpPr>
+        <p:cNvPr id="1" name=""/>
+        <p:cNvGrpSpPr/>
+        <p:nvPr/>
+      </p:nvGrpSpPr>
+      <p:grpSpPr/>
+      <p:sp>
+        <p:nvSpPr>
+          <p:cNvPr id="2" name="TextBox 1"/>
+          <p:cNvSpPr txBox="1"/>
+          <p:nvPr/>
+        </p:nvSpPr>
+        <p:spPr>
+          <a:xfrm>
+            <a:off x="548640" y="411480"/>
+            <a:ext cx="11064240" cy="777240"/>
+          </a:xfrm>
+          <a:prstGeom prst="rect">
+            <a:avLst/>
+          </a:prstGeom>
+          <a:noFill/>
+        </p:spPr>
+        <p:txBody>
+          <a:bodyPr wrap="square">
+            <a:noAutofit/>
+          </a:bodyPr>
+          <a:lstStyle/>
+          <a:p>
+            <a:pPr>
+              <a:lnSpc>
+                <a:spcPts val="2200"/>
+              </a:lnSpc>
+              <a:defRPr sz="2800" b="1">
+                <a:solidFill>
+                  <a:srgbClr val="1A1A2E"/>
+                </a:solidFill>
+                <a:latin typeface="Calibri"/>
+              </a:defRPr>
+            </a:pPr>
+            <a:r>
+              <a:t>Exercises</a:t>
+            </a:r>
+          </a:p>
+        </p:txBody>
+      </p:sp>
+      <p:sp>
+        <p:nvSpPr>
+          <p:cNvPr id="3" name="TextBox 2"/>
+          <p:cNvSpPr txBox="1"/>
+          <p:nvPr/>
+        </p:nvSpPr>
+        <p:spPr>
+          <a:xfrm>
+            <a:off x="548640" y="1234440"/>
+            <a:ext cx="11064240" cy="4937760"/>
+          </a:xfrm>
+          <a:prstGeom prst="rect">
+            <a:avLst/>
+          </a:prstGeom>
+          <a:noFill/>
+        </p:spPr>
+        <p:txBody>
+          <a:bodyPr wrap="square">
+            <a:noAutofit/>
+          </a:bodyPr>
+          <a:lstStyle/>
+          <a:p>
+            <a:pPr>
+              <a:lnSpc>
+                <a:spcPts val="2200"/>
+              </a:lnSpc>
+              <a:spcAft>
+                <a:spcPts val="1000"/>
+              </a:spcAft>
+              <a:defRPr sz="2000" b="0">
+                <a:solidFill>
+                  <a:srgbClr val="333333"/>
+                </a:solidFill>
+                <a:latin typeface="Calibri"/>
+              </a:defRPr>
+            </a:pPr>
+            <a:r>
+              <a:t>• Side-by-Side Mux</a:t>
+            </a:r>
+          </a:p>
+          <a:p>
+            <a:pPr>
+              <a:lnSpc>
+                <a:spcPts val="2200"/>
+              </a:lnSpc>
+              <a:spcAft>
+                <a:spcPts val="1000"/>
+              </a:spcAft>
+              <a:defRPr sz="2000" b="0">
+                <a:solidFill>
+                  <a:srgbClr val="333333"/>
+                </a:solidFill>
+                <a:latin typeface="Calibri"/>
+              </a:defRPr>
+            </a:pPr>
+            <a:r>
+              <a:t>• Side-by-Side Connectivity</a:t>
+            </a:r>
+          </a:p>
+          <a:p>
+            <a:pPr>
+              <a:lnSpc>
+                <a:spcPts val="2200"/>
+              </a:lnSpc>
+              <a:spcAft>
+                <a:spcPts val="1000"/>
+              </a:spcAft>
+              <a:defRPr sz="2000" b="0">
+                <a:solidFill>
+                  <a:srgbClr val="333333"/>
+                </a:solidFill>
+                <a:latin typeface="Calibri"/>
+              </a:defRPr>
+            </a:pPr>
+            <a:r>
+              <a:t>• Migration One Block</a:t>
+            </a:r>
+          </a:p>
+          <a:p>
+            <a:pPr>
+              <a:lnSpc>
+                <a:spcPts val="2200"/>
+              </a:lnSpc>
+              <a:spcAft>
+                <a:spcPts val="1000"/>
+              </a:spcAft>
+              <a:defRPr sz="2000" b="0">
+                <a:solidFill>
+                  <a:srgbClr val="333333"/>
+                </a:solidFill>
+                <a:latin typeface="Calibri"/>
+              </a:defRPr>
+            </a:pPr>
+            <a:r>
+              <a:t>• Version Selection</a:t>
+            </a:r>
+          </a:p>
+          <a:p>
+            <a:pPr>
+              <a:lnSpc>
+                <a:spcPts val="2200"/>
+              </a:lnSpc>
+              <a:spcAft>
+                <a:spcPts val="1000"/>
+              </a:spcAft>
+              <a:defRPr sz="2000" b="0">
+                <a:solidFill>
+                  <a:srgbClr val="333333"/>
+                </a:solidFill>
+                <a:latin typeface="Calibri"/>
+              </a:defRPr>
+            </a:pPr>
+            <a:r>
+              <a:t>• Version Table</a:t>
+            </a:r>
+          </a:p>
+        </p:txBody>
+      </p:sp>
+      <p:sp>
+        <p:nvSpPr>
+          <p:cNvPr id="4" name="TextBox 3"/>
+          <p:cNvSpPr txBox="1"/>
+          <p:nvPr/>
+        </p:nvSpPr>
+        <p:spPr>
+          <a:xfrm>
+            <a:off x="548640" y="6355080"/>
+            <a:ext cx="11064240" cy="320040"/>
+          </a:xfrm>
+          <a:prstGeom prst="rect">
+            <a:avLst/>
+          </a:prstGeom>
+          <a:noFill/>
+        </p:spPr>
+        <p:txBody>
+          <a:bodyPr wrap="square">
+            <a:noAutofit/>
+          </a:bodyPr>
+          <a:lstStyle/>
+          <a:p>
+            <a:pPr algn="r">
+              <a:lnSpc>
+                <a:spcPts val="2200"/>
+              </a:lnSpc>
+              <a:defRPr sz="1000" b="0">
+                <a:solidFill>
+                  <a:srgbClr val="666666"/>
+                </a:solidFill>
+                <a:latin typeface="Calibri"/>
+              </a:defRPr>
+            </a:pPr>
+            <a:r>
+              <a:t>learn_verilog_systemverilog / Module 7</a:t>
+            </a:r>
+          </a:p>
+        </p:txBody>
+      </p:sp>
+    </p:spTree>
+  </p:cSld>
+  <p:clrMapOvr>
+    <a:masterClrMapping/>
+  </p:clrMapOvr>
+</p:sld>
+</file>
+
 <file path=ppt/slides/slide4.xml><?xml version="1.0" encoding="utf-8"?>
 <p:sld xmlns:a="http://schemas.openxmlformats.org/drawingml/2006/main" xmlns:p="http://schemas.openxmlformats.org/presentationml/2006/main" xmlns:r="http://schemas.openxmlformats.org/officeDocument/2006/relationships">
   <p:cSld>
@@ -6999,6 +11674,453 @@
       <p:sp>
         <p:nvSpPr>
           <p:cNvPr id="5" name="TextBox 4"/>
+          <p:cNvSpPr txBox="1"/>
+          <p:nvPr/>
+        </p:nvSpPr>
+        <p:spPr>
+          <a:xfrm>
+            <a:off x="548640" y="6355080"/>
+            <a:ext cx="11064240" cy="320040"/>
+          </a:xfrm>
+          <a:prstGeom prst="rect">
+            <a:avLst/>
+          </a:prstGeom>
+          <a:noFill/>
+        </p:spPr>
+        <p:txBody>
+          <a:bodyPr wrap="square">
+            <a:noAutofit/>
+          </a:bodyPr>
+          <a:lstStyle/>
+          <a:p>
+            <a:pPr algn="r">
+              <a:lnSpc>
+                <a:spcPts val="2200"/>
+              </a:lnSpc>
+              <a:defRPr sz="1000" b="0">
+                <a:solidFill>
+                  <a:srgbClr val="666666"/>
+                </a:solidFill>
+                <a:latin typeface="Calibri"/>
+              </a:defRPr>
+            </a:pPr>
+            <a:r>
+              <a:t>learn_verilog_systemverilog / Module 7</a:t>
+            </a:r>
+          </a:p>
+        </p:txBody>
+      </p:sp>
+    </p:spTree>
+  </p:cSld>
+  <p:clrMapOvr>
+    <a:masterClrMapping/>
+  </p:clrMapOvr>
+</p:sld>
+</file>
+
+<file path=ppt/slides/slide40.xml><?xml version="1.0" encoding="utf-8"?>
+<p:sld xmlns:a="http://schemas.openxmlformats.org/drawingml/2006/main" xmlns:p="http://schemas.openxmlformats.org/presentationml/2006/main" xmlns:r="http://schemas.openxmlformats.org/officeDocument/2006/relationships">
+  <p:cSld>
+    <p:spTree>
+      <p:nvGrpSpPr>
+        <p:cNvPr id="1" name=""/>
+        <p:cNvGrpSpPr/>
+        <p:nvPr/>
+      </p:nvGrpSpPr>
+      <p:grpSpPr/>
+      <p:sp>
+        <p:nvSpPr>
+          <p:cNvPr id="2" name="TextBox 1"/>
+          <p:cNvSpPr txBox="1"/>
+          <p:nvPr/>
+        </p:nvSpPr>
+        <p:spPr>
+          <a:xfrm>
+            <a:off x="548640" y="411480"/>
+            <a:ext cx="11064240" cy="777240"/>
+          </a:xfrm>
+          <a:prstGeom prst="rect">
+            <a:avLst/>
+          </a:prstGeom>
+          <a:noFill/>
+        </p:spPr>
+        <p:txBody>
+          <a:bodyPr wrap="square">
+            <a:noAutofit/>
+          </a:bodyPr>
+          <a:lstStyle/>
+          <a:p>
+            <a:pPr>
+              <a:lnSpc>
+                <a:spcPts val="2200"/>
+              </a:lnSpc>
+              <a:defRPr sz="2800" b="1">
+                <a:solidFill>
+                  <a:srgbClr val="1A1A2E"/>
+                </a:solidFill>
+                <a:latin typeface="Calibri"/>
+              </a:defRPr>
+            </a:pPr>
+            <a:r>
+              <a:t>Exercises</a:t>
+            </a:r>
+          </a:p>
+        </p:txBody>
+      </p:sp>
+      <p:sp>
+        <p:nvSpPr>
+          <p:cNvPr id="3" name="TextBox 2"/>
+          <p:cNvSpPr txBox="1"/>
+          <p:nvPr/>
+        </p:nvSpPr>
+        <p:spPr>
+          <a:xfrm>
+            <a:off x="548640" y="1234440"/>
+            <a:ext cx="11064240" cy="4937760"/>
+          </a:xfrm>
+          <a:prstGeom prst="rect">
+            <a:avLst/>
+          </a:prstGeom>
+          <a:noFill/>
+        </p:spPr>
+        <p:txBody>
+          <a:bodyPr wrap="square">
+            <a:noAutofit/>
+          </a:bodyPr>
+          <a:lstStyle/>
+          <a:p>
+            <a:pPr>
+              <a:lnSpc>
+                <a:spcPts val="2200"/>
+              </a:lnSpc>
+              <a:spcAft>
+                <a:spcPts val="1000"/>
+              </a:spcAft>
+              <a:defRPr sz="2000" b="0">
+                <a:solidFill>
+                  <a:srgbClr val="333333"/>
+                </a:solidFill>
+                <a:latin typeface="Calibri"/>
+              </a:defRPr>
+            </a:pPr>
+            <a:r>
+              <a:t>• Migrating Everything at Once</a:t>
+            </a:r>
+          </a:p>
+          <a:p>
+            <a:pPr>
+              <a:lnSpc>
+                <a:spcPts val="2200"/>
+              </a:lnSpc>
+              <a:spcAft>
+                <a:spcPts val="1000"/>
+              </a:spcAft>
+              <a:defRPr sz="2000" b="0">
+                <a:solidFill>
+                  <a:srgbClr val="333333"/>
+                </a:solidFill>
+                <a:latin typeface="Calibri"/>
+              </a:defRPr>
+            </a:pPr>
+            <a:r>
+              <a:t>• Ignoring Tool Support</a:t>
+            </a:r>
+          </a:p>
+          <a:p>
+            <a:pPr>
+              <a:lnSpc>
+                <a:spcPts val="2200"/>
+              </a:lnSpc>
+              <a:spcAft>
+                <a:spcPts val="1000"/>
+              </a:spcAft>
+              <a:defRPr sz="2000" b="0">
+                <a:solidFill>
+                  <a:srgbClr val="333333"/>
+                </a:solidFill>
+                <a:latin typeface="Calibri"/>
+              </a:defRPr>
+            </a:pPr>
+            <a:r>
+              <a:t>• Breaking Interfaces During Migration</a:t>
+            </a:r>
+          </a:p>
+          <a:p>
+            <a:pPr>
+              <a:lnSpc>
+                <a:spcPts val="2200"/>
+              </a:lnSpc>
+              <a:spcAft>
+                <a:spcPts val="1000"/>
+              </a:spcAft>
+              <a:defRPr sz="2000" b="0">
+                <a:solidFill>
+                  <a:srgbClr val="333333"/>
+                </a:solidFill>
+                <a:latin typeface="Calibri"/>
+              </a:defRPr>
+            </a:pPr>
+            <a:r>
+              <a:t>• Mixing Revisions in One File</a:t>
+            </a:r>
+          </a:p>
+          <a:p>
+            <a:pPr>
+              <a:lnSpc>
+                <a:spcPts val="2200"/>
+              </a:lnSpc>
+              <a:spcAft>
+                <a:spcPts val="1000"/>
+              </a:spcAft>
+              <a:defRPr sz="2000" b="0">
+                <a:solidFill>
+                  <a:srgbClr val="333333"/>
+                </a:solidFill>
+                <a:latin typeface="Calibri"/>
+              </a:defRPr>
+            </a:pPr>
+            <a:r>
+              <a:t>• Forgetting to Test After Migration</a:t>
+            </a:r>
+          </a:p>
+        </p:txBody>
+      </p:sp>
+      <p:sp>
+        <p:nvSpPr>
+          <p:cNvPr id="4" name="TextBox 3"/>
+          <p:cNvSpPr txBox="1"/>
+          <p:nvPr/>
+        </p:nvSpPr>
+        <p:spPr>
+          <a:xfrm>
+            <a:off x="548640" y="6355080"/>
+            <a:ext cx="11064240" cy="320040"/>
+          </a:xfrm>
+          <a:prstGeom prst="rect">
+            <a:avLst/>
+          </a:prstGeom>
+          <a:noFill/>
+        </p:spPr>
+        <p:txBody>
+          <a:bodyPr wrap="square">
+            <a:noAutofit/>
+          </a:bodyPr>
+          <a:lstStyle/>
+          <a:p>
+            <a:pPr algn="r">
+              <a:lnSpc>
+                <a:spcPts val="2200"/>
+              </a:lnSpc>
+              <a:defRPr sz="1000" b="0">
+                <a:solidFill>
+                  <a:srgbClr val="666666"/>
+                </a:solidFill>
+                <a:latin typeface="Calibri"/>
+              </a:defRPr>
+            </a:pPr>
+            <a:r>
+              <a:t>learn_verilog_systemverilog / Module 7</a:t>
+            </a:r>
+          </a:p>
+        </p:txBody>
+      </p:sp>
+    </p:spTree>
+  </p:cSld>
+  <p:clrMapOvr>
+    <a:masterClrMapping/>
+  </p:clrMapOvr>
+</p:sld>
+</file>
+
+<file path=ppt/slides/slide41.xml><?xml version="1.0" encoding="utf-8"?>
+<p:sld xmlns:a="http://schemas.openxmlformats.org/drawingml/2006/main" xmlns:p="http://schemas.openxmlformats.org/presentationml/2006/main" xmlns:r="http://schemas.openxmlformats.org/officeDocument/2006/relationships">
+  <p:cSld>
+    <p:spTree>
+      <p:nvGrpSpPr>
+        <p:cNvPr id="1" name=""/>
+        <p:cNvGrpSpPr/>
+        <p:nvPr/>
+      </p:nvGrpSpPr>
+      <p:grpSpPr/>
+      <p:sp>
+        <p:nvSpPr>
+          <p:cNvPr id="2" name="TextBox 1"/>
+          <p:cNvSpPr txBox="1"/>
+          <p:nvPr/>
+        </p:nvSpPr>
+        <p:spPr>
+          <a:xfrm>
+            <a:off x="548640" y="411480"/>
+            <a:ext cx="11064240" cy="777240"/>
+          </a:xfrm>
+          <a:prstGeom prst="rect">
+            <a:avLst/>
+          </a:prstGeom>
+          <a:noFill/>
+        </p:spPr>
+        <p:txBody>
+          <a:bodyPr wrap="square">
+            <a:noAutofit/>
+          </a:bodyPr>
+          <a:lstStyle/>
+          <a:p>
+            <a:pPr>
+              <a:lnSpc>
+                <a:spcPts val="2200"/>
+              </a:lnSpc>
+              <a:defRPr sz="2800" b="1">
+                <a:solidFill>
+                  <a:srgbClr val="1A1A2E"/>
+                </a:solidFill>
+                <a:latin typeface="Calibri"/>
+              </a:defRPr>
+            </a:pPr>
+            <a:r>
+              <a:t>Summary &amp; next steps</a:t>
+            </a:r>
+          </a:p>
+        </p:txBody>
+      </p:sp>
+      <p:sp>
+        <p:nvSpPr>
+          <p:cNvPr id="3" name="TextBox 2"/>
+          <p:cNvSpPr txBox="1"/>
+          <p:nvPr/>
+        </p:nvSpPr>
+        <p:spPr>
+          <a:xfrm>
+            <a:off x="548640" y="1234440"/>
+            <a:ext cx="11064240" cy="4937760"/>
+          </a:xfrm>
+          <a:prstGeom prst="rect">
+            <a:avLst/>
+          </a:prstGeom>
+          <a:noFill/>
+        </p:spPr>
+        <p:txBody>
+          <a:bodyPr wrap="square">
+            <a:noAutofit/>
+          </a:bodyPr>
+          <a:lstStyle/>
+          <a:p>
+            <a:pPr>
+              <a:lnSpc>
+                <a:spcPts val="2200"/>
+              </a:lnSpc>
+              <a:spcAft>
+                <a:spcPts val="1000"/>
+              </a:spcAft>
+              <a:defRPr sz="2000" b="0">
+                <a:solidFill>
+                  <a:srgbClr val="333333"/>
+                </a:solidFill>
+                <a:latin typeface="Calibri"/>
+              </a:defRPr>
+            </a:pPr>
+            <a:r>
+              <a:t>• Compare Verilog and SystemVerilog across IEEE</a:t>
+            </a:r>
+          </a:p>
+          <a:p>
+            <a:pPr>
+              <a:lnSpc>
+                <a:spcPts val="2200"/>
+              </a:lnSpc>
+              <a:spcAft>
+                <a:spcPts val="1000"/>
+              </a:spcAft>
+              <a:defRPr sz="2000" b="0">
+                <a:solidFill>
+                  <a:srgbClr val="333333"/>
+                </a:solidFill>
+                <a:latin typeface="Calibri"/>
+              </a:defRPr>
+            </a:pPr>
+            <a:r>
+              <a:t>      versions side-by-side, plan migration between</a:t>
+            </a:r>
+          </a:p>
+          <a:p>
+            <a:pPr>
+              <a:lnSpc>
+                <a:spcPts val="2200"/>
+              </a:lnSpc>
+              <a:spcAft>
+                <a:spcPts val="1000"/>
+              </a:spcAft>
+              <a:defRPr sz="2000" b="0">
+                <a:solidFill>
+                  <a:srgbClr val="333333"/>
+                </a:solidFill>
+                <a:latin typeface="Calibri"/>
+              </a:defRPr>
+            </a:pPr>
+            <a:r>
+              <a:t>      standar…</a:t>
+            </a:r>
+          </a:p>
+          <a:p>
+            <a:pPr>
+              <a:lnSpc>
+                <a:spcPts val="2200"/>
+              </a:lnSpc>
+              <a:spcAft>
+                <a:spcPts val="1000"/>
+              </a:spcAft>
+              <a:defRPr sz="2000" b="0">
+                <a:solidFill>
+                  <a:srgbClr val="333333"/>
+                </a:solidFill>
+                <a:latin typeface="Calibri"/>
+              </a:defRPr>
+            </a:pPr>
+            <a:r>
+              <a:t>• Complete module7/CHECKLIST.md</a:t>
+            </a:r>
+          </a:p>
+          <a:p>
+            <a:pPr>
+              <a:lnSpc>
+                <a:spcPts val="2200"/>
+              </a:lnSpc>
+              <a:spcAft>
+                <a:spcPts val="1000"/>
+              </a:spcAft>
+              <a:defRPr sz="2000" b="0">
+                <a:solidFill>
+                  <a:srgbClr val="333333"/>
+                </a:solidFill>
+                <a:latin typeface="Calibri"/>
+              </a:defRPr>
+            </a:pPr>
+            <a:r>
+              <a:t>• Review module7/EXAMPLES.md and run each lab</a:t>
+            </a:r>
+          </a:p>
+          <a:p>
+            <a:pPr>
+              <a:lnSpc>
+                <a:spcPts val="2200"/>
+              </a:lnSpc>
+              <a:spcAft>
+                <a:spcPts val="1000"/>
+              </a:spcAft>
+              <a:defRPr sz="2000" b="0">
+                <a:solidFill>
+                  <a:srgbClr val="333333"/>
+                </a:solidFill>
+                <a:latin typeface="Calibri"/>
+              </a:defRPr>
+            </a:pPr>
+            <a:r>
+              <a:t>• Next: Next module in course</a:t>
+            </a:r>
+          </a:p>
+        </p:txBody>
+      </p:sp>
+      <p:sp>
+        <p:nvSpPr>
+          <p:cNvPr id="4" name="TextBox 3"/>
           <p:cNvSpPr txBox="1"/>
           <p:nvPr/>
         </p:nvSpPr>
@@ -7244,7 +12366,7 @@
               </a:defRPr>
             </a:pPr>
             <a:r>
-              <a:t>Syllabus topics</a:t>
+              <a:t>How to learn this module</a:t>
             </a:r>
           </a:p>
         </p:txBody>
@@ -7340,7 +12462,7 @@
               </a:defRPr>
             </a:pPr>
             <a:r>
-              <a:t>1. Side-by-Side Comparison: Same Design Across Versions</a:t>
+              <a:t>Suggested learning path (1/2)</a:t>
             </a:r>
           </a:p>
         </p:txBody>
@@ -7382,7 +12504,197 @@
               </a:defRPr>
             </a:pPr>
             <a:r>
-              <a:t>• See docs/MODULE7.md</a:t>
+              <a:t>• Skim this document — Goal, Overview, and Topics</a:t>
+            </a:r>
+          </a:p>
+          <a:p>
+            <a:pPr>
+              <a:lnSpc>
+                <a:spcPts val="2200"/>
+              </a:lnSpc>
+              <a:spcAft>
+                <a:spcPts val="1000"/>
+              </a:spcAft>
+              <a:defRPr sz="2000" b="0">
+                <a:solidFill>
+                  <a:srgbClr val="333333"/>
+                </a:solidFill>
+                <a:latin typeface="Calibri"/>
+              </a:defRPr>
+            </a:pPr>
+            <a:r>
+              <a:t>      Covered set the IEEE scope for Module 7.</a:t>
+            </a:r>
+          </a:p>
+          <a:p>
+            <a:pPr>
+              <a:lnSpc>
+                <a:spcPts val="2200"/>
+              </a:lnSpc>
+              <a:spcAft>
+                <a:spcPts val="1000"/>
+              </a:spcAft>
+              <a:defRPr sz="2000" b="0">
+                <a:solidFill>
+                  <a:srgbClr val="333333"/>
+                </a:solidFill>
+                <a:latin typeface="Calibri"/>
+              </a:defRPr>
+            </a:pPr>
+            <a:r>
+              <a:t>• Study design architecture — See how DUTs, examples,</a:t>
+            </a:r>
+          </a:p>
+          <a:p>
+            <a:pPr>
+              <a:lnSpc>
+                <a:spcPts val="2200"/>
+              </a:lnSpc>
+              <a:spcAft>
+                <a:spcPts val="1000"/>
+              </a:spcAft>
+              <a:defRPr sz="2000" b="0">
+                <a:solidFill>
+                  <a:srgbClr val="333333"/>
+                </a:solidFill>
+                <a:latin typeface="Calibri"/>
+              </a:defRPr>
+            </a:pPr>
+            <a:r>
+              <a:t>      and testbenches fit together under `module7/`.</a:t>
+            </a:r>
+          </a:p>
+          <a:p>
+            <a:pPr>
+              <a:lnSpc>
+                <a:spcPts val="2200"/>
+              </a:lnSpc>
+              <a:spcAft>
+                <a:spcPts val="1000"/>
+              </a:spcAft>
+              <a:defRPr sz="2000" b="0">
+                <a:solidFill>
+                  <a:srgbClr val="333333"/>
+                </a:solidFill>
+                <a:latin typeface="Calibri"/>
+              </a:defRPr>
+            </a:pPr>
+            <a:r>
+              <a:t>• Work through labs in order — Open</a:t>
+            </a:r>
+          </a:p>
+          <a:p>
+            <a:pPr>
+              <a:lnSpc>
+                <a:spcPts val="2200"/>
+              </a:lnSpc>
+              <a:spcAft>
+                <a:spcPts val="1000"/>
+              </a:spcAft>
+              <a:defRPr sz="2000" b="0">
+                <a:solidFill>
+                  <a:srgbClr val="333333"/>
+                </a:solidFill>
+                <a:latin typeface="Calibri"/>
+              </a:defRPr>
+            </a:pPr>
+            <a:r>
+              <a:t>      `module7/EXAMPLES.md` and run each `make clean &amp;&amp;</a:t>
+            </a:r>
+          </a:p>
+          <a:p>
+            <a:pPr>
+              <a:lnSpc>
+                <a:spcPts val="2200"/>
+              </a:lnSpc>
+              <a:spcAft>
+                <a:spcPts val="1000"/>
+              </a:spcAft>
+              <a:defRPr sz="2000" b="0">
+                <a:solidFill>
+                  <a:srgbClr val="333333"/>
+                </a:solidFill>
+                <a:latin typeface="Calibri"/>
+              </a:defRPr>
+            </a:pPr>
+            <a:r>
+              <a:t>      make run` from…</a:t>
+            </a:r>
+          </a:p>
+          <a:p>
+            <a:pPr>
+              <a:lnSpc>
+                <a:spcPts val="2200"/>
+              </a:lnSpc>
+              <a:spcAft>
+                <a:spcPts val="1000"/>
+              </a:spcAft>
+              <a:defRPr sz="2000" b="0">
+                <a:solidFill>
+                  <a:srgbClr val="333333"/>
+                </a:solidFill>
+                <a:latin typeface="Calibri"/>
+              </a:defRPr>
+            </a:pPr>
+            <a:r>
+              <a:t>• Run the full module script — `./scripts/module7.sh`</a:t>
+            </a:r>
+          </a:p>
+          <a:p>
+            <a:pPr>
+              <a:lnSpc>
+                <a:spcPts val="2200"/>
+              </a:lnSpc>
+              <a:spcAft>
+                <a:spcPts val="1000"/>
+              </a:spcAft>
+              <a:defRPr sz="2000" b="0">
+                <a:solidFill>
+                  <a:srgbClr val="333333"/>
+                </a:solidFill>
+                <a:latin typeface="Calibri"/>
+              </a:defRPr>
+            </a:pPr>
+            <a:r>
+              <a:t>      from the repo root to simulate all examples and…</a:t>
+            </a:r>
+          </a:p>
+          <a:p>
+            <a:pPr>
+              <a:lnSpc>
+                <a:spcPts val="2200"/>
+              </a:lnSpc>
+              <a:spcAft>
+                <a:spcPts val="1000"/>
+              </a:spcAft>
+              <a:defRPr sz="2000" b="0">
+                <a:solidFill>
+                  <a:srgbClr val="333333"/>
+                </a:solidFill>
+                <a:latin typeface="Calibri"/>
+              </a:defRPr>
+            </a:pPr>
+            <a:r>
+              <a:t>• Complete the exercises — Try each exercise in this</a:t>
+            </a:r>
+          </a:p>
+          <a:p>
+            <a:pPr>
+              <a:lnSpc>
+                <a:spcPts val="2200"/>
+              </a:lnSpc>
+              <a:spcAft>
+                <a:spcPts val="1000"/>
+              </a:spcAft>
+              <a:defRPr sz="2000" b="0">
+                <a:solidFill>
+                  <a:srgbClr val="333333"/>
+                </a:solidFill>
+                <a:latin typeface="Calibri"/>
+              </a:defRPr>
+            </a:pPr>
+            <a:r>
+              <a:t>      document before reading solutions or peeking at…</a:t>
             </a:r>
           </a:p>
         </p:txBody>
@@ -7452,8 +12764,8 @@
         </p:nvSpPr>
         <p:spPr>
           <a:xfrm>
-            <a:off x="548640" y="2743200"/>
-            <a:ext cx="11064240" cy="1371600"/>
+            <a:off x="548640" y="411480"/>
+            <a:ext cx="11064240" cy="777240"/>
           </a:xfrm>
           <a:prstGeom prst="rect">
             <a:avLst/>
@@ -7466,11 +12778,11 @@
           </a:bodyPr>
           <a:lstStyle/>
           <a:p>
-            <a:pPr algn="ctr">
-              <a:lnSpc>
-                <a:spcPts val="2200"/>
-              </a:lnSpc>
-              <a:defRPr sz="3600" b="1">
+            <a:pPr>
+              <a:lnSpc>
+                <a:spcPts val="2200"/>
+              </a:lnSpc>
+              <a:defRPr sz="2800" b="1">
                 <a:solidFill>
                   <a:srgbClr val="1A1A2E"/>
                 </a:solidFill>
@@ -7478,7 +12790,7 @@
               </a:defRPr>
             </a:pPr>
             <a:r>
-              <a:t>Hands-on examples</a:t>
+              <a:t>Suggested learning path (2/2)</a:t>
             </a:r>
           </a:p>
         </p:txBody>
@@ -7486,6 +12798,143 @@
       <p:sp>
         <p:nvSpPr>
           <p:cNvPr id="3" name="TextBox 2"/>
+          <p:cNvSpPr txBox="1"/>
+          <p:nvPr/>
+        </p:nvSpPr>
+        <p:spPr>
+          <a:xfrm>
+            <a:off x="548640" y="1234440"/>
+            <a:ext cx="11064240" cy="4937760"/>
+          </a:xfrm>
+          <a:prstGeom prst="rect">
+            <a:avLst/>
+          </a:prstGeom>
+          <a:noFill/>
+        </p:spPr>
+        <p:txBody>
+          <a:bodyPr wrap="square">
+            <a:noAutofit/>
+          </a:bodyPr>
+          <a:lstStyle/>
+          <a:p>
+            <a:pPr>
+              <a:lnSpc>
+                <a:spcPts val="2200"/>
+              </a:lnSpc>
+              <a:spcAft>
+                <a:spcPts val="1000"/>
+              </a:spcAft>
+              <a:defRPr sz="2000" b="0">
+                <a:solidFill>
+                  <a:srgbClr val="333333"/>
+                </a:solidFill>
+                <a:latin typeface="Calibri"/>
+              </a:defRPr>
+            </a:pPr>
+            <a:r>
+              <a:t>• Compare side-by-side — Open 1364 and 1800 versions</a:t>
+            </a:r>
+          </a:p>
+          <a:p>
+            <a:pPr>
+              <a:lnSpc>
+                <a:spcPts val="2200"/>
+              </a:lnSpc>
+              <a:spcAft>
+                <a:spcPts val="1000"/>
+              </a:spcAft>
+              <a:defRPr sz="2000" b="0">
+                <a:solidFill>
+                  <a:srgbClr val="333333"/>
+                </a:solidFill>
+                <a:latin typeface="Calibri"/>
+              </a:defRPr>
+            </a:pPr>
+            <a:r>
+              <a:t>      of the same design and note port style, types, a…</a:t>
+            </a:r>
+          </a:p>
+          <a:p>
+            <a:pPr>
+              <a:lnSpc>
+                <a:spcPts val="2200"/>
+              </a:lnSpc>
+              <a:spcAft>
+                <a:spcPts val="1000"/>
+              </a:spcAft>
+              <a:defRPr sz="2000" b="0">
+                <a:solidFill>
+                  <a:srgbClr val="333333"/>
+                </a:solidFill>
+                <a:latin typeface="Calibri"/>
+              </a:defRPr>
+            </a:pPr>
+            <a:r>
+              <a:t>• Review Common Pitfalls — Can you explain each</a:t>
+            </a:r>
+          </a:p>
+          <a:p>
+            <a:pPr>
+              <a:lnSpc>
+                <a:spcPts val="2200"/>
+              </a:lnSpc>
+              <a:spcAft>
+                <a:spcPts val="1000"/>
+              </a:spcAft>
+              <a:defRPr sz="2000" b="0">
+                <a:solidFill>
+                  <a:srgbClr val="333333"/>
+                </a:solidFill>
+                <a:latin typeface="Calibri"/>
+              </a:defRPr>
+            </a:pPr>
+            <a:r>
+              <a:t>      mistake and the fix?</a:t>
+            </a:r>
+          </a:p>
+          <a:p>
+            <a:pPr>
+              <a:lnSpc>
+                <a:spcPts val="2200"/>
+              </a:lnSpc>
+              <a:spcAft>
+                <a:spcPts val="1000"/>
+              </a:spcAft>
+              <a:defRPr sz="2000" b="0">
+                <a:solidFill>
+                  <a:srgbClr val="333333"/>
+                </a:solidFill>
+                <a:latin typeface="Calibri"/>
+              </a:defRPr>
+            </a:pPr>
+            <a:r>
+              <a:t>• Self-check — Use `module7/CHECKLIST.md` before</a:t>
+            </a:r>
+          </a:p>
+          <a:p>
+            <a:pPr>
+              <a:lnSpc>
+                <a:spcPts val="2200"/>
+              </a:lnSpc>
+              <a:spcAft>
+                <a:spcPts val="1000"/>
+              </a:spcAft>
+              <a:defRPr sz="2000" b="0">
+                <a:solidFill>
+                  <a:srgbClr val="333333"/>
+                </a:solidFill>
+                <a:latin typeface="Calibri"/>
+              </a:defRPr>
+            </a:pPr>
+            <a:r>
+              <a:t>      starting the next module.</a:t>
+            </a:r>
+          </a:p>
+        </p:txBody>
+      </p:sp>
+      <p:sp>
+        <p:nvSpPr>
+          <p:cNvPr id="4" name="TextBox 3"/>
           <p:cNvSpPr txBox="1"/>
           <p:nvPr/>
         </p:nvSpPr>
@@ -7548,8 +12997,8 @@
         </p:nvSpPr>
         <p:spPr>
           <a:xfrm>
-            <a:off x="548640" y="411480"/>
-            <a:ext cx="11064240" cy="777240"/>
+            <a:off x="548640" y="2743200"/>
+            <a:ext cx="11064240" cy="1371600"/>
           </a:xfrm>
           <a:prstGeom prst="rect">
             <a:avLst/>
@@ -7562,11 +13011,11 @@
           </a:bodyPr>
           <a:lstStyle/>
           <a:p>
-            <a:pPr>
-              <a:lnSpc>
-                <a:spcPts val="2200"/>
-              </a:lnSpc>
-              <a:defRPr sz="2800" b="1">
+            <a:pPr algn="ctr">
+              <a:lnSpc>
+                <a:spcPts val="2200"/>
+              </a:lnSpc>
+              <a:defRPr sz="3600" b="1">
                 <a:solidFill>
                   <a:srgbClr val="1A1A2E"/>
                 </a:solidFill>
@@ -7574,7 +13023,7 @@
               </a:defRPr>
             </a:pPr>
             <a:r>
-              <a:t>Module 7 toolchain check</a:t>
+              <a:t>Syllabus topics</a:t>
             </a:r>
           </a:p>
         </p:txBody>
@@ -7582,93 +13031,6 @@
       <p:sp>
         <p:nvSpPr>
           <p:cNvPr id="3" name="TextBox 2"/>
-          <p:cNvSpPr txBox="1"/>
-          <p:nvPr/>
-        </p:nvSpPr>
-        <p:spPr>
-          <a:xfrm>
-            <a:off x="548640" y="1051560"/>
-            <a:ext cx="11064240" cy="914400"/>
-          </a:xfrm>
-          <a:prstGeom prst="rect">
-            <a:avLst/>
-          </a:prstGeom>
-          <a:solidFill>
-            <a:srgbClr val="F4F4F4"/>
-          </a:solidFill>
-        </p:spPr>
-        <p:txBody>
-          <a:bodyPr wrap="square">
-            <a:noAutofit/>
-          </a:bodyPr>
-          <a:lstStyle/>
-          <a:p>
-            <a:pPr>
-              <a:lnSpc>
-                <a:spcPts val="2200"/>
-              </a:lnSpc>
-              <a:spcAft>
-                <a:spcPts val="200"/>
-              </a:spcAft>
-              <a:defRPr sz="2000" b="0">
-                <a:solidFill>
-                  <a:srgbClr val="333333"/>
-                </a:solidFill>
-                <a:latin typeface="Consolas"/>
-              </a:defRPr>
-            </a:pPr>
-            <a:r>
-              <a:t>$ command -v iverilog &gt;/dev/null &amp;&amp; echo "Toolchain ready: $(iverilog</a:t>
-            </a:r>
-          </a:p>
-          <a:p>
-            <a:pPr>
-              <a:lnSpc>
-                <a:spcPts val="2200"/>
-              </a:lnSpc>
-              <a:spcAft>
-                <a:spcPts val="200"/>
-              </a:spcAft>
-              <a:defRPr sz="2000" b="0">
-                <a:solidFill>
-                  <a:srgbClr val="333333"/>
-                </a:solidFill>
-                <a:latin typeface="Consolas"/>
-              </a:defRPr>
-            </a:pPr>
-            <a:r>
-              <a:t>      -V 2&gt;&amp;1 | head -1)"</a:t>
-            </a:r>
-          </a:p>
-        </p:txBody>
-      </p:sp>
-      <p:pic>
-        <p:nvPicPr>
-          <p:cNvPr id="4" name="Picture 3" descr="module7_check.png"/>
-          <p:cNvPicPr>
-            <a:picLocks noChangeAspect="1"/>
-          </p:cNvPicPr>
-          <p:nvPr/>
-        </p:nvPicPr>
-        <p:blipFill>
-          <a:blip r:embed="rId2"/>
-          <a:stretch>
-            <a:fillRect/>
-          </a:stretch>
-        </p:blipFill>
-        <p:spPr>
-          <a:xfrm>
-            <a:off x="548640" y="1965960"/>
-            <a:ext cx="7071358" cy="3977639"/>
-          </a:xfrm>
-          <a:prstGeom prst="rect">
-            <a:avLst/>
-          </a:prstGeom>
-        </p:spPr>
-      </p:pic>
-      <p:sp>
-        <p:nvSpPr>
-          <p:cNvPr id="5" name="TextBox 4"/>
           <p:cNvSpPr txBox="1"/>
           <p:nvPr/>
         </p:nvSpPr>
